--- a/docs/presentation/Migration_Wizard_Praktikum_Presentation.pptx
+++ b/docs/presentation/Migration_Wizard_Praktikum_Presentation.pptx
@@ -5,10 +5,10 @@
     <p:sldMasterId id="2147483651" r:id="rId1"/>
   </p:sldMasterIdLst>
   <p:notesMasterIdLst>
-    <p:notesMasterId r:id="rId28"/>
+    <p:notesMasterId r:id="rId29"/>
   </p:notesMasterIdLst>
   <p:handoutMasterIdLst>
-    <p:handoutMasterId r:id="rId29"/>
+    <p:handoutMasterId r:id="rId30"/>
   </p:handoutMasterIdLst>
   <p:sldIdLst>
     <p:sldId id="256" r:id="rId2"/>
@@ -30,14 +30,14 @@
     <p:sldId id="272" r:id="rId18"/>
     <p:sldId id="273" r:id="rId19"/>
     <p:sldId id="274" r:id="rId20"/>
-    <p:sldId id="282" r:id="rId34"/>
-    <p:sldId id="275" r:id="rId21"/>
-    <p:sldId id="276" r:id="rId22"/>
-    <p:sldId id="277" r:id="rId23"/>
+    <p:sldId id="282" r:id="rId21"/>
+    <p:sldId id="275" r:id="rId22"/>
+    <p:sldId id="283" r:id="rId23"/>
     <p:sldId id="278" r:id="rId24"/>
     <p:sldId id="279" r:id="rId25"/>
-    <p:sldId id="280" r:id="rId26"/>
-    <p:sldId id="281" r:id="rId27"/>
+    <p:sldId id="284" r:id="rId26"/>
+    <p:sldId id="280" r:id="rId27"/>
+    <p:sldId id="281" r:id="rId28"/>
   </p:sldIdLst>
   <p:sldSz cx="12192000" cy="6858000"/>
   <p:notesSz cx="6797675" cy="9928225"/>
@@ -1994,6 +1994,119 @@
               <a:defRPr/>
             </a:pPr>
             <a:r>
+              <a:rPr lang="en-US" sz="1200" b="0" i="0" dirty="0">
+                <a:solidFill>
+                  <a:srgbClr val="1A1A1A"/>
+                </a:solidFill>
+                <a:latin typeface="Segoe UI"/>
+              </a:rPr>
+              <a:t>New capabilities with no proof-of-concept equivalent: settings/wallpaper migration, desktop shortcuts, full reset/undo, completeness scoring.</a:t>
+            </a:r>
+          </a:p>
+          <a:p>
+            <a:endParaRPr lang="en-GH" dirty="0"/>
+          </a:p>
+        </p:txBody>
+      </p:sp>
+      <p:sp>
+        <p:nvSpPr>
+          <p:cNvPr id="4" name="Slide Number Placeholder 3"/>
+          <p:cNvSpPr>
+            <a:spLocks noGrp="1"/>
+          </p:cNvSpPr>
+          <p:nvPr>
+            <p:ph type="sldNum" sz="quarter" idx="5"/>
+          </p:nvPr>
+        </p:nvSpPr>
+        <p:spPr/>
+        <p:txBody>
+          <a:bodyPr/>
+          <a:lstStyle/>
+          <a:p>
+            <a:fld id="{412C2970-D838-4E16-9F7E-5362C8D6E639}" type="slidenum">
+              <a:rPr lang="en-US" smtClean="0"/>
+              <a:pPr/>
+              <a:t>16</a:t>
+            </a:fld>
+            <a:endParaRPr lang="en-US"/>
+          </a:p>
+        </p:txBody>
+      </p:sp>
+    </p:spTree>
+    <p:extLst>
+      <p:ext uri="{BB962C8B-B14F-4D97-AF65-F5344CB8AC3E}">
+        <p14:creationId xmlns:p14="http://schemas.microsoft.com/office/powerpoint/2010/main" val="2073364826"/>
+      </p:ext>
+    </p:extLst>
+  </p:cSld>
+  <p:clrMapOvr>
+    <a:masterClrMapping/>
+  </p:clrMapOvr>
+</p:notes>
+</file>
+
+<file path=ppt/notesSlides/notesSlide3.xml><?xml version="1.0" encoding="utf-8"?>
+<p:notes xmlns:a="http://schemas.openxmlformats.org/drawingml/2006/main" xmlns:r="http://schemas.openxmlformats.org/officeDocument/2006/relationships" xmlns:p="http://schemas.openxmlformats.org/presentationml/2006/main">
+  <p:cSld>
+    <p:spTree>
+      <p:nvGrpSpPr>
+        <p:cNvPr id="1" name=""/>
+        <p:cNvGrpSpPr/>
+        <p:nvPr/>
+      </p:nvGrpSpPr>
+      <p:grpSpPr>
+        <a:xfrm>
+          <a:off x="0" y="0"/>
+          <a:ext cx="0" cy="0"/>
+          <a:chOff x="0" y="0"/>
+          <a:chExt cx="0" cy="0"/>
+        </a:xfrm>
+      </p:grpSpPr>
+      <p:sp>
+        <p:nvSpPr>
+          <p:cNvPr id="2" name="Slide Image Placeholder 1"/>
+          <p:cNvSpPr>
+            <a:spLocks noGrp="1" noRot="1" noChangeAspect="1"/>
+          </p:cNvSpPr>
+          <p:nvPr>
+            <p:ph type="sldImg"/>
+          </p:nvPr>
+        </p:nvSpPr>
+        <p:spPr/>
+      </p:sp>
+      <p:sp>
+        <p:nvSpPr>
+          <p:cNvPr id="3" name="Notes Placeholder 2"/>
+          <p:cNvSpPr>
+            <a:spLocks noGrp="1"/>
+          </p:cNvSpPr>
+          <p:nvPr>
+            <p:ph type="body" idx="1"/>
+          </p:nvPr>
+        </p:nvSpPr>
+        <p:spPr/>
+        <p:txBody>
+          <a:bodyPr/>
+          <a:lstStyle/>
+          <a:p>
+            <a:pPr marL="0" marR="0" lvl="0" indent="0" algn="l" defTabSz="914400" rtl="0" eaLnBrk="1" fontAlgn="base" latinLnBrk="0" hangingPunct="1">
+              <a:lnSpc>
+                <a:spcPct val="100000"/>
+              </a:lnSpc>
+              <a:spcBef>
+                <a:spcPct val="30000"/>
+              </a:spcBef>
+              <a:spcAft>
+                <a:spcPct val="0"/>
+              </a:spcAft>
+              <a:buClrTx/>
+              <a:buSzTx/>
+              <a:buFontTx/>
+              <a:buNone/>
+              <a:tabLst/>
+              <a:defRPr/>
+            </a:pPr>
+            <a:r>
               <a:rPr lang="en-US" sz="1200" b="0" i="1" dirty="0">
                 <a:solidFill>
                   <a:srgbClr val="3F3F3F"/>
@@ -2040,6 +2153,34 @@
           </a:p>
           <a:p>
             <a:endParaRPr lang="en-US" dirty="0"/>
+          </a:p>
+          <a:p>
+            <a:pPr marL="0" marR="0" lvl="0" indent="0" algn="l" defTabSz="914400" rtl="0" eaLnBrk="1" fontAlgn="base" latinLnBrk="0" hangingPunct="1">
+              <a:lnSpc>
+                <a:spcPct val="100000"/>
+              </a:lnSpc>
+              <a:spcBef>
+                <a:spcPct val="30000"/>
+              </a:spcBef>
+              <a:spcAft>
+                <a:spcPct val="0"/>
+              </a:spcAft>
+              <a:buClrTx/>
+              <a:buSzTx/>
+              <a:buFontTx/>
+              <a:buNone/>
+              <a:tabLst/>
+              <a:defRPr/>
+            </a:pPr>
+            <a:r>
+              <a:rPr lang="en-US" sz="1200" b="0" i="0" dirty="0">
+                <a:solidFill>
+                  <a:srgbClr val="3F3F3F"/>
+                </a:solidFill>
+                <a:latin typeface="Segoe UI"/>
+              </a:rPr>
+              <a:t>Failed step? Restart or Review &amp; Complete Anyway. Reset undoes files, shortcuts, the wallpaper file, and (opt-in) apps.</a:t>
+            </a:r>
           </a:p>
           <a:p>
             <a:endParaRPr lang="en-US" dirty="0"/>
@@ -7091,13 +7232,8 @@
           <a:p>
             <a:r>
               <a:rPr dirty="0"/>
-              <a:t>Japhet Kofi Appau Arthur  ·  Mobile Computing Seminar · </a:t>
-            </a:r>
-            <a:r>
-              <a:rPr dirty="0" err="1"/>
-              <a:t>Praktikum</a:t>
-            </a:r>
-            <a:endParaRPr dirty="0"/>
+              <a:t>Japhet Kofi Appau Arthur </a:t>
+            </a:r>
           </a:p>
         </p:txBody>
       </p:sp>
@@ -7993,7 +8129,7 @@
         <p:spPr>
           <a:xfrm>
             <a:off x="1280160" y="4709160"/>
-            <a:ext cx="9601200" cy="1463040"/>
+            <a:ext cx="9601200" cy="886222"/>
           </a:xfrm>
           <a:prstGeom prst="roundRect">
             <a:avLst>
@@ -8057,68 +8193,31 @@
           <a:p>
             <a:pPr algn="l"/>
             <a:r>
-              <a:rPr sz="1400" b="1" i="0">
+              <a:rPr sz="1400" b="1" i="0" dirty="0">
                 <a:solidFill>
                   <a:srgbClr val="063D79"/>
                 </a:solidFill>
                 <a:latin typeface="Segoe UI"/>
               </a:rPr>
-              <a:t>17,467 LOC (src) · 3,595 LOC (tests) · 89 files · MIT licensed</a:t>
-            </a:r>
-          </a:p>
-        </p:txBody>
-      </p:sp>
-      <p:sp>
-        <p:nvSpPr>
-          <p:cNvPr id="24" name="TextBox 23"/>
-          <p:cNvSpPr txBox="1"/>
-          <p:nvPr/>
-        </p:nvSpPr>
-        <p:spPr>
-          <a:xfrm>
-            <a:off x="1554480" y="5285232"/>
-            <a:ext cx="9052560" cy="777240"/>
-          </a:xfrm>
-          <a:prstGeom prst="rect">
-            <a:avLst/>
-          </a:prstGeom>
-          <a:noFill/>
-        </p:spPr>
-        <p:txBody>
-          <a:bodyPr wrap="square">
-            <a:spAutoFit/>
-          </a:bodyPr>
-          <a:lstStyle/>
-          <a:p>
-            <a:pPr algn="l">
-              <a:lnSpc>
-                <a:spcPct val="120000"/>
-              </a:lnSpc>
-            </a:pPr>
-            <a:r>
-              <a:rPr sz="1300" b="0" i="0">
-                <a:solidFill>
-                  <a:srgbClr val="3F3F3F"/>
+              <a:t>17,467 LOC (</a:t>
+            </a:r>
+            <a:r>
+              <a:rPr sz="1400" b="1" i="0" dirty="0" err="1">
+                <a:solidFill>
+                  <a:srgbClr val="063D79"/>
                 </a:solidFill>
                 <a:latin typeface="Segoe UI"/>
               </a:rPr>
-              <a:t>Pages ↔ Controllers ↔ Services — Qt window only wires up controllers; CLI calls the</a:t>
-            </a:r>
-          </a:p>
-          <a:p>
-            <a:pPr algn="l">
-              <a:lnSpc>
-                <a:spcPct val="120000"/>
-              </a:lnSpc>
-            </a:pPr>
-            <a:r>
-              <a:rPr sz="1300" b="0" i="0">
-                <a:solidFill>
-                  <a:srgbClr val="3F3F3F"/>
+              <a:t>src</a:t>
+            </a:r>
+            <a:r>
+              <a:rPr sz="1400" b="1" i="0" dirty="0">
+                <a:solidFill>
+                  <a:srgbClr val="063D79"/>
                 </a:solidFill>
                 <a:latin typeface="Segoe UI"/>
               </a:rPr>
-              <a:t>same services directly. Iterative work packages (WP1–WP7) plus a 6-day risk buffer before this presentation.</a:t>
+              <a:t>) · 3,595 LOC (tests) · 89 files · MIT licensed</a:t>
             </a:r>
           </a:p>
         </p:txBody>
@@ -11019,7 +11118,7 @@
         </p:nvSpPr>
         <p:spPr>
           <a:xfrm>
-            <a:off x="1598676" y="4572000"/>
+            <a:off x="1773936" y="4572000"/>
             <a:ext cx="201168" cy="201168"/>
           </a:xfrm>
           <a:prstGeom prst="ellipse">
@@ -11067,7 +11166,7 @@
         <p:spPr>
           <a:xfrm>
             <a:off x="822960" y="4892040"/>
-            <a:ext cx="1752600" cy="320040"/>
+            <a:ext cx="2103120" cy="320040"/>
           </a:xfrm>
           <a:prstGeom prst="rect">
             <a:avLst/>
@@ -11101,7 +11200,7 @@
         </p:nvSpPr>
         <p:spPr>
           <a:xfrm>
-            <a:off x="3351276" y="4572000"/>
+            <a:off x="3877056" y="4572000"/>
             <a:ext cx="201168" cy="201168"/>
           </a:xfrm>
           <a:prstGeom prst="ellipse">
@@ -11148,8 +11247,8 @@
         </p:nvSpPr>
         <p:spPr>
           <a:xfrm>
-            <a:off x="2575560" y="4892040"/>
-            <a:ext cx="1752600" cy="320040"/>
+            <a:off x="2926080" y="4892040"/>
+            <a:ext cx="2103120" cy="320040"/>
           </a:xfrm>
           <a:prstGeom prst="rect">
             <a:avLst/>
@@ -11183,7 +11282,7 @@
         </p:nvSpPr>
         <p:spPr>
           <a:xfrm>
-            <a:off x="5103876" y="4572000"/>
+            <a:off x="5980176" y="4572000"/>
             <a:ext cx="201168" cy="201168"/>
           </a:xfrm>
           <a:prstGeom prst="ellipse">
@@ -11230,8 +11329,8 @@
         </p:nvSpPr>
         <p:spPr>
           <a:xfrm>
-            <a:off x="4328160" y="4892040"/>
-            <a:ext cx="1752600" cy="320040"/>
+            <a:off x="5029200" y="4892040"/>
+            <a:ext cx="2103120" cy="320040"/>
           </a:xfrm>
           <a:prstGeom prst="rect">
             <a:avLst/>
@@ -11265,7 +11364,7 @@
         </p:nvSpPr>
         <p:spPr>
           <a:xfrm>
-            <a:off x="6856476" y="4572000"/>
+            <a:off x="8083296" y="4572000"/>
             <a:ext cx="201168" cy="201168"/>
           </a:xfrm>
           <a:prstGeom prst="ellipse">
@@ -11312,8 +11411,8 @@
         </p:nvSpPr>
         <p:spPr>
           <a:xfrm>
-            <a:off x="6080760" y="4892040"/>
-            <a:ext cx="1752600" cy="320040"/>
+            <a:off x="7132320" y="4892040"/>
+            <a:ext cx="2103120" cy="320040"/>
           </a:xfrm>
           <a:prstGeom prst="rect">
             <a:avLst/>
@@ -11347,7 +11446,7 @@
         </p:nvSpPr>
         <p:spPr>
           <a:xfrm>
-            <a:off x="8609076" y="4572000"/>
+            <a:off x="10186416" y="4572000"/>
             <a:ext cx="201168" cy="201168"/>
           </a:xfrm>
           <a:prstGeom prst="ellipse">
@@ -11394,90 +11493,8 @@
         </p:nvSpPr>
         <p:spPr>
           <a:xfrm>
-            <a:off x="7833360" y="4892040"/>
-            <a:ext cx="1752600" cy="320040"/>
-          </a:xfrm>
-          <a:prstGeom prst="rect">
-            <a:avLst/>
-          </a:prstGeom>
-          <a:noFill/>
-        </p:spPr>
-        <p:txBody>
-          <a:bodyPr wrap="square">
-            <a:spAutoFit/>
-          </a:bodyPr>
-          <a:lstStyle/>
-          <a:p>
-            <a:pPr algn="ctr"/>
-            <a:r>
-              <a:rPr sz="1100" b="0" i="0">
-                <a:solidFill>
-                  <a:srgbClr val="3F3F3F"/>
-                </a:solidFill>
-                <a:latin typeface="Segoe UI"/>
-              </a:rPr>
-              <a:t>Critique</a:t>
-            </a:r>
-          </a:p>
-        </p:txBody>
-      </p:sp>
-      <p:sp>
-        <p:nvSpPr>
-          <p:cNvPr id="15" name="Oval 14"/>
-          <p:cNvSpPr/>
-          <p:nvPr/>
-        </p:nvSpPr>
-        <p:spPr>
-          <a:xfrm>
-            <a:off x="10361676" y="4572000"/>
-            <a:ext cx="201168" cy="201168"/>
-          </a:xfrm>
-          <a:prstGeom prst="ellipse">
-            <a:avLst/>
-          </a:prstGeom>
-          <a:solidFill>
-            <a:srgbClr val="FFFFFF"/>
-          </a:solidFill>
-          <a:ln w="15875">
-            <a:solidFill>
-              <a:srgbClr val="D8DADC"/>
-            </a:solidFill>
-          </a:ln>
-          <a:effectLst/>
-        </p:spPr>
-        <p:style>
-          <a:lnRef idx="1">
-            <a:schemeClr val="accent1"/>
-          </a:lnRef>
-          <a:fillRef idx="3">
-            <a:schemeClr val="accent1"/>
-          </a:fillRef>
-          <a:effectRef idx="2">
-            <a:schemeClr val="accent1"/>
-          </a:effectRef>
-          <a:fontRef idx="minor">
-            <a:schemeClr val="lt1"/>
-          </a:fontRef>
-        </p:style>
-        <p:txBody>
-          <a:bodyPr rtlCol="0" anchor="ctr"/>
-          <a:lstStyle/>
-          <a:p>
-            <a:pPr algn="ctr"/>
-            <a:endParaRPr/>
-          </a:p>
-        </p:txBody>
-      </p:sp>
-      <p:sp>
-        <p:nvSpPr>
-          <p:cNvPr id="16" name="TextBox 15"/>
-          <p:cNvSpPr txBox="1"/>
-          <p:nvPr/>
-        </p:nvSpPr>
-        <p:spPr>
-          <a:xfrm>
-            <a:off x="9585960" y="4892040"/>
-            <a:ext cx="1752600" cy="320040"/>
+            <a:off x="9235440" y="4892040"/>
+            <a:ext cx="2103120" cy="320040"/>
           </a:xfrm>
           <a:prstGeom prst="rect">
             <a:avLst/>
@@ -12390,41 +12407,6 @@
       </p:graphicFrame>
       <p:sp>
         <p:nvSpPr>
-          <p:cNvPr id="6" name="TextBox 5"/>
-          <p:cNvSpPr txBox="1"/>
-          <p:nvPr/>
-        </p:nvSpPr>
-        <p:spPr>
-          <a:xfrm>
-            <a:off x="548640" y="4892040"/>
-            <a:ext cx="11064240" cy="411480"/>
-          </a:xfrm>
-          <a:prstGeom prst="rect">
-            <a:avLst/>
-          </a:prstGeom>
-          <a:noFill/>
-        </p:spPr>
-        <p:txBody>
-          <a:bodyPr wrap="square">
-            <a:spAutoFit/>
-          </a:bodyPr>
-          <a:lstStyle/>
-          <a:p>
-            <a:pPr algn="l"/>
-            <a:r>
-              <a:rPr sz="1350" b="0" i="0">
-                <a:solidFill>
-                  <a:srgbClr val="1A1A1A"/>
-                </a:solidFill>
-                <a:latin typeface="Segoe UI"/>
-              </a:rPr>
-              <a:t>New capabilities with no proof-of-concept equivalent: settings/wallpaper migration, desktop shortcuts, full reset/undo, completeness scoring.</a:t>
-            </a:r>
-          </a:p>
-        </p:txBody>
-      </p:sp>
-      <p:sp>
-        <p:nvSpPr>
           <p:cNvPr id="7" name="TextBox 6"/>
           <p:cNvSpPr txBox="1"/>
           <p:nvPr/>
@@ -13676,45 +13658,6 @@
       </p:sp>
       <p:sp>
         <p:nvSpPr>
-          <p:cNvPr id="29" name="TextBox 28"/>
-          <p:cNvSpPr txBox="1"/>
-          <p:nvPr/>
-        </p:nvSpPr>
-        <p:spPr>
-          <a:xfrm>
-            <a:off x="457200" y="4434840"/>
-            <a:ext cx="5120640" cy="731520"/>
-          </a:xfrm>
-          <a:prstGeom prst="rect">
-            <a:avLst/>
-          </a:prstGeom>
-          <a:noFill/>
-        </p:spPr>
-        <p:txBody>
-          <a:bodyPr wrap="square">
-            <a:spAutoFit/>
-          </a:bodyPr>
-          <a:lstStyle/>
-          <a:p>
-            <a:pPr algn="l">
-              <a:lnSpc>
-                <a:spcPct val="120000"/>
-              </a:lnSpc>
-            </a:pPr>
-            <a:r>
-              <a:rPr lang="en-US" sz="1300" b="0" i="0" dirty="0">
-                <a:solidFill>
-                  <a:srgbClr val="3F3F3F"/>
-                </a:solidFill>
-                <a:latin typeface="Segoe UI"/>
-              </a:rPr>
-              <a:t>Failed step? Restart or Review &amp; Complete Anyway. Reset undoes files, shortcuts, the wallpaper file, and (opt-in) apps.</a:t>
-            </a:r>
-          </a:p>
-        </p:txBody>
-      </p:sp>
-      <p:sp>
-        <p:nvSpPr>
           <p:cNvPr id="30" name="Rounded Rectangle 29"/>
           <p:cNvSpPr/>
           <p:nvPr/>
@@ -15345,7 +15288,7 @@
         </p:nvSpPr>
         <p:spPr>
           <a:xfrm>
-            <a:off x="1598676" y="4572000"/>
+            <a:off x="1773936" y="4572000"/>
             <a:ext cx="201168" cy="201168"/>
           </a:xfrm>
           <a:prstGeom prst="ellipse">
@@ -15393,7 +15336,7 @@
         <p:spPr>
           <a:xfrm>
             <a:off x="822960" y="4892040"/>
-            <a:ext cx="1752600" cy="320040"/>
+            <a:ext cx="2103120" cy="320040"/>
           </a:xfrm>
           <a:prstGeom prst="rect">
             <a:avLst/>
@@ -15427,7 +15370,7 @@
         </p:nvSpPr>
         <p:spPr>
           <a:xfrm>
-            <a:off x="3351276" y="4572000"/>
+            <a:off x="3877056" y="4572000"/>
             <a:ext cx="201168" cy="201168"/>
           </a:xfrm>
           <a:prstGeom prst="ellipse">
@@ -15474,8 +15417,8 @@
         </p:nvSpPr>
         <p:spPr>
           <a:xfrm>
-            <a:off x="2575560" y="4892040"/>
-            <a:ext cx="1752600" cy="320040"/>
+            <a:off x="2926080" y="4892040"/>
+            <a:ext cx="2103120" cy="320040"/>
           </a:xfrm>
           <a:prstGeom prst="rect">
             <a:avLst/>
@@ -15509,7 +15452,7 @@
         </p:nvSpPr>
         <p:spPr>
           <a:xfrm>
-            <a:off x="5103876" y="4572000"/>
+            <a:off x="5980176" y="4572000"/>
             <a:ext cx="201168" cy="201168"/>
           </a:xfrm>
           <a:prstGeom prst="ellipse">
@@ -15556,8 +15499,8 @@
         </p:nvSpPr>
         <p:spPr>
           <a:xfrm>
-            <a:off x="4328160" y="4892040"/>
-            <a:ext cx="1752600" cy="320040"/>
+            <a:off x="5029200" y="4892040"/>
+            <a:ext cx="2103120" cy="320040"/>
           </a:xfrm>
           <a:prstGeom prst="rect">
             <a:avLst/>
@@ -15591,7 +15534,7 @@
         </p:nvSpPr>
         <p:spPr>
           <a:xfrm>
-            <a:off x="6856476" y="4572000"/>
+            <a:off x="8083296" y="4572000"/>
             <a:ext cx="201168" cy="201168"/>
           </a:xfrm>
           <a:prstGeom prst="ellipse">
@@ -15638,8 +15581,8 @@
         </p:nvSpPr>
         <p:spPr>
           <a:xfrm>
-            <a:off x="6080760" y="4892040"/>
-            <a:ext cx="1752600" cy="320040"/>
+            <a:off x="7132320" y="4892040"/>
+            <a:ext cx="2103120" cy="320040"/>
           </a:xfrm>
           <a:prstGeom prst="rect">
             <a:avLst/>
@@ -15673,7 +15616,7 @@
         </p:nvSpPr>
         <p:spPr>
           <a:xfrm>
-            <a:off x="8609076" y="4572000"/>
+            <a:off x="10186416" y="4572000"/>
             <a:ext cx="201168" cy="201168"/>
           </a:xfrm>
           <a:prstGeom prst="ellipse">
@@ -15720,90 +15663,8 @@
         </p:nvSpPr>
         <p:spPr>
           <a:xfrm>
-            <a:off x="7833360" y="4892040"/>
-            <a:ext cx="1752600" cy="320040"/>
-          </a:xfrm>
-          <a:prstGeom prst="rect">
-            <a:avLst/>
-          </a:prstGeom>
-          <a:noFill/>
-        </p:spPr>
-        <p:txBody>
-          <a:bodyPr wrap="square">
-            <a:spAutoFit/>
-          </a:bodyPr>
-          <a:lstStyle/>
-          <a:p>
-            <a:pPr algn="ctr"/>
-            <a:r>
-              <a:rPr sz="1100" b="0" i="0">
-                <a:solidFill>
-                  <a:srgbClr val="3F3F3F"/>
-                </a:solidFill>
-                <a:latin typeface="Segoe UI"/>
-              </a:rPr>
-              <a:t>Critique</a:t>
-            </a:r>
-          </a:p>
-        </p:txBody>
-      </p:sp>
-      <p:sp>
-        <p:nvSpPr>
-          <p:cNvPr id="15" name="Oval 14"/>
-          <p:cNvSpPr/>
-          <p:nvPr/>
-        </p:nvSpPr>
-        <p:spPr>
-          <a:xfrm>
-            <a:off x="10361676" y="4572000"/>
-            <a:ext cx="201168" cy="201168"/>
-          </a:xfrm>
-          <a:prstGeom prst="ellipse">
-            <a:avLst/>
-          </a:prstGeom>
-          <a:solidFill>
-            <a:srgbClr val="FFFFFF"/>
-          </a:solidFill>
-          <a:ln w="15875">
-            <a:solidFill>
-              <a:srgbClr val="D8DADC"/>
-            </a:solidFill>
-          </a:ln>
-          <a:effectLst/>
-        </p:spPr>
-        <p:style>
-          <a:lnRef idx="1">
-            <a:schemeClr val="accent1"/>
-          </a:lnRef>
-          <a:fillRef idx="3">
-            <a:schemeClr val="accent1"/>
-          </a:fillRef>
-          <a:effectRef idx="2">
-            <a:schemeClr val="accent1"/>
-          </a:effectRef>
-          <a:fontRef idx="minor">
-            <a:schemeClr val="lt1"/>
-          </a:fontRef>
-        </p:style>
-        <p:txBody>
-          <a:bodyPr rtlCol="0" anchor="ctr"/>
-          <a:lstStyle/>
-          <a:p>
-            <a:pPr algn="ctr"/>
-            <a:endParaRPr/>
-          </a:p>
-        </p:txBody>
-      </p:sp>
-      <p:sp>
-        <p:nvSpPr>
-          <p:cNvPr id="16" name="TextBox 15"/>
-          <p:cNvSpPr txBox="1"/>
-          <p:nvPr/>
-        </p:nvSpPr>
-        <p:spPr>
-          <a:xfrm>
-            <a:off x="9585960" y="4892040"/>
-            <a:ext cx="1752600" cy="320040"/>
+            <a:off x="9235440" y="4892040"/>
+            <a:ext cx="2103120" cy="320040"/>
           </a:xfrm>
           <a:prstGeom prst="rect">
             <a:avLst/>
@@ -15876,9 +15737,8 @@
           </a:bodyPr>
           <a:lstStyle/>
           <a:p>
-            <a:pPr algn="l"/>
-            <a:r>
-              <a:rPr sz="1200" b="1" i="0">
+            <a:r>
+              <a:rPr sz="1200" b="1">
                 <a:solidFill>
                   <a:srgbClr val="063D79"/>
                 </a:solidFill>
@@ -15911,15 +15771,14 @@
           </a:bodyPr>
           <a:lstStyle/>
           <a:p>
-            <a:pPr algn="l"/>
-            <a:r>
-              <a:rPr sz="2700" b="1" i="0">
+            <a:r>
+              <a:rPr sz="2700" b="1">
                 <a:solidFill>
                   <a:srgbClr val="1A1A1A"/>
                 </a:solidFill>
                 <a:latin typeface="Segoe UI"/>
               </a:rPr>
-              <a:t>What the project delivers</a:t>
+              <a:t>Double-click distribution</a:t>
             </a:r>
           </a:p>
         </p:txBody>
@@ -15971,14 +15830,14 @@
       </p:sp>
       <p:sp>
         <p:nvSpPr>
-          <p:cNvPr id="5" name="Rounded Rectangle 4"/>
+          <p:cNvPr id="14" name="Rounded Rectangle 13"/>
           <p:cNvSpPr/>
           <p:nvPr/>
         </p:nvSpPr>
         <p:spPr>
           <a:xfrm>
-            <a:off x="731520" y="1645920"/>
-            <a:ext cx="2514600" cy="1371600"/>
+            <a:off x="822960" y="2011680"/>
+            <a:ext cx="4937760" cy="2011680"/>
           </a:xfrm>
           <a:prstGeom prst="roundRect">
             <a:avLst>
@@ -16020,14 +15879,66 @@
       </p:sp>
       <p:sp>
         <p:nvSpPr>
-          <p:cNvPr id="6" name="TextBox 5"/>
+          <p:cNvPr id="15" name="Oval 14"/>
+          <p:cNvSpPr/>
+          <p:nvPr/>
+        </p:nvSpPr>
+        <p:spPr>
+          <a:xfrm>
+            <a:off x="2926080" y="2240280"/>
+            <a:ext cx="731520" cy="731520"/>
+          </a:xfrm>
+          <a:prstGeom prst="ellipse">
+            <a:avLst/>
+          </a:prstGeom>
+          <a:solidFill>
+            <a:srgbClr val="063D79"/>
+          </a:solidFill>
+          <a:ln>
+            <a:noFill/>
+          </a:ln>
+          <a:effectLst/>
+        </p:spPr>
+        <p:style>
+          <a:lnRef idx="1">
+            <a:schemeClr val="accent1"/>
+          </a:lnRef>
+          <a:fillRef idx="3">
+            <a:schemeClr val="accent1"/>
+          </a:fillRef>
+          <a:effectRef idx="2">
+            <a:schemeClr val="accent1"/>
+          </a:effectRef>
+          <a:fontRef idx="minor">
+            <a:schemeClr val="lt1"/>
+          </a:fontRef>
+        </p:style>
+        <p:txBody>
+          <a:bodyPr wrap="none" lIns="0" tIns="0" rIns="0" bIns="0" rtlCol="0" anchor="ctr"/>
+          <a:lstStyle/>
+          <a:p>
+            <a:pPr algn="ctr"/>
+            <a:r>
+              <a:rPr sz="2200" b="1">
+                <a:solidFill>
+                  <a:srgbClr val="FFFFFF"/>
+                </a:solidFill>
+              </a:rPr>
+              <a:t>🪟</a:t>
+            </a:r>
+          </a:p>
+        </p:txBody>
+      </p:sp>
+      <p:sp>
+        <p:nvSpPr>
+          <p:cNvPr id="16" name="TextBox 15"/>
           <p:cNvSpPr txBox="1"/>
           <p:nvPr/>
         </p:nvSpPr>
         <p:spPr>
           <a:xfrm>
-            <a:off x="731520" y="1783080"/>
-            <a:ext cx="2514600" cy="685800"/>
+            <a:off x="1005840" y="3063240"/>
+            <a:ext cx="4572000" cy="822960"/>
           </a:xfrm>
           <a:prstGeom prst="rect">
             <a:avLst/>
@@ -16040,64 +15951,65 @@
           </a:bodyPr>
           <a:lstStyle/>
           <a:p>
-            <a:pPr algn="ctr"/>
-            <a:r>
-              <a:rPr sz="3200" b="1" i="0">
-                <a:solidFill>
-                  <a:srgbClr val="063D79"/>
+            <a:pPr algn="ctr">
+              <a:lnSpc>
+                <a:spcPct val="120000"/>
+              </a:lnSpc>
+            </a:pPr>
+            <a:r>
+              <a:rPr sz="1250" b="0" i="0">
+                <a:solidFill>
+                  <a:srgbClr val="3F3F3F"/>
                 </a:solidFill>
                 <a:latin typeface="Segoe UI"/>
               </a:rPr>
-              <a:t>238</a:t>
-            </a:r>
-          </a:p>
-        </p:txBody>
-      </p:sp>
-      <p:sp>
-        <p:nvSpPr>
-          <p:cNvPr id="7" name="TextBox 6"/>
-          <p:cNvSpPr txBox="1"/>
-          <p:nvPr/>
-        </p:nvSpPr>
-        <p:spPr>
-          <a:xfrm>
-            <a:off x="868680" y="2377440"/>
-            <a:ext cx="2240280" cy="457200"/>
-          </a:xfrm>
-          <a:prstGeom prst="rect">
-            <a:avLst/>
-          </a:prstGeom>
-          <a:noFill/>
-        </p:spPr>
-        <p:txBody>
-          <a:bodyPr wrap="square">
-            <a:spAutoFit/>
-          </a:bodyPr>
-          <a:lstStyle/>
-          <a:p>
-            <a:pPr algn="ctr"/>
+              <a:t>migrate.exe</a:t>
+            </a:r>
+          </a:p>
+          <a:p>
+            <a:pPr algn="ctr">
+              <a:lnSpc>
+                <a:spcPct val="120000"/>
+              </a:lnSpc>
+            </a:pPr>
             <a:r>
               <a:rPr sz="1250" b="0" i="0">
                 <a:solidFill>
-                  <a:srgbClr val="1A1A1A"/>
+                  <a:srgbClr val="3F3F3F"/>
                 </a:solidFill>
                 <a:latin typeface="Segoe UI"/>
               </a:rPr>
-              <a:t>app mappings</a:t>
-            </a:r>
-          </a:p>
-        </p:txBody>
-      </p:sp>
-      <p:sp>
-        <p:nvSpPr>
-          <p:cNvPr id="8" name="Rounded Rectangle 7"/>
+              <a:t>PyInstaller; can bake the Linux</a:t>
+            </a:r>
+          </a:p>
+          <a:p>
+            <a:pPr algn="ctr">
+              <a:lnSpc>
+                <a:spcPct val="120000"/>
+              </a:lnSpc>
+            </a:pPr>
+            <a:r>
+              <a:rPr sz="1250" b="0" i="0">
+                <a:solidFill>
+                  <a:srgbClr val="3F3F3F"/>
+                </a:solidFill>
+                <a:latin typeface="Segoe UI"/>
+              </a:rPr>
+              <a:t>binary in for a single-file standalone.</a:t>
+            </a:r>
+          </a:p>
+        </p:txBody>
+      </p:sp>
+      <p:sp>
+        <p:nvSpPr>
+          <p:cNvPr id="17" name="Rounded Rectangle 16"/>
           <p:cNvSpPr/>
           <p:nvPr/>
         </p:nvSpPr>
         <p:spPr>
           <a:xfrm>
-            <a:off x="3364992" y="1645920"/>
-            <a:ext cx="2514600" cy="1371600"/>
+            <a:off x="6309360" y="2011680"/>
+            <a:ext cx="4937760" cy="2011680"/>
           </a:xfrm>
           <a:prstGeom prst="roundRect">
             <a:avLst>
@@ -16139,97 +16051,23 @@
       </p:sp>
       <p:sp>
         <p:nvSpPr>
-          <p:cNvPr id="9" name="TextBox 8"/>
-          <p:cNvSpPr txBox="1"/>
-          <p:nvPr/>
-        </p:nvSpPr>
-        <p:spPr>
-          <a:xfrm>
-            <a:off x="3364992" y="1783080"/>
-            <a:ext cx="2514600" cy="685800"/>
-          </a:xfrm>
-          <a:prstGeom prst="rect">
-            <a:avLst/>
-          </a:prstGeom>
-          <a:noFill/>
-        </p:spPr>
-        <p:txBody>
-          <a:bodyPr wrap="square">
-            <a:spAutoFit/>
-          </a:bodyPr>
-          <a:lstStyle/>
-          <a:p>
-            <a:pPr algn="ctr"/>
-            <a:r>
-              <a:rPr sz="3200" b="1" i="0">
-                <a:solidFill>
-                  <a:srgbClr val="063D79"/>
-                </a:solidFill>
-                <a:latin typeface="Segoe UI"/>
-              </a:rPr>
-              <a:t>192</a:t>
-            </a:r>
-          </a:p>
-        </p:txBody>
-      </p:sp>
-      <p:sp>
-        <p:nvSpPr>
-          <p:cNvPr id="10" name="TextBox 9"/>
-          <p:cNvSpPr txBox="1"/>
-          <p:nvPr/>
-        </p:nvSpPr>
-        <p:spPr>
-          <a:xfrm>
-            <a:off x="3502152" y="2377440"/>
-            <a:ext cx="2240280" cy="457200"/>
-          </a:xfrm>
-          <a:prstGeom prst="rect">
-            <a:avLst/>
-          </a:prstGeom>
-          <a:noFill/>
-        </p:spPr>
-        <p:txBody>
-          <a:bodyPr wrap="square">
-            <a:spAutoFit/>
-          </a:bodyPr>
-          <a:lstStyle/>
-          <a:p>
-            <a:pPr algn="ctr"/>
-            <a:r>
-              <a:rPr sz="1250" b="0" i="0">
-                <a:solidFill>
-                  <a:srgbClr val="1A1A1A"/>
-                </a:solidFill>
-                <a:latin typeface="Segoe UI"/>
-              </a:rPr>
-              <a:t>automated tests</a:t>
-            </a:r>
-          </a:p>
-        </p:txBody>
-      </p:sp>
-      <p:sp>
-        <p:nvSpPr>
-          <p:cNvPr id="11" name="Rounded Rectangle 10"/>
+          <p:cNvPr id="18" name="Oval 17"/>
           <p:cNvSpPr/>
           <p:nvPr/>
         </p:nvSpPr>
         <p:spPr>
           <a:xfrm>
-            <a:off x="5998464" y="1645920"/>
-            <a:ext cx="2514600" cy="1371600"/>
-          </a:xfrm>
-          <a:prstGeom prst="roundRect">
-            <a:avLst>
-              <a:gd name="adj" fmla="val 7000"/>
-            </a:avLst>
+            <a:off x="8412480" y="2240280"/>
+            <a:ext cx="731520" cy="731520"/>
+          </a:xfrm>
+          <a:prstGeom prst="ellipse">
+            <a:avLst/>
           </a:prstGeom>
           <a:solidFill>
-            <a:srgbClr val="FFFFFF"/>
+            <a:srgbClr val="008439"/>
           </a:solidFill>
-          <a:ln w="12700">
-            <a:solidFill>
-              <a:srgbClr val="D8DADC"/>
-            </a:solidFill>
+          <a:ln>
+            <a:noFill/>
           </a:ln>
           <a:effectLst/>
         </p:spPr>
@@ -16248,24 +16086,31 @@
           </a:fontRef>
         </p:style>
         <p:txBody>
-          <a:bodyPr rtlCol="0" anchor="ctr"/>
+          <a:bodyPr wrap="none" lIns="0" tIns="0" rIns="0" bIns="0" rtlCol="0" anchor="ctr"/>
           <a:lstStyle/>
           <a:p>
             <a:pPr algn="ctr"/>
-            <a:endParaRPr/>
-          </a:p>
-        </p:txBody>
-      </p:sp>
-      <p:sp>
-        <p:nvSpPr>
-          <p:cNvPr id="12" name="TextBox 11"/>
+            <a:r>
+              <a:rPr sz="2200" b="1">
+                <a:solidFill>
+                  <a:srgbClr val="FFFFFF"/>
+                </a:solidFill>
+              </a:rPr>
+              <a:t>🐧</a:t>
+            </a:r>
+          </a:p>
+        </p:txBody>
+      </p:sp>
+      <p:sp>
+        <p:nvSpPr>
+          <p:cNvPr id="19" name="TextBox 18"/>
           <p:cNvSpPr txBox="1"/>
           <p:nvPr/>
         </p:nvSpPr>
         <p:spPr>
           <a:xfrm>
-            <a:off x="5998464" y="1783080"/>
-            <a:ext cx="2514600" cy="685800"/>
+            <a:off x="6492240" y="3063240"/>
+            <a:ext cx="4572000" cy="822960"/>
           </a:xfrm>
           <a:prstGeom prst="rect">
             <a:avLst/>
@@ -16278,29 +16123,65 @@
           </a:bodyPr>
           <a:lstStyle/>
           <a:p>
-            <a:pPr algn="ctr"/>
-            <a:r>
-              <a:rPr sz="3200" b="1" i="0">
-                <a:solidFill>
-                  <a:srgbClr val="063D79"/>
+            <a:pPr algn="ctr">
+              <a:lnSpc>
+                <a:spcPct val="120000"/>
+              </a:lnSpc>
+            </a:pPr>
+            <a:r>
+              <a:rPr sz="1250" b="0" i="0">
+                <a:solidFill>
+                  <a:srgbClr val="3F3F3F"/>
                 </a:solidFill>
                 <a:latin typeface="Segoe UI"/>
               </a:rPr>
-              <a:t>3</a:t>
-            </a:r>
-          </a:p>
-        </p:txBody>
-      </p:sp>
-      <p:sp>
-        <p:nvSpPr>
-          <p:cNvPr id="13" name="TextBox 12"/>
+              <a:t>restore (ELF binary)</a:t>
+            </a:r>
+          </a:p>
+          <a:p>
+            <a:pPr algn="ctr">
+              <a:lnSpc>
+                <a:spcPct val="120000"/>
+              </a:lnSpc>
+            </a:pPr>
+            <a:r>
+              <a:rPr sz="1250" b="0" i="0">
+                <a:solidFill>
+                  <a:srgbClr val="3F3F3F"/>
+                </a:solidFill>
+                <a:latin typeface="Segoe UI"/>
+              </a:rPr>
+              <a:t>Built on the target distro; embedded</a:t>
+            </a:r>
+          </a:p>
+          <a:p>
+            <a:pPr algn="ctr">
+              <a:lnSpc>
+                <a:spcPct val="120000"/>
+              </a:lnSpc>
+            </a:pPr>
+            <a:r>
+              <a:rPr sz="1250" b="0" i="0">
+                <a:solidFill>
+                  <a:srgbClr val="3F3F3F"/>
+                </a:solidFill>
+                <a:latin typeface="Segoe UI"/>
+              </a:rPr>
+              <a:t>automatically into every bundle.</a:t>
+            </a:r>
+          </a:p>
+        </p:txBody>
+      </p:sp>
+      <p:sp>
+        <p:nvSpPr>
+          <p:cNvPr id="20" name="TextBox 19"/>
           <p:cNvSpPr txBox="1"/>
           <p:nvPr/>
         </p:nvSpPr>
         <p:spPr>
           <a:xfrm>
-            <a:off x="6135624" y="2377440"/>
-            <a:ext cx="2240280" cy="457200"/>
+            <a:off x="822960" y="4297680"/>
+            <a:ext cx="10515600" cy="365760"/>
           </a:xfrm>
           <a:prstGeom prst="rect">
             <a:avLst/>
@@ -16313,78 +16194,47 @@
           </a:bodyPr>
           <a:lstStyle/>
           <a:p>
-            <a:pPr algn="ctr"/>
-            <a:r>
-              <a:rPr sz="1250" b="0" i="0">
-                <a:solidFill>
-                  <a:srgbClr val="1A1A1A"/>
+            <a:pPr algn="l"/>
+            <a:r>
+              <a:rPr sz="1300" b="0" i="1" dirty="0">
+                <a:solidFill>
+                  <a:srgbClr val="3F3F3F"/>
                 </a:solidFill>
                 <a:latin typeface="Segoe UI"/>
               </a:rPr>
-              <a:t>guidance modes</a:t>
-            </a:r>
-          </a:p>
-        </p:txBody>
-      </p:sp>
-      <p:sp>
-        <p:nvSpPr>
-          <p:cNvPr id="14" name="Rounded Rectangle 13"/>
-          <p:cNvSpPr/>
-          <p:nvPr/>
-        </p:nvSpPr>
-        <p:spPr>
-          <a:xfrm>
-            <a:off x="8631936" y="1645920"/>
-            <a:ext cx="2514600" cy="1371600"/>
-          </a:xfrm>
-          <a:prstGeom prst="roundRect">
-            <a:avLst>
-              <a:gd name="adj" fmla="val 7000"/>
-            </a:avLst>
-          </a:prstGeom>
-          <a:solidFill>
-            <a:srgbClr val="FFFFFF"/>
-          </a:solidFill>
-          <a:ln w="12700">
-            <a:solidFill>
-              <a:srgbClr val="D8DADC"/>
-            </a:solidFill>
-          </a:ln>
-          <a:effectLst/>
-        </p:spPr>
-        <p:style>
-          <a:lnRef idx="1">
-            <a:schemeClr val="accent1"/>
-          </a:lnRef>
-          <a:fillRef idx="3">
-            <a:schemeClr val="accent1"/>
-          </a:fillRef>
-          <a:effectRef idx="2">
-            <a:schemeClr val="accent1"/>
-          </a:effectRef>
-          <a:fontRef idx="minor">
-            <a:schemeClr val="lt1"/>
-          </a:fontRef>
-        </p:style>
-        <p:txBody>
-          <a:bodyPr rtlCol="0" anchor="ctr"/>
-          <a:lstStyle/>
-          <a:p>
-            <a:pPr algn="ctr"/>
-            <a:endParaRPr/>
-          </a:p>
-        </p:txBody>
-      </p:sp>
-      <p:sp>
-        <p:nvSpPr>
-          <p:cNvPr id="15" name="TextBox 14"/>
+              <a:t>Live now: github.com/</a:t>
+            </a:r>
+            <a:r>
+              <a:rPr sz="1300" b="0" i="1" dirty="0" err="1">
+                <a:solidFill>
+                  <a:srgbClr val="3F3F3F"/>
+                </a:solidFill>
+                <a:latin typeface="Segoe UI"/>
+              </a:rPr>
+              <a:t>PenCoder</a:t>
+            </a:r>
+            <a:r>
+              <a:rPr sz="1300" b="0" i="1" dirty="0">
+                <a:solidFill>
+                  <a:srgbClr val="3F3F3F"/>
+                </a:solidFill>
+                <a:latin typeface="Segoe UI"/>
+              </a:rPr>
+              <a:t>/full-auto-migration — migrate.exe downloadable from a real GitHub Release.</a:t>
+            </a:r>
+          </a:p>
+        </p:txBody>
+      </p:sp>
+      <p:sp>
+        <p:nvSpPr>
+          <p:cNvPr id="21" name="TextBox 20"/>
           <p:cNvSpPr txBox="1"/>
           <p:nvPr/>
         </p:nvSpPr>
         <p:spPr>
           <a:xfrm>
-            <a:off x="8631936" y="1783080"/>
-            <a:ext cx="2514600" cy="685800"/>
+            <a:off x="822960" y="4709160"/>
+            <a:ext cx="10515600" cy="365760"/>
           </a:xfrm>
           <a:prstGeom prst="rect">
             <a:avLst/>
@@ -16397,175 +16247,15 @@
           </a:bodyPr>
           <a:lstStyle/>
           <a:p>
-            <a:pPr algn="ctr"/>
-            <a:r>
-              <a:rPr sz="3200" b="1" i="0">
-                <a:solidFill>
-                  <a:srgbClr val="063D79"/>
+            <a:pPr algn="l"/>
+            <a:r>
+              <a:rPr sz="1300" b="0" i="1">
+                <a:solidFill>
+                  <a:srgbClr val="3F3F3F"/>
                 </a:solidFill>
                 <a:latin typeface="Segoe UI"/>
               </a:rPr>
-              <a:t>2</a:t>
-            </a:r>
-          </a:p>
-        </p:txBody>
-      </p:sp>
-      <p:sp>
-        <p:nvSpPr>
-          <p:cNvPr id="16" name="TextBox 15"/>
-          <p:cNvSpPr txBox="1"/>
-          <p:nvPr/>
-        </p:nvSpPr>
-        <p:spPr>
-          <a:xfrm>
-            <a:off x="8769096" y="2377440"/>
-            <a:ext cx="2240280" cy="457200"/>
-          </a:xfrm>
-          <a:prstGeom prst="rect">
-            <a:avLst/>
-          </a:prstGeom>
-          <a:noFill/>
-        </p:spPr>
-        <p:txBody>
-          <a:bodyPr wrap="square">
-            <a:spAutoFit/>
-          </a:bodyPr>
-          <a:lstStyle/>
-          <a:p>
-            <a:pPr algn="ctr"/>
-            <a:r>
-              <a:rPr sz="1250" b="0" i="0">
-                <a:solidFill>
-                  <a:srgbClr val="1A1A1A"/>
-                </a:solidFill>
-                <a:latin typeface="Segoe UI"/>
-              </a:rPr>
-              <a:t>platforms packaged</a:t>
-            </a:r>
-          </a:p>
-        </p:txBody>
-      </p:sp>
-      <p:graphicFrame>
-        <p:nvGraphicFramePr>
-          <p:cNvPr id="17" name="Chart 16"/>
-          <p:cNvGraphicFramePr>
-            <a:graphicFrameLocks noGrp="1"/>
-          </p:cNvGraphicFramePr>
-          <p:nvPr/>
-        </p:nvGraphicFramePr>
-        <p:xfrm>
-          <a:off x="731520" y="3246120"/>
-          <a:ext cx="5029200" cy="3200400"/>
-        </p:xfrm>
-        <a:graphic>
-          <a:graphicData uri="http://schemas.openxmlformats.org/drawingml/2006/chart">
-            <c:chart xmlns:c="http://schemas.openxmlformats.org/drawingml/2006/chart" xmlns:r="http://schemas.openxmlformats.org/officeDocument/2006/relationships" r:id="rId2"/>
-          </a:graphicData>
-        </a:graphic>
-      </p:graphicFrame>
-      <p:sp>
-        <p:nvSpPr>
-          <p:cNvPr id="18" name="Rounded Rectangle 17"/>
-          <p:cNvSpPr/>
-          <p:nvPr/>
-        </p:nvSpPr>
-        <p:spPr>
-          <a:xfrm>
-            <a:off x="6050280" y="3124200"/>
-            <a:ext cx="2968752" cy="2712720"/>
-          </a:xfrm>
-          <a:prstGeom prst="roundRect">
-            <a:avLst>
-              <a:gd name="adj" fmla="val 7000"/>
-            </a:avLst>
-          </a:prstGeom>
-          <a:solidFill>
-            <a:srgbClr val="FFFFFF"/>
-          </a:solidFill>
-          <a:ln w="12700">
-            <a:solidFill>
-              <a:srgbClr val="D8DADC"/>
-            </a:solidFill>
-          </a:ln>
-        </p:spPr>
-        <p:style>
-          <a:lnRef idx="1">
-            <a:schemeClr val="accent1"/>
-          </a:lnRef>
-          <a:fillRef idx="3">
-            <a:schemeClr val="accent1"/>
-          </a:fillRef>
-          <a:effectRef idx="2">
-            <a:schemeClr val="accent1"/>
-          </a:effectRef>
-          <a:fontRef idx="minor">
-            <a:schemeClr val="lt1"/>
-          </a:fontRef>
-        </p:style>
-        <p:txBody>
-          <a:bodyPr rtlCol="0" anchor="ctr"/>
-          <a:lstStyle/>
-          <a:p>
-            <a:pPr algn="ctr"/>
-            <a:endParaRPr/>
-          </a:p>
-        </p:txBody>
-      </p:sp>
-      <p:pic>
-        <p:nvPicPr>
-          <p:cNvPr id="19" name="Picture 18" descr="final_report.png"/>
-          <p:cNvPicPr>
-            <a:picLocks noChangeAspect="1"/>
-          </p:cNvPicPr>
-          <p:nvPr/>
-        </p:nvPicPr>
-        <p:blipFill>
-          <a:blip r:embed="rId3"/>
-          <a:stretch>
-            <a:fillRect/>
-          </a:stretch>
-        </p:blipFill>
-        <p:spPr>
-          <a:xfrm>
-            <a:off x="6126480" y="3200400"/>
-            <a:ext cx="2816352" cy="2560320"/>
-          </a:xfrm>
-          <a:prstGeom prst="rect">
-            <a:avLst/>
-          </a:prstGeom>
-        </p:spPr>
-      </p:pic>
-      <p:sp>
-        <p:nvSpPr>
-          <p:cNvPr id="20" name="TextBox 19"/>
-          <p:cNvSpPr txBox="1"/>
-          <p:nvPr/>
-        </p:nvSpPr>
-        <p:spPr>
-          <a:xfrm>
-            <a:off x="6126480" y="5862320"/>
-            <a:ext cx="5394960" cy="365760"/>
-          </a:xfrm>
-          <a:prstGeom prst="rect">
-            <a:avLst/>
-          </a:prstGeom>
-          <a:noFill/>
-        </p:spPr>
-        <p:txBody>
-          <a:bodyPr wrap="square">
-            <a:spAutoFit/>
-          </a:bodyPr>
-          <a:lstStyle/>
-          <a:p>
-            <a:pPr algn="ctr"/>
-            <a:r>
-              <a:rPr sz="1250" b="0" i="1">
-                <a:solidFill>
-                  <a:srgbClr val="3F3F3F"/>
-                </a:solidFill>
-                <a:latin typeface="Segoe UI"/>
-              </a:rPr>
-              <a:t>100% sovereignty score — real restore, 3,344 files</a:t>
+              <a:t>Docs site: pencoder.github.io/full-auto-migration — user guide, project walkthrough, and Praktikum report, published.</a:t>
             </a:r>
           </a:p>
         </p:txBody>
@@ -16597,14 +16287,14 @@
       </p:grpSpPr>
       <p:sp>
         <p:nvSpPr>
-          <p:cNvPr id="3" name="TextBox 2"/>
+          <p:cNvPr id="2" name="TextBox 1"/>
           <p:cNvSpPr txBox="1"/>
           <p:nvPr/>
         </p:nvSpPr>
         <p:spPr>
           <a:xfrm>
-            <a:off x="822960" y="2834640"/>
-            <a:ext cx="10515600" cy="1005840"/>
+            <a:off x="548640" y="274320"/>
+            <a:ext cx="10058400" cy="320040"/>
           </a:xfrm>
           <a:prstGeom prst="rect">
             <a:avLst/>
@@ -16619,13 +16309,48 @@
           <a:p>
             <a:pPr algn="l"/>
             <a:r>
-              <a:rPr sz="4800" b="1" i="0">
+              <a:rPr sz="1200" b="1" i="0">
                 <a:solidFill>
                   <a:srgbClr val="063D79"/>
                 </a:solidFill>
                 <a:latin typeface="Segoe UI"/>
               </a:rPr>
-              <a:t>CRITIQUE</a:t>
+              <a:t>EVIDENCE</a:t>
+            </a:r>
+          </a:p>
+        </p:txBody>
+      </p:sp>
+      <p:sp>
+        <p:nvSpPr>
+          <p:cNvPr id="3" name="TextBox 2"/>
+          <p:cNvSpPr txBox="1"/>
+          <p:nvPr/>
+        </p:nvSpPr>
+        <p:spPr>
+          <a:xfrm>
+            <a:off x="548640" y="566928"/>
+            <a:ext cx="10972800" cy="685800"/>
+          </a:xfrm>
+          <a:prstGeom prst="rect">
+            <a:avLst/>
+          </a:prstGeom>
+          <a:noFill/>
+        </p:spPr>
+        <p:txBody>
+          <a:bodyPr wrap="square">
+            <a:spAutoFit/>
+          </a:bodyPr>
+          <a:lstStyle/>
+          <a:p>
+            <a:pPr algn="l"/>
+            <a:r>
+              <a:rPr sz="2700" b="1" i="0">
+                <a:solidFill>
+                  <a:srgbClr val="1A1A1A"/>
+                </a:solidFill>
+                <a:latin typeface="Segoe UI"/>
+              </a:rPr>
+              <a:t>What the project delivers</a:t>
             </a:r>
           </a:p>
         </p:txBody>
@@ -16638,8 +16363,8 @@
         </p:nvSpPr>
         <p:spPr>
           <a:xfrm>
-            <a:off x="822960" y="3794760"/>
-            <a:ext cx="1188720" cy="50800"/>
+            <a:off x="548640" y="1207008"/>
+            <a:ext cx="1005840" cy="38100"/>
           </a:xfrm>
           <a:prstGeom prst="rect">
             <a:avLst/>
@@ -16677,24 +16402,26 @@
       </p:sp>
       <p:sp>
         <p:nvSpPr>
-          <p:cNvPr id="5" name="Oval 4"/>
+          <p:cNvPr id="5" name="Rounded Rectangle 4"/>
           <p:cNvSpPr/>
           <p:nvPr/>
         </p:nvSpPr>
         <p:spPr>
           <a:xfrm>
-            <a:off x="1598676" y="4572000"/>
-            <a:ext cx="201168" cy="201168"/>
-          </a:xfrm>
-          <a:prstGeom prst="ellipse">
-            <a:avLst/>
+            <a:off x="731520" y="1645920"/>
+            <a:ext cx="2514600" cy="1371600"/>
+          </a:xfrm>
+          <a:prstGeom prst="roundRect">
+            <a:avLst>
+              <a:gd name="adj" fmla="val 7000"/>
+            </a:avLst>
           </a:prstGeom>
           <a:solidFill>
-            <a:srgbClr val="063D79"/>
+            <a:srgbClr val="FFFFFF"/>
           </a:solidFill>
-          <a:ln w="15875">
+          <a:ln w="12700">
             <a:solidFill>
-              <a:srgbClr val="063D79"/>
+              <a:srgbClr val="D8DADC"/>
             </a:solidFill>
           </a:ln>
           <a:effectLst/>
@@ -16730,8 +16457,8 @@
         </p:nvSpPr>
         <p:spPr>
           <a:xfrm>
-            <a:off x="822960" y="4892040"/>
-            <a:ext cx="1752600" cy="320040"/>
+            <a:off x="731520" y="1783080"/>
+            <a:ext cx="2514600" cy="685800"/>
           </a:xfrm>
           <a:prstGeom prst="rect">
             <a:avLst/>
@@ -16746,37 +16473,74 @@
           <a:p>
             <a:pPr algn="ctr"/>
             <a:r>
-              <a:rPr sz="1100" b="0" i="0">
-                <a:solidFill>
-                  <a:srgbClr val="3F3F3F"/>
+              <a:rPr sz="3200" b="1" i="0">
+                <a:solidFill>
+                  <a:srgbClr val="063D79"/>
                 </a:solidFill>
                 <a:latin typeface="Segoe UI"/>
               </a:rPr>
-              <a:t>Motivation</a:t>
-            </a:r>
-          </a:p>
-        </p:txBody>
-      </p:sp>
-      <p:sp>
-        <p:nvSpPr>
-          <p:cNvPr id="7" name="Oval 6"/>
+              <a:t>238</a:t>
+            </a:r>
+          </a:p>
+        </p:txBody>
+      </p:sp>
+      <p:sp>
+        <p:nvSpPr>
+          <p:cNvPr id="7" name="TextBox 6"/>
+          <p:cNvSpPr txBox="1"/>
+          <p:nvPr/>
+        </p:nvSpPr>
+        <p:spPr>
+          <a:xfrm>
+            <a:off x="868680" y="2377440"/>
+            <a:ext cx="2240280" cy="457200"/>
+          </a:xfrm>
+          <a:prstGeom prst="rect">
+            <a:avLst/>
+          </a:prstGeom>
+          <a:noFill/>
+        </p:spPr>
+        <p:txBody>
+          <a:bodyPr wrap="square">
+            <a:spAutoFit/>
+          </a:bodyPr>
+          <a:lstStyle/>
+          <a:p>
+            <a:pPr algn="ctr"/>
+            <a:r>
+              <a:rPr sz="1250" b="0" i="0">
+                <a:solidFill>
+                  <a:srgbClr val="1A1A1A"/>
+                </a:solidFill>
+                <a:latin typeface="Segoe UI"/>
+              </a:rPr>
+              <a:t>app mappings</a:t>
+            </a:r>
+          </a:p>
+        </p:txBody>
+      </p:sp>
+      <p:sp>
+        <p:nvSpPr>
+          <p:cNvPr id="8" name="Rounded Rectangle 7"/>
           <p:cNvSpPr/>
           <p:nvPr/>
         </p:nvSpPr>
         <p:spPr>
           <a:xfrm>
-            <a:off x="3351276" y="4572000"/>
-            <a:ext cx="201168" cy="201168"/>
-          </a:xfrm>
-          <a:prstGeom prst="ellipse">
-            <a:avLst/>
+            <a:off x="3364992" y="1645920"/>
+            <a:ext cx="2514600" cy="1371600"/>
+          </a:xfrm>
+          <a:prstGeom prst="roundRect">
+            <a:avLst>
+              <a:gd name="adj" fmla="val 7000"/>
+            </a:avLst>
           </a:prstGeom>
           <a:solidFill>
-            <a:srgbClr val="063D79"/>
+            <a:srgbClr val="FFFFFF"/>
           </a:solidFill>
-          <a:ln w="15875">
+          <a:ln w="12700">
             <a:solidFill>
-              <a:srgbClr val="063D79"/>
+              <a:srgbClr val="D8DADC"/>
             </a:solidFill>
           </a:ln>
           <a:effectLst/>
@@ -16806,14 +16570,14 @@
       </p:sp>
       <p:sp>
         <p:nvSpPr>
-          <p:cNvPr id="8" name="TextBox 7"/>
+          <p:cNvPr id="9" name="TextBox 8"/>
           <p:cNvSpPr txBox="1"/>
           <p:nvPr/>
         </p:nvSpPr>
         <p:spPr>
           <a:xfrm>
-            <a:off x="2575560" y="4892040"/>
-            <a:ext cx="1752600" cy="320040"/>
+            <a:off x="3364992" y="1783080"/>
+            <a:ext cx="2514600" cy="685800"/>
           </a:xfrm>
           <a:prstGeom prst="rect">
             <a:avLst/>
@@ -16828,37 +16592,74 @@
           <a:p>
             <a:pPr algn="ctr"/>
             <a:r>
-              <a:rPr sz="1100" b="0" i="0">
-                <a:solidFill>
-                  <a:srgbClr val="3F3F3F"/>
+              <a:rPr sz="3200" b="1" i="0">
+                <a:solidFill>
+                  <a:srgbClr val="063D79"/>
                 </a:solidFill>
                 <a:latin typeface="Segoe UI"/>
               </a:rPr>
-              <a:t>Idea</a:t>
-            </a:r>
-          </a:p>
-        </p:txBody>
-      </p:sp>
-      <p:sp>
-        <p:nvSpPr>
-          <p:cNvPr id="9" name="Oval 8"/>
+              <a:t>192</a:t>
+            </a:r>
+          </a:p>
+        </p:txBody>
+      </p:sp>
+      <p:sp>
+        <p:nvSpPr>
+          <p:cNvPr id="10" name="TextBox 9"/>
+          <p:cNvSpPr txBox="1"/>
+          <p:nvPr/>
+        </p:nvSpPr>
+        <p:spPr>
+          <a:xfrm>
+            <a:off x="3502152" y="2377440"/>
+            <a:ext cx="2240280" cy="457200"/>
+          </a:xfrm>
+          <a:prstGeom prst="rect">
+            <a:avLst/>
+          </a:prstGeom>
+          <a:noFill/>
+        </p:spPr>
+        <p:txBody>
+          <a:bodyPr wrap="square">
+            <a:spAutoFit/>
+          </a:bodyPr>
+          <a:lstStyle/>
+          <a:p>
+            <a:pPr algn="ctr"/>
+            <a:r>
+              <a:rPr sz="1250" b="0" i="0">
+                <a:solidFill>
+                  <a:srgbClr val="1A1A1A"/>
+                </a:solidFill>
+                <a:latin typeface="Segoe UI"/>
+              </a:rPr>
+              <a:t>automated tests</a:t>
+            </a:r>
+          </a:p>
+        </p:txBody>
+      </p:sp>
+      <p:sp>
+        <p:nvSpPr>
+          <p:cNvPr id="11" name="Rounded Rectangle 10"/>
           <p:cNvSpPr/>
           <p:nvPr/>
         </p:nvSpPr>
         <p:spPr>
           <a:xfrm>
-            <a:off x="5103876" y="4572000"/>
-            <a:ext cx="201168" cy="201168"/>
-          </a:xfrm>
-          <a:prstGeom prst="ellipse">
-            <a:avLst/>
+            <a:off x="5998464" y="1645920"/>
+            <a:ext cx="2514600" cy="1371600"/>
+          </a:xfrm>
+          <a:prstGeom prst="roundRect">
+            <a:avLst>
+              <a:gd name="adj" fmla="val 7000"/>
+            </a:avLst>
           </a:prstGeom>
           <a:solidFill>
-            <a:srgbClr val="063D79"/>
+            <a:srgbClr val="FFFFFF"/>
           </a:solidFill>
-          <a:ln w="15875">
+          <a:ln w="12700">
             <a:solidFill>
-              <a:srgbClr val="063D79"/>
+              <a:srgbClr val="D8DADC"/>
             </a:solidFill>
           </a:ln>
           <a:effectLst/>
@@ -16888,14 +16689,14 @@
       </p:sp>
       <p:sp>
         <p:nvSpPr>
-          <p:cNvPr id="10" name="TextBox 9"/>
+          <p:cNvPr id="12" name="TextBox 11"/>
           <p:cNvSpPr txBox="1"/>
           <p:nvPr/>
         </p:nvSpPr>
         <p:spPr>
           <a:xfrm>
-            <a:off x="4328160" y="4892040"/>
-            <a:ext cx="1752600" cy="320040"/>
+            <a:off x="5998464" y="1783080"/>
+            <a:ext cx="2514600" cy="685800"/>
           </a:xfrm>
           <a:prstGeom prst="rect">
             <a:avLst/>
@@ -16910,37 +16711,74 @@
           <a:p>
             <a:pPr algn="ctr"/>
             <a:r>
-              <a:rPr sz="1100" b="0" i="0">
-                <a:solidFill>
-                  <a:srgbClr val="3F3F3F"/>
+              <a:rPr sz="3200" b="1" i="0">
+                <a:solidFill>
+                  <a:srgbClr val="063D79"/>
                 </a:solidFill>
                 <a:latin typeface="Segoe UI"/>
               </a:rPr>
-              <a:t>Method</a:t>
-            </a:r>
-          </a:p>
-        </p:txBody>
-      </p:sp>
-      <p:sp>
-        <p:nvSpPr>
-          <p:cNvPr id="11" name="Oval 10"/>
+              <a:t>3</a:t>
+            </a:r>
+          </a:p>
+        </p:txBody>
+      </p:sp>
+      <p:sp>
+        <p:nvSpPr>
+          <p:cNvPr id="13" name="TextBox 12"/>
+          <p:cNvSpPr txBox="1"/>
+          <p:nvPr/>
+        </p:nvSpPr>
+        <p:spPr>
+          <a:xfrm>
+            <a:off x="6135624" y="2377440"/>
+            <a:ext cx="2240280" cy="457200"/>
+          </a:xfrm>
+          <a:prstGeom prst="rect">
+            <a:avLst/>
+          </a:prstGeom>
+          <a:noFill/>
+        </p:spPr>
+        <p:txBody>
+          <a:bodyPr wrap="square">
+            <a:spAutoFit/>
+          </a:bodyPr>
+          <a:lstStyle/>
+          <a:p>
+            <a:pPr algn="ctr"/>
+            <a:r>
+              <a:rPr sz="1250" b="0" i="0">
+                <a:solidFill>
+                  <a:srgbClr val="1A1A1A"/>
+                </a:solidFill>
+                <a:latin typeface="Segoe UI"/>
+              </a:rPr>
+              <a:t>guidance modes</a:t>
+            </a:r>
+          </a:p>
+        </p:txBody>
+      </p:sp>
+      <p:sp>
+        <p:nvSpPr>
+          <p:cNvPr id="14" name="Rounded Rectangle 13"/>
           <p:cNvSpPr/>
           <p:nvPr/>
         </p:nvSpPr>
         <p:spPr>
           <a:xfrm>
-            <a:off x="6856476" y="4572000"/>
-            <a:ext cx="201168" cy="201168"/>
-          </a:xfrm>
-          <a:prstGeom prst="ellipse">
-            <a:avLst/>
+            <a:off x="8631936" y="1645920"/>
+            <a:ext cx="2514600" cy="1371600"/>
+          </a:xfrm>
+          <a:prstGeom prst="roundRect">
+            <a:avLst>
+              <a:gd name="adj" fmla="val 7000"/>
+            </a:avLst>
           </a:prstGeom>
           <a:solidFill>
-            <a:srgbClr val="063D79"/>
+            <a:srgbClr val="FFFFFF"/>
           </a:solidFill>
-          <a:ln w="15875">
+          <a:ln w="12700">
             <a:solidFill>
-              <a:srgbClr val="063D79"/>
+              <a:srgbClr val="D8DADC"/>
             </a:solidFill>
           </a:ln>
           <a:effectLst/>
@@ -16970,14 +16808,14 @@
       </p:sp>
       <p:sp>
         <p:nvSpPr>
-          <p:cNvPr id="12" name="TextBox 11"/>
+          <p:cNvPr id="15" name="TextBox 14"/>
           <p:cNvSpPr txBox="1"/>
           <p:nvPr/>
         </p:nvSpPr>
         <p:spPr>
           <a:xfrm>
-            <a:off x="6080760" y="4892040"/>
-            <a:ext cx="1752600" cy="320040"/>
+            <a:off x="8631936" y="1783080"/>
+            <a:ext cx="2514600" cy="685800"/>
           </a:xfrm>
           <a:prstGeom prst="rect">
             <a:avLst/>
@@ -16992,40 +16830,94 @@
           <a:p>
             <a:pPr algn="ctr"/>
             <a:r>
-              <a:rPr sz="1100" b="0" i="0">
-                <a:solidFill>
-                  <a:srgbClr val="3F3F3F"/>
+              <a:rPr sz="3200" b="1" i="0">
+                <a:solidFill>
+                  <a:srgbClr val="063D79"/>
                 </a:solidFill>
                 <a:latin typeface="Segoe UI"/>
               </a:rPr>
-              <a:t>Evidence</a:t>
-            </a:r>
-          </a:p>
-        </p:txBody>
-      </p:sp>
-      <p:sp>
-        <p:nvSpPr>
-          <p:cNvPr id="13" name="Oval 12"/>
+              <a:t>2</a:t>
+            </a:r>
+          </a:p>
+        </p:txBody>
+      </p:sp>
+      <p:sp>
+        <p:nvSpPr>
+          <p:cNvPr id="16" name="TextBox 15"/>
+          <p:cNvSpPr txBox="1"/>
+          <p:nvPr/>
+        </p:nvSpPr>
+        <p:spPr>
+          <a:xfrm>
+            <a:off x="8769096" y="2377440"/>
+            <a:ext cx="2240280" cy="457200"/>
+          </a:xfrm>
+          <a:prstGeom prst="rect">
+            <a:avLst/>
+          </a:prstGeom>
+          <a:noFill/>
+        </p:spPr>
+        <p:txBody>
+          <a:bodyPr wrap="square">
+            <a:spAutoFit/>
+          </a:bodyPr>
+          <a:lstStyle/>
+          <a:p>
+            <a:pPr algn="ctr"/>
+            <a:r>
+              <a:rPr sz="1250" b="0" i="0">
+                <a:solidFill>
+                  <a:srgbClr val="1A1A1A"/>
+                </a:solidFill>
+                <a:latin typeface="Segoe UI"/>
+              </a:rPr>
+              <a:t>platforms packaged</a:t>
+            </a:r>
+          </a:p>
+        </p:txBody>
+      </p:sp>
+      <p:graphicFrame>
+        <p:nvGraphicFramePr>
+          <p:cNvPr id="17" name="Chart 16"/>
+          <p:cNvGraphicFramePr>
+            <a:graphicFrameLocks noGrp="1"/>
+          </p:cNvGraphicFramePr>
+          <p:nvPr/>
+        </p:nvGraphicFramePr>
+        <p:xfrm>
+          <a:off x="731520" y="3246120"/>
+          <a:ext cx="5029200" cy="3200400"/>
+        </p:xfrm>
+        <a:graphic>
+          <a:graphicData uri="http://schemas.openxmlformats.org/drawingml/2006/chart">
+            <c:chart xmlns:c="http://schemas.openxmlformats.org/drawingml/2006/chart" xmlns:r="http://schemas.openxmlformats.org/officeDocument/2006/relationships" r:id="rId2"/>
+          </a:graphicData>
+        </a:graphic>
+      </p:graphicFrame>
+      <p:sp>
+        <p:nvSpPr>
+          <p:cNvPr id="18" name="Rounded Rectangle 17"/>
           <p:cNvSpPr/>
           <p:nvPr/>
         </p:nvSpPr>
         <p:spPr>
           <a:xfrm>
-            <a:off x="8609076" y="4572000"/>
-            <a:ext cx="201168" cy="201168"/>
-          </a:xfrm>
-          <a:prstGeom prst="ellipse">
-            <a:avLst/>
+            <a:off x="6050280" y="3124200"/>
+            <a:ext cx="2968752" cy="2712720"/>
+          </a:xfrm>
+          <a:prstGeom prst="roundRect">
+            <a:avLst>
+              <a:gd name="adj" fmla="val 7000"/>
+            </a:avLst>
           </a:prstGeom>
           <a:solidFill>
-            <a:srgbClr val="063D79"/>
+            <a:srgbClr val="FFFFFF"/>
           </a:solidFill>
-          <a:ln w="15875">
+          <a:ln w="12700">
             <a:solidFill>
-              <a:srgbClr val="063D79"/>
+              <a:srgbClr val="D8DADC"/>
             </a:solidFill>
           </a:ln>
-          <a:effectLst/>
         </p:spPr>
         <p:style>
           <a:lnRef idx="1">
@@ -17050,16 +16942,40 @@
           </a:p>
         </p:txBody>
       </p:sp>
-      <p:sp>
-        <p:nvSpPr>
-          <p:cNvPr id="14" name="TextBox 13"/>
+      <p:pic>
+        <p:nvPicPr>
+          <p:cNvPr id="19" name="Picture 18" descr="final_report.png"/>
+          <p:cNvPicPr>
+            <a:picLocks noChangeAspect="1"/>
+          </p:cNvPicPr>
+          <p:nvPr/>
+        </p:nvPicPr>
+        <p:blipFill>
+          <a:blip r:embed="rId3"/>
+          <a:stretch>
+            <a:fillRect/>
+          </a:stretch>
+        </p:blipFill>
+        <p:spPr>
+          <a:xfrm>
+            <a:off x="6126480" y="3200400"/>
+            <a:ext cx="2816352" cy="2560320"/>
+          </a:xfrm>
+          <a:prstGeom prst="rect">
+            <a:avLst/>
+          </a:prstGeom>
+        </p:spPr>
+      </p:pic>
+      <p:sp>
+        <p:nvSpPr>
+          <p:cNvPr id="20" name="TextBox 19"/>
           <p:cNvSpPr txBox="1"/>
           <p:nvPr/>
         </p:nvSpPr>
         <p:spPr>
           <a:xfrm>
-            <a:off x="7833360" y="4892040"/>
-            <a:ext cx="1752600" cy="320040"/>
+            <a:off x="6126480" y="5862320"/>
+            <a:ext cx="5394960" cy="365760"/>
           </a:xfrm>
           <a:prstGeom prst="rect">
             <a:avLst/>
@@ -17074,95 +16990,13 @@
           <a:p>
             <a:pPr algn="ctr"/>
             <a:r>
-              <a:rPr sz="1100" b="1" i="0">
-                <a:solidFill>
-                  <a:srgbClr val="063D79"/>
+              <a:rPr sz="1250" b="0" i="1">
+                <a:solidFill>
+                  <a:srgbClr val="3F3F3F"/>
                 </a:solidFill>
                 <a:latin typeface="Segoe UI"/>
               </a:rPr>
-              <a:t>Critique</a:t>
-            </a:r>
-          </a:p>
-        </p:txBody>
-      </p:sp>
-      <p:sp>
-        <p:nvSpPr>
-          <p:cNvPr id="15" name="Oval 14"/>
-          <p:cNvSpPr/>
-          <p:nvPr/>
-        </p:nvSpPr>
-        <p:spPr>
-          <a:xfrm>
-            <a:off x="10361676" y="4572000"/>
-            <a:ext cx="201168" cy="201168"/>
-          </a:xfrm>
-          <a:prstGeom prst="ellipse">
-            <a:avLst/>
-          </a:prstGeom>
-          <a:solidFill>
-            <a:srgbClr val="FFFFFF"/>
-          </a:solidFill>
-          <a:ln w="15875">
-            <a:solidFill>
-              <a:srgbClr val="D8DADC"/>
-            </a:solidFill>
-          </a:ln>
-          <a:effectLst/>
-        </p:spPr>
-        <p:style>
-          <a:lnRef idx="1">
-            <a:schemeClr val="accent1"/>
-          </a:lnRef>
-          <a:fillRef idx="3">
-            <a:schemeClr val="accent1"/>
-          </a:fillRef>
-          <a:effectRef idx="2">
-            <a:schemeClr val="accent1"/>
-          </a:effectRef>
-          <a:fontRef idx="minor">
-            <a:schemeClr val="lt1"/>
-          </a:fontRef>
-        </p:style>
-        <p:txBody>
-          <a:bodyPr rtlCol="0" anchor="ctr"/>
-          <a:lstStyle/>
-          <a:p>
-            <a:pPr algn="ctr"/>
-            <a:endParaRPr/>
-          </a:p>
-        </p:txBody>
-      </p:sp>
-      <p:sp>
-        <p:nvSpPr>
-          <p:cNvPr id="16" name="TextBox 15"/>
-          <p:cNvSpPr txBox="1"/>
-          <p:nvPr/>
-        </p:nvSpPr>
-        <p:spPr>
-          <a:xfrm>
-            <a:off x="9585960" y="4892040"/>
-            <a:ext cx="1752600" cy="320040"/>
-          </a:xfrm>
-          <a:prstGeom prst="rect">
-            <a:avLst/>
-          </a:prstGeom>
-          <a:noFill/>
-        </p:spPr>
-        <p:txBody>
-          <a:bodyPr wrap="square">
-            <a:spAutoFit/>
-          </a:bodyPr>
-          <a:lstStyle/>
-          <a:p>
-            <a:pPr algn="ctr"/>
-            <a:r>
-              <a:rPr sz="1100" b="0" i="0">
-                <a:solidFill>
-                  <a:srgbClr val="3F3F3F"/>
-                </a:solidFill>
-                <a:latin typeface="Segoe UI"/>
-              </a:rPr>
-              <a:t>Takeaway</a:t>
+              <a:t>100% sovereignty score — real restore, 3,344 files</a:t>
             </a:r>
           </a:p>
         </p:txBody>
@@ -17176,7 +17010,7 @@
 </file>
 
 <file path=ppt/slides/slide22.xml><?xml version="1.0" encoding="utf-8"?>
-<p:sld xmlns:a="http://schemas.openxmlformats.org/drawingml/2006/main" xmlns:r="http://schemas.openxmlformats.org/officeDocument/2006/relationships" xmlns:p="http://schemas.openxmlformats.org/presentationml/2006/main" show="0">
+<p:sld xmlns:a="http://schemas.openxmlformats.org/drawingml/2006/main" xmlns:r="http://schemas.openxmlformats.org/officeDocument/2006/relationships" xmlns:p="http://schemas.openxmlformats.org/presentationml/2006/main">
   <p:cSld>
     <p:spTree>
       <p:nvGrpSpPr>
@@ -17222,7 +17056,7 @@
                 </a:solidFill>
                 <a:latin typeface="Segoe UI"/>
               </a:rPr>
-              <a:t>CRITIQUE</a:t>
+              <a:t>EVIDENCE</a:t>
             </a:r>
           </a:p>
         </p:txBody>
@@ -17257,7 +17091,7 @@
                 </a:solidFill>
                 <a:latin typeface="Segoe UI"/>
               </a:rPr>
-              <a:t>Four review gaps, plus two found checking our own claims</a:t>
+              <a:t>Two things that didn't hold up</a:t>
             </a:r>
           </a:p>
         </p:txBody>
@@ -17307,553 +17141,41 @@
           </a:p>
         </p:txBody>
       </p:sp>
-      <p:graphicFrame>
-        <p:nvGraphicFramePr>
-          <p:cNvPr id="5" name="Table 4"/>
-          <p:cNvGraphicFramePr>
-            <a:graphicFrameLocks noGrp="1"/>
-          </p:cNvGraphicFramePr>
-          <p:nvPr/>
-        </p:nvGraphicFramePr>
-        <p:xfrm>
-          <a:off x="548640" y="1554480"/>
-          <a:ext cx="11064240" cy="2514600"/>
-        </p:xfrm>
-        <a:graphic>
-          <a:graphicData uri="http://schemas.openxmlformats.org/drawingml/2006/table">
-            <a:tbl>
-              <a:tblPr firstRow="1" bandRow="1">
-                <a:tableStyleId>{5C22544A-7EE6-4342-B048-85BDC9FD1C3A}</a:tableStyleId>
-              </a:tblPr>
-              <a:tblGrid>
-                <a:gridCol w="457200">
-                  <a:extLst>
-                    <a:ext uri="{9D8B030D-6E8A-4147-A177-3AD203B41FA5}">
-                      <a16:colId xmlns:a16="http://schemas.microsoft.com/office/drawing/2014/main" val="20000"/>
-                    </a:ext>
-                  </a:extLst>
-                </a:gridCol>
-                <a:gridCol w="3017520">
-                  <a:extLst>
-                    <a:ext uri="{9D8B030D-6E8A-4147-A177-3AD203B41FA5}">
-                      <a16:colId xmlns:a16="http://schemas.microsoft.com/office/drawing/2014/main" val="20001"/>
-                    </a:ext>
-                  </a:extLst>
-                </a:gridCol>
-                <a:gridCol w="5943600">
-                  <a:extLst>
-                    <a:ext uri="{9D8B030D-6E8A-4147-A177-3AD203B41FA5}">
-                      <a16:colId xmlns:a16="http://schemas.microsoft.com/office/drawing/2014/main" val="20002"/>
-                    </a:ext>
-                  </a:extLst>
-                </a:gridCol>
-                <a:gridCol w="1645920">
-                  <a:extLst>
-                    <a:ext uri="{9D8B030D-6E8A-4147-A177-3AD203B41FA5}">
-                      <a16:colId xmlns:a16="http://schemas.microsoft.com/office/drawing/2014/main" val="20003"/>
-                    </a:ext>
-                  </a:extLst>
-                </a:gridCol>
-              </a:tblGrid>
-              <a:tr h="502920">
-                <a:tc>
-                  <a:txBody>
-                    <a:bodyPr/>
-                    <a:lstStyle/>
-                    <a:p>
-                      <a:pPr algn="ctr"/>
-                      <a:r>
-                        <a:rPr sz="1300" b="1">
-                          <a:solidFill>
-                            <a:srgbClr val="FFFFFF"/>
-                          </a:solidFill>
-                          <a:latin typeface="Segoe UI"/>
-                        </a:rPr>
-                        <a:t>#</a:t>
-                      </a:r>
-                    </a:p>
-                  </a:txBody>
-                  <a:tcPr marL="101600" marR="101600" marT="50800" marB="50800" anchor="ctr">
-                    <a:solidFill>
-                      <a:srgbClr val="063D79"/>
-                    </a:solidFill>
-                  </a:tcPr>
-                </a:tc>
-                <a:tc>
-                  <a:txBody>
-                    <a:bodyPr/>
-                    <a:lstStyle/>
-                    <a:p>
-                      <a:pPr algn="ctr"/>
-                      <a:r>
-                        <a:rPr sz="1300" b="1">
-                          <a:solidFill>
-                            <a:srgbClr val="FFFFFF"/>
-                          </a:solidFill>
-                          <a:latin typeface="Segoe UI"/>
-                        </a:rPr>
-                        <a:t>Gap raised</a:t>
-                      </a:r>
-                    </a:p>
-                  </a:txBody>
-                  <a:tcPr marL="101600" marR="101600" marT="50800" marB="50800" anchor="ctr">
-                    <a:solidFill>
-                      <a:srgbClr val="063D79"/>
-                    </a:solidFill>
-                  </a:tcPr>
-                </a:tc>
-                <a:tc>
-                  <a:txBody>
-                    <a:bodyPr/>
-                    <a:lstStyle/>
-                    <a:p>
-                      <a:pPr algn="ctr"/>
-                      <a:r>
-                        <a:rPr sz="1300" b="1">
-                          <a:solidFill>
-                            <a:srgbClr val="FFFFFF"/>
-                          </a:solidFill>
-                          <a:latin typeface="Segoe UI"/>
-                        </a:rPr>
-                        <a:t>Fix</a:t>
-                      </a:r>
-                    </a:p>
-                  </a:txBody>
-                  <a:tcPr marL="101600" marR="101600" marT="50800" marB="50800" anchor="ctr">
-                    <a:solidFill>
-                      <a:srgbClr val="063D79"/>
-                    </a:solidFill>
-                  </a:tcPr>
-                </a:tc>
-                <a:tc>
-                  <a:txBody>
-                    <a:bodyPr/>
-                    <a:lstStyle/>
-                    <a:p>
-                      <a:pPr algn="ctr"/>
-                      <a:r>
-                        <a:rPr sz="1300" b="1">
-                          <a:solidFill>
-                            <a:srgbClr val="FFFFFF"/>
-                          </a:solidFill>
-                          <a:latin typeface="Segoe UI"/>
-                        </a:rPr>
-                        <a:t>Status</a:t>
-                      </a:r>
-                    </a:p>
-                  </a:txBody>
-                  <a:tcPr marL="101600" marR="101600" marT="50800" marB="50800" anchor="ctr">
-                    <a:solidFill>
-                      <a:srgbClr val="063D79"/>
-                    </a:solidFill>
-                  </a:tcPr>
-                </a:tc>
-                <a:extLst>
-                  <a:ext uri="{0D108BD9-81ED-4DB2-BD59-A6C34878D82A}">
-                    <a16:rowId xmlns:a16="http://schemas.microsoft.com/office/drawing/2014/main" val="10000"/>
-                  </a:ext>
-                </a:extLst>
-              </a:tr>
-              <a:tr h="502920">
-                <a:tc>
-                  <a:txBody>
-                    <a:bodyPr/>
-                    <a:lstStyle/>
-                    <a:p>
-                      <a:pPr algn="l"/>
-                      <a:r>
-                        <a:rPr sz="1300" b="0">
-                          <a:solidFill>
-                            <a:srgbClr val="1A1A1A"/>
-                          </a:solidFill>
-                          <a:latin typeface="Segoe UI"/>
-                        </a:rPr>
-                        <a:t>1</a:t>
-                      </a:r>
-                    </a:p>
-                  </a:txBody>
-                  <a:tcPr marL="101600" marR="101600" marT="50800" marB="50800" anchor="ctr">
-                    <a:solidFill>
-                      <a:srgbClr val="FFFFFF"/>
-                    </a:solidFill>
-                  </a:tcPr>
-                </a:tc>
-                <a:tc>
-                  <a:txBody>
-                    <a:bodyPr/>
-                    <a:lstStyle/>
-                    <a:p>
-                      <a:pPr algn="ctr"/>
-                      <a:r>
-                        <a:rPr sz="1300" b="0">
-                          <a:solidFill>
-                            <a:srgbClr val="1A1A1A"/>
-                          </a:solidFill>
-                          <a:latin typeface="Segoe UI"/>
-                        </a:rPr>
-                        <a:t>Vague objectives ("more dynamic strategies")</a:t>
-                      </a:r>
-                    </a:p>
-                  </a:txBody>
-                  <a:tcPr marL="101600" marR="101600" marT="50800" marB="50800" anchor="ctr">
-                    <a:solidFill>
-                      <a:srgbClr val="FFFFFF"/>
-                    </a:solidFill>
-                  </a:tcPr>
-                </a:tc>
-                <a:tc>
-                  <a:txBody>
-                    <a:bodyPr/>
-                    <a:lstStyle/>
-                    <a:p>
-                      <a:pPr algn="ctr"/>
-                      <a:r>
-                        <a:rPr sz="1300" b="0">
-                          <a:solidFill>
-                            <a:srgbClr val="1A1A1A"/>
-                          </a:solidFill>
-                          <a:latin typeface="Segoe UI"/>
-                        </a:rPr>
-                        <a:t>O1–O6 measurable targets, each with a result</a:t>
-                      </a:r>
-                    </a:p>
-                  </a:txBody>
-                  <a:tcPr marL="101600" marR="101600" marT="50800" marB="50800" anchor="ctr">
-                    <a:solidFill>
-                      <a:srgbClr val="FFFFFF"/>
-                    </a:solidFill>
-                  </a:tcPr>
-                </a:tc>
-                <a:tc>
-                  <a:txBody>
-                    <a:bodyPr/>
-                    <a:lstStyle/>
-                    <a:p>
-                      <a:pPr algn="ctr"/>
-                      <a:r>
-                        <a:rPr sz="1300" b="0">
-                          <a:solidFill>
-                            <a:srgbClr val="1A1A1A"/>
-                          </a:solidFill>
-                          <a:latin typeface="Segoe UI"/>
-                        </a:rPr>
-                        <a:t>Done</a:t>
-                      </a:r>
-                    </a:p>
-                  </a:txBody>
-                  <a:tcPr marL="101600" marR="101600" marT="50800" marB="50800" anchor="ctr">
-                    <a:solidFill>
-                      <a:srgbClr val="FFFFFF"/>
-                    </a:solidFill>
-                  </a:tcPr>
-                </a:tc>
-                <a:extLst>
-                  <a:ext uri="{0D108BD9-81ED-4DB2-BD59-A6C34878D82A}">
-                    <a16:rowId xmlns:a16="http://schemas.microsoft.com/office/drawing/2014/main" val="10001"/>
-                  </a:ext>
-                </a:extLst>
-              </a:tr>
-              <a:tr h="502920">
-                <a:tc>
-                  <a:txBody>
-                    <a:bodyPr/>
-                    <a:lstStyle/>
-                    <a:p>
-                      <a:pPr algn="l"/>
-                      <a:r>
-                        <a:rPr sz="1300" b="0">
-                          <a:solidFill>
-                            <a:srgbClr val="1A1A1A"/>
-                          </a:solidFill>
-                          <a:latin typeface="Segoe UI"/>
-                        </a:rPr>
-                        <a:t>2</a:t>
-                      </a:r>
-                    </a:p>
-                  </a:txBody>
-                  <a:tcPr marL="101600" marR="101600" marT="50800" marB="50800" anchor="ctr">
-                    <a:solidFill>
-                      <a:srgbClr val="EEF7FB"/>
-                    </a:solidFill>
-                  </a:tcPr>
-                </a:tc>
-                <a:tc>
-                  <a:txBody>
-                    <a:bodyPr/>
-                    <a:lstStyle/>
-                    <a:p>
-                      <a:pPr algn="ctr"/>
-                      <a:r>
-                        <a:rPr sz="1300" b="0">
-                          <a:solidFill>
-                            <a:srgbClr val="1A1A1A"/>
-                          </a:solidFill>
-                          <a:latin typeface="Segoe UI"/>
-                        </a:rPr>
-                        <a:t>Qt/CLI consistency too coarse</a:t>
-                      </a:r>
-                    </a:p>
-                  </a:txBody>
-                  <a:tcPr marL="101600" marR="101600" marT="50800" marB="50800" anchor="ctr">
-                    <a:solidFill>
-                      <a:srgbClr val="EEF7FB"/>
-                    </a:solidFill>
-                  </a:tcPr>
-                </a:tc>
-                <a:tc>
-                  <a:txBody>
-                    <a:bodyPr/>
-                    <a:lstStyle/>
-                    <a:p>
-                      <a:pPr algn="ctr"/>
-                      <a:r>
-                        <a:rPr sz="1300" b="0">
-                          <a:solidFill>
-                            <a:srgbClr val="1A1A1A"/>
-                          </a:solidFill>
-                          <a:latin typeface="Segoe UI"/>
-                        </a:rPr>
-                        <a:t>src/orchestration/mode_policy.py — one shared function per decision</a:t>
-                      </a:r>
-                    </a:p>
-                  </a:txBody>
-                  <a:tcPr marL="101600" marR="101600" marT="50800" marB="50800" anchor="ctr">
-                    <a:solidFill>
-                      <a:srgbClr val="EEF7FB"/>
-                    </a:solidFill>
-                  </a:tcPr>
-                </a:tc>
-                <a:tc>
-                  <a:txBody>
-                    <a:bodyPr/>
-                    <a:lstStyle/>
-                    <a:p>
-                      <a:pPr algn="ctr"/>
-                      <a:r>
-                        <a:rPr sz="1300" b="0">
-                          <a:solidFill>
-                            <a:srgbClr val="1A1A1A"/>
-                          </a:solidFill>
-                          <a:latin typeface="Segoe UI"/>
-                        </a:rPr>
-                        <a:t>Done</a:t>
-                      </a:r>
-                    </a:p>
-                  </a:txBody>
-                  <a:tcPr marL="101600" marR="101600" marT="50800" marB="50800" anchor="ctr">
-                    <a:solidFill>
-                      <a:srgbClr val="EEF7FB"/>
-                    </a:solidFill>
-                  </a:tcPr>
-                </a:tc>
-                <a:extLst>
-                  <a:ext uri="{0D108BD9-81ED-4DB2-BD59-A6C34878D82A}">
-                    <a16:rowId xmlns:a16="http://schemas.microsoft.com/office/drawing/2014/main" val="10002"/>
-                  </a:ext>
-                </a:extLst>
-              </a:tr>
-              <a:tr h="502920">
-                <a:tc>
-                  <a:txBody>
-                    <a:bodyPr/>
-                    <a:lstStyle/>
-                    <a:p>
-                      <a:pPr algn="l"/>
-                      <a:r>
-                        <a:rPr sz="1300" b="0">
-                          <a:solidFill>
-                            <a:srgbClr val="1A1A1A"/>
-                          </a:solidFill>
-                          <a:latin typeface="Segoe UI"/>
-                        </a:rPr>
-                        <a:t>3</a:t>
-                      </a:r>
-                    </a:p>
-                  </a:txBody>
-                  <a:tcPr marL="101600" marR="101600" marT="50800" marB="50800" anchor="ctr">
-                    <a:solidFill>
-                      <a:srgbClr val="FFFFFF"/>
-                    </a:solidFill>
-                  </a:tcPr>
-                </a:tc>
-                <a:tc>
-                  <a:txBody>
-                    <a:bodyPr/>
-                    <a:lstStyle/>
-                    <a:p>
-                      <a:pPr algn="ctr"/>
-                      <a:r>
-                        <a:rPr sz="1300" b="0">
-                          <a:solidFill>
-                            <a:srgbClr val="1A1A1A"/>
-                          </a:solidFill>
-                          <a:latin typeface="Segoe UI"/>
-                        </a:rPr>
-                        <a:t>Tight timeline, no buffer</a:t>
-                      </a:r>
-                    </a:p>
-                  </a:txBody>
-                  <a:tcPr marL="101600" marR="101600" marT="50800" marB="50800" anchor="ctr">
-                    <a:solidFill>
-                      <a:srgbClr val="FFFFFF"/>
-                    </a:solidFill>
-                  </a:tcPr>
-                </a:tc>
-                <a:tc>
-                  <a:txBody>
-                    <a:bodyPr/>
-                    <a:lstStyle/>
-                    <a:p>
-                      <a:pPr algn="ctr"/>
-                      <a:r>
-                        <a:rPr sz="1300" b="0">
-                          <a:solidFill>
-                            <a:srgbClr val="1A1A1A"/>
-                          </a:solidFill>
-                          <a:latin typeface="Segoe UI"/>
-                        </a:rPr>
-                        <a:t>6-day risk buffer added to the Gantt</a:t>
-                      </a:r>
-                    </a:p>
-                  </a:txBody>
-                  <a:tcPr marL="101600" marR="101600" marT="50800" marB="50800" anchor="ctr">
-                    <a:solidFill>
-                      <a:srgbClr val="FFFFFF"/>
-                    </a:solidFill>
-                  </a:tcPr>
-                </a:tc>
-                <a:tc>
-                  <a:txBody>
-                    <a:bodyPr/>
-                    <a:lstStyle/>
-                    <a:p>
-                      <a:pPr algn="ctr"/>
-                      <a:r>
-                        <a:rPr sz="1300" b="0">
-                          <a:solidFill>
-                            <a:srgbClr val="1A1A1A"/>
-                          </a:solidFill>
-                          <a:latin typeface="Segoe UI"/>
-                        </a:rPr>
-                        <a:t>Stale dates</a:t>
-                      </a:r>
-                    </a:p>
-                  </a:txBody>
-                  <a:tcPr marL="101600" marR="101600" marT="50800" marB="50800" anchor="ctr">
-                    <a:solidFill>
-                      <a:srgbClr val="FFFFFF"/>
-                    </a:solidFill>
-                  </a:tcPr>
-                </a:tc>
-                <a:extLst>
-                  <a:ext uri="{0D108BD9-81ED-4DB2-BD59-A6C34878D82A}">
-                    <a16:rowId xmlns:a16="http://schemas.microsoft.com/office/drawing/2014/main" val="10003"/>
-                  </a:ext>
-                </a:extLst>
-              </a:tr>
-              <a:tr h="502920">
-                <a:tc>
-                  <a:txBody>
-                    <a:bodyPr/>
-                    <a:lstStyle/>
-                    <a:p>
-                      <a:pPr algn="l"/>
-                      <a:r>
-                        <a:rPr sz="1300" b="0">
-                          <a:solidFill>
-                            <a:srgbClr val="1A1A1A"/>
-                          </a:solidFill>
-                          <a:latin typeface="Segoe UI"/>
-                        </a:rPr>
-                        <a:t>4</a:t>
-                      </a:r>
-                    </a:p>
-                  </a:txBody>
-                  <a:tcPr marL="101600" marR="101600" marT="50800" marB="50800" anchor="ctr">
-                    <a:solidFill>
-                      <a:srgbClr val="EEF7FB"/>
-                    </a:solidFill>
-                  </a:tcPr>
-                </a:tc>
-                <a:tc>
-                  <a:txBody>
-                    <a:bodyPr/>
-                    <a:lstStyle/>
-                    <a:p>
-                      <a:pPr algn="ctr"/>
-                      <a:r>
-                        <a:rPr sz="1300" b="0">
-                          <a:solidFill>
-                            <a:srgbClr val="1A1A1A"/>
-                          </a:solidFill>
-                          <a:latin typeface="Segoe UI"/>
-                        </a:rPr>
-                        <a:t>Evaluation lacks metrics</a:t>
-                      </a:r>
-                    </a:p>
-                  </a:txBody>
-                  <a:tcPr marL="101600" marR="101600" marT="50800" marB="50800" anchor="ctr">
-                    <a:solidFill>
-                      <a:srgbClr val="EEF7FB"/>
-                    </a:solidFill>
-                  </a:tcPr>
-                </a:tc>
-                <a:tc>
-                  <a:txBody>
-                    <a:bodyPr/>
-                    <a:lstStyle/>
-                    <a:p>
-                      <a:pPr algn="ctr"/>
-                      <a:r>
-                        <a:rPr sz="1300" b="0">
-                          <a:solidFill>
-                            <a:srgbClr val="1A1A1A"/>
-                          </a:solidFill>
-                          <a:latin typeface="Segoe UI"/>
-                        </a:rPr>
-                        <a:t>Automation count, Sovereignty Score, timing real; precision/recall = target only</a:t>
-                      </a:r>
-                    </a:p>
-                  </a:txBody>
-                  <a:tcPr marL="101600" marR="101600" marT="50800" marB="50800" anchor="ctr">
-                    <a:solidFill>
-                      <a:srgbClr val="EEF7FB"/>
-                    </a:solidFill>
-                  </a:tcPr>
-                </a:tc>
-                <a:tc>
-                  <a:txBody>
-                    <a:bodyPr/>
-                    <a:lstStyle/>
-                    <a:p>
-                      <a:pPr algn="ctr"/>
-                      <a:r>
-                        <a:rPr sz="1300" b="0">
-                          <a:solidFill>
-                            <a:srgbClr val="1A1A1A"/>
-                          </a:solidFill>
-                          <a:latin typeface="Segoe UI"/>
-                        </a:rPr>
-                        <a:t>Partial</a:t>
-                      </a:r>
-                    </a:p>
-                  </a:txBody>
-                  <a:tcPr marL="101600" marR="101600" marT="50800" marB="50800" anchor="ctr">
-                    <a:solidFill>
-                      <a:srgbClr val="EEF7FB"/>
-                    </a:solidFill>
-                  </a:tcPr>
-                </a:tc>
-                <a:extLst>
-                  <a:ext uri="{0D108BD9-81ED-4DB2-BD59-A6C34878D82A}">
-                    <a16:rowId xmlns:a16="http://schemas.microsoft.com/office/drawing/2014/main" val="10004"/>
-                  </a:ext>
-                </a:extLst>
-              </a:tr>
-            </a:tbl>
-          </a:graphicData>
-        </a:graphic>
-      </p:graphicFrame>
+      <p:sp>
+        <p:nvSpPr>
+          <p:cNvPr id="5" name="TextBox 4"/>
+          <p:cNvSpPr txBox="1"/>
+          <p:nvPr/>
+        </p:nvSpPr>
+        <p:spPr>
+          <a:xfrm>
+            <a:off x="548640" y="1554480"/>
+            <a:ext cx="10698480" cy="457200"/>
+          </a:xfrm>
+          <a:prstGeom prst="rect">
+            <a:avLst/>
+          </a:prstGeom>
+          <a:noFill/>
+        </p:spPr>
+        <p:txBody>
+          <a:bodyPr wrap="square">
+            <a:spAutoFit/>
+          </a:bodyPr>
+          <a:lstStyle/>
+          <a:p>
+            <a:pPr algn="l"/>
+            <a:r>
+              <a:rPr sz="1500" b="0" i="0">
+                <a:solidFill>
+                  <a:srgbClr val="3F3F3F"/>
+                </a:solidFill>
+                <a:latin typeface="Segoe UI"/>
+              </a:rPr>
+              <a:t>Checking our own claims against the system found two honest gaps:</a:t>
+            </a:r>
+          </a:p>
+        </p:txBody>
+      </p:sp>
       <p:sp>
         <p:nvSpPr>
           <p:cNvPr id="6" name="Rectangle 5"/>
@@ -17862,8 +17184,8 @@
         </p:nvSpPr>
         <p:spPr>
           <a:xfrm>
-            <a:off x="548640" y="4251960"/>
-            <a:ext cx="45720" cy="1554480"/>
+            <a:off x="548640" y="2286000"/>
+            <a:ext cx="45720" cy="914400"/>
           </a:xfrm>
           <a:prstGeom prst="rect">
             <a:avLst/>
@@ -17907,8 +17229,8 @@
         </p:nvSpPr>
         <p:spPr>
           <a:xfrm>
-            <a:off x="777240" y="4251960"/>
-            <a:ext cx="10789920" cy="365760"/>
+            <a:off x="822960" y="2286000"/>
+            <a:ext cx="10332720" cy="365760"/>
           </a:xfrm>
           <a:prstGeom prst="rect">
             <a:avLst/>
@@ -17923,13 +17245,13 @@
           <a:p>
             <a:pPr algn="l"/>
             <a:r>
-              <a:rPr sz="1250" b="1" i="0">
+              <a:rPr sz="1300" b="1" i="0">
                 <a:solidFill>
                   <a:srgbClr val="B97000"/>
                 </a:solidFill>
                 <a:latin typeface="Segoe UI"/>
               </a:rPr>
-              <a:t>FOUND WHEN RE-CHECKING THE PROJECT'S OWN CLAIMS</a:t>
+              <a:t>O6 — CYCLE TIME</a:t>
             </a:r>
           </a:p>
         </p:txBody>
@@ -17942,8 +17264,8 @@
         </p:nvSpPr>
         <p:spPr>
           <a:xfrm>
-            <a:off x="777240" y="4617720"/>
-            <a:ext cx="10789920" cy="548640"/>
+            <a:off x="822960" y="2651760"/>
+            <a:ext cx="10332720" cy="548640"/>
           </a:xfrm>
           <a:prstGeom prst="rect">
             <a:avLst/>
@@ -17962,27 +17284,107 @@
               </a:lnSpc>
             </a:pPr>
             <a:r>
-              <a:rPr sz="1350" b="0" i="0">
+              <a:rPr sz="1450" b="0" i="0">
                 <a:solidFill>
                   <a:srgbClr val="1A1A1A"/>
                 </a:solidFill>
                 <a:latin typeface="Segoe UI"/>
               </a:rPr>
-              <a:t>O6 (cycle time) does not hold up: target was &lt;20 min for ≤5GB; the real logged run took ~30–35 minutes for extract+restore+verify alone.</a:t>
-            </a:r>
-          </a:p>
-        </p:txBody>
-      </p:sp>
-      <p:sp>
-        <p:nvSpPr>
-          <p:cNvPr id="9" name="TextBox 8"/>
+              <a:t>Target was &lt;20 min for ≤5GB; the real logged run took ~30–35 minutes for extract+restore+verify alone.</a:t>
+            </a:r>
+          </a:p>
+        </p:txBody>
+      </p:sp>
+      <p:sp>
+        <p:nvSpPr>
+          <p:cNvPr id="9" name="Rectangle 8"/>
+          <p:cNvSpPr/>
+          <p:nvPr/>
+        </p:nvSpPr>
+        <p:spPr>
+          <a:xfrm>
+            <a:off x="548640" y="3611880"/>
+            <a:ext cx="45720" cy="914400"/>
+          </a:xfrm>
+          <a:prstGeom prst="rect">
+            <a:avLst/>
+          </a:prstGeom>
+          <a:solidFill>
+            <a:srgbClr val="B97000"/>
+          </a:solidFill>
+          <a:ln>
+            <a:noFill/>
+          </a:ln>
+          <a:effectLst/>
+        </p:spPr>
+        <p:style>
+          <a:lnRef idx="1">
+            <a:schemeClr val="accent1"/>
+          </a:lnRef>
+          <a:fillRef idx="3">
+            <a:schemeClr val="accent1"/>
+          </a:fillRef>
+          <a:effectRef idx="2">
+            <a:schemeClr val="accent1"/>
+          </a:effectRef>
+          <a:fontRef idx="minor">
+            <a:schemeClr val="lt1"/>
+          </a:fontRef>
+        </p:style>
+        <p:txBody>
+          <a:bodyPr rtlCol="0" anchor="ctr"/>
+          <a:lstStyle/>
+          <a:p>
+            <a:pPr algn="ctr"/>
+            <a:endParaRPr/>
+          </a:p>
+        </p:txBody>
+      </p:sp>
+      <p:sp>
+        <p:nvSpPr>
+          <p:cNvPr id="10" name="TextBox 9"/>
           <p:cNvSpPr txBox="1"/>
           <p:nvPr/>
         </p:nvSpPr>
         <p:spPr>
           <a:xfrm>
-            <a:off x="777240" y="5120640"/>
-            <a:ext cx="10789920" cy="548640"/>
+            <a:off x="822960" y="3611880"/>
+            <a:ext cx="10332720" cy="365760"/>
+          </a:xfrm>
+          <a:prstGeom prst="rect">
+            <a:avLst/>
+          </a:prstGeom>
+          <a:noFill/>
+        </p:spPr>
+        <p:txBody>
+          <a:bodyPr wrap="square">
+            <a:spAutoFit/>
+          </a:bodyPr>
+          <a:lstStyle/>
+          <a:p>
+            <a:pPr algn="l"/>
+            <a:r>
+              <a:rPr sz="1300" b="1" i="0">
+                <a:solidFill>
+                  <a:srgbClr val="B97000"/>
+                </a:solidFill>
+                <a:latin typeface="Segoe UI"/>
+              </a:rPr>
+              <a:t>RECOMMENDATION QUALITY</a:t>
+            </a:r>
+          </a:p>
+        </p:txBody>
+      </p:sp>
+      <p:sp>
+        <p:nvSpPr>
+          <p:cNvPr id="11" name="TextBox 10"/>
+          <p:cNvSpPr txBox="1"/>
+          <p:nvPr/>
+        </p:nvSpPr>
+        <p:spPr>
+          <a:xfrm>
+            <a:off x="822960" y="3977639"/>
+            <a:ext cx="10332720" cy="548640"/>
           </a:xfrm>
           <a:prstGeom prst="rect">
             <a:avLst/>
@@ -18001,13 +17403,48 @@
               </a:lnSpc>
             </a:pPr>
             <a:r>
-              <a:rPr sz="1350" b="0" i="0">
+              <a:rPr sz="1450" b="0" i="0">
                 <a:solidFill>
                   <a:srgbClr val="1A1A1A"/>
                 </a:solidFill>
                 <a:latin typeface="Segoe UI"/>
               </a:rPr>
-              <a:t>Recommendation-quality precision/recall: 0% measured. Methodology is defined; no ground-truth evaluation script has been built or run.</a:t>
+              <a:t>Precision/recall is 0% measured. Methodology is defined; no ground-truth evaluation script has been built or run.</a:t>
+            </a:r>
+          </a:p>
+        </p:txBody>
+      </p:sp>
+      <p:sp>
+        <p:nvSpPr>
+          <p:cNvPr id="12" name="TextBox 11"/>
+          <p:cNvSpPr txBox="1"/>
+          <p:nvPr/>
+        </p:nvSpPr>
+        <p:spPr>
+          <a:xfrm>
+            <a:off x="548640" y="5029200"/>
+            <a:ext cx="10698480" cy="457200"/>
+          </a:xfrm>
+          <a:prstGeom prst="rect">
+            <a:avLst/>
+          </a:prstGeom>
+          <a:noFill/>
+        </p:spPr>
+        <p:txBody>
+          <a:bodyPr wrap="square">
+            <a:spAutoFit/>
+          </a:bodyPr>
+          <a:lstStyle/>
+          <a:p>
+            <a:pPr algn="l"/>
+            <a:r>
+              <a:rPr sz="1300" b="0" i="1">
+                <a:solidFill>
+                  <a:srgbClr val="3F3F3F"/>
+                </a:solidFill>
+                <a:latin typeface="Segoe UI"/>
+              </a:rPr>
+              <a:t>Both are carried forward as named, open items — not silently dropped.</a:t>
             </a:r>
           </a:p>
         </p:txBody>
@@ -18125,7 +17562,7 @@
         </p:nvSpPr>
         <p:spPr>
           <a:xfrm>
-            <a:off x="1598676" y="4572000"/>
+            <a:off x="1773936" y="4572000"/>
             <a:ext cx="201168" cy="201168"/>
           </a:xfrm>
           <a:prstGeom prst="ellipse">
@@ -18173,7 +17610,7 @@
         <p:spPr>
           <a:xfrm>
             <a:off x="822960" y="4892040"/>
-            <a:ext cx="1752600" cy="320040"/>
+            <a:ext cx="2103120" cy="320040"/>
           </a:xfrm>
           <a:prstGeom prst="rect">
             <a:avLst/>
@@ -18207,7 +17644,7 @@
         </p:nvSpPr>
         <p:spPr>
           <a:xfrm>
-            <a:off x="3351276" y="4572000"/>
+            <a:off x="3877056" y="4572000"/>
             <a:ext cx="201168" cy="201168"/>
           </a:xfrm>
           <a:prstGeom prst="ellipse">
@@ -18254,8 +17691,8 @@
         </p:nvSpPr>
         <p:spPr>
           <a:xfrm>
-            <a:off x="2575560" y="4892040"/>
-            <a:ext cx="1752600" cy="320040"/>
+            <a:off x="2926080" y="4892040"/>
+            <a:ext cx="2103120" cy="320040"/>
           </a:xfrm>
           <a:prstGeom prst="rect">
             <a:avLst/>
@@ -18289,7 +17726,7 @@
         </p:nvSpPr>
         <p:spPr>
           <a:xfrm>
-            <a:off x="5103876" y="4572000"/>
+            <a:off x="5980176" y="4572000"/>
             <a:ext cx="201168" cy="201168"/>
           </a:xfrm>
           <a:prstGeom prst="ellipse">
@@ -18336,8 +17773,8 @@
         </p:nvSpPr>
         <p:spPr>
           <a:xfrm>
-            <a:off x="4328160" y="4892040"/>
-            <a:ext cx="1752600" cy="320040"/>
+            <a:off x="5029200" y="4892040"/>
+            <a:ext cx="2103120" cy="320040"/>
           </a:xfrm>
           <a:prstGeom prst="rect">
             <a:avLst/>
@@ -18371,7 +17808,7 @@
         </p:nvSpPr>
         <p:spPr>
           <a:xfrm>
-            <a:off x="6856476" y="4572000"/>
+            <a:off x="8083296" y="4572000"/>
             <a:ext cx="201168" cy="201168"/>
           </a:xfrm>
           <a:prstGeom prst="ellipse">
@@ -18418,8 +17855,8 @@
         </p:nvSpPr>
         <p:spPr>
           <a:xfrm>
-            <a:off x="6080760" y="4892040"/>
-            <a:ext cx="1752600" cy="320040"/>
+            <a:off x="7132320" y="4892040"/>
+            <a:ext cx="2103120" cy="320040"/>
           </a:xfrm>
           <a:prstGeom prst="rect">
             <a:avLst/>
@@ -18453,7 +17890,7 @@
         </p:nvSpPr>
         <p:spPr>
           <a:xfrm>
-            <a:off x="8609076" y="4572000"/>
+            <a:off x="10186416" y="4572000"/>
             <a:ext cx="201168" cy="201168"/>
           </a:xfrm>
           <a:prstGeom prst="ellipse">
@@ -18500,90 +17937,8 @@
         </p:nvSpPr>
         <p:spPr>
           <a:xfrm>
-            <a:off x="7833360" y="4892040"/>
-            <a:ext cx="1752600" cy="320040"/>
-          </a:xfrm>
-          <a:prstGeom prst="rect">
-            <a:avLst/>
-          </a:prstGeom>
-          <a:noFill/>
-        </p:spPr>
-        <p:txBody>
-          <a:bodyPr wrap="square">
-            <a:spAutoFit/>
-          </a:bodyPr>
-          <a:lstStyle/>
-          <a:p>
-            <a:pPr algn="ctr"/>
-            <a:r>
-              <a:rPr sz="1100" b="0" i="0">
-                <a:solidFill>
-                  <a:srgbClr val="3F3F3F"/>
-                </a:solidFill>
-                <a:latin typeface="Segoe UI"/>
-              </a:rPr>
-              <a:t>Critique</a:t>
-            </a:r>
-          </a:p>
-        </p:txBody>
-      </p:sp>
-      <p:sp>
-        <p:nvSpPr>
-          <p:cNvPr id="15" name="Oval 14"/>
-          <p:cNvSpPr/>
-          <p:nvPr/>
-        </p:nvSpPr>
-        <p:spPr>
-          <a:xfrm>
-            <a:off x="10361676" y="4572000"/>
-            <a:ext cx="201168" cy="201168"/>
-          </a:xfrm>
-          <a:prstGeom prst="ellipse">
-            <a:avLst/>
-          </a:prstGeom>
-          <a:solidFill>
-            <a:srgbClr val="063D79"/>
-          </a:solidFill>
-          <a:ln w="15875">
-            <a:solidFill>
-              <a:srgbClr val="063D79"/>
-            </a:solidFill>
-          </a:ln>
-          <a:effectLst/>
-        </p:spPr>
-        <p:style>
-          <a:lnRef idx="1">
-            <a:schemeClr val="accent1"/>
-          </a:lnRef>
-          <a:fillRef idx="3">
-            <a:schemeClr val="accent1"/>
-          </a:fillRef>
-          <a:effectRef idx="2">
-            <a:schemeClr val="accent1"/>
-          </a:effectRef>
-          <a:fontRef idx="minor">
-            <a:schemeClr val="lt1"/>
-          </a:fontRef>
-        </p:style>
-        <p:txBody>
-          <a:bodyPr rtlCol="0" anchor="ctr"/>
-          <a:lstStyle/>
-          <a:p>
-            <a:pPr algn="ctr"/>
-            <a:endParaRPr/>
-          </a:p>
-        </p:txBody>
-      </p:sp>
-      <p:sp>
-        <p:nvSpPr>
-          <p:cNvPr id="16" name="TextBox 15"/>
-          <p:cNvSpPr txBox="1"/>
-          <p:nvPr/>
-        </p:nvSpPr>
-        <p:spPr>
-          <a:xfrm>
-            <a:off x="9585960" y="4892040"/>
-            <a:ext cx="1752600" cy="320040"/>
+            <a:off x="9235440" y="4892040"/>
+            <a:ext cx="2103120" cy="320040"/>
           </a:xfrm>
           <a:prstGeom prst="rect">
             <a:avLst/>
@@ -18758,7 +18113,7 @@
         <p:spPr>
           <a:xfrm>
             <a:off x="640080" y="1783080"/>
-            <a:ext cx="45720" cy="4023360"/>
+            <a:ext cx="45720" cy="4434840"/>
           </a:xfrm>
           <a:prstGeom prst="rect">
             <a:avLst/>
@@ -19775,6 +19130,93 @@
                 <a:latin typeface="Segoe UI"/>
               </a:rPr>
               <a:t>Resume/checkpoint for large restores</a:t>
+            </a:r>
+          </a:p>
+        </p:txBody>
+      </p:sp>
+      <p:sp>
+        <p:nvSpPr>
+          <p:cNvPr id="29" name="Oval 28"/>
+          <p:cNvSpPr/>
+          <p:nvPr/>
+        </p:nvSpPr>
+        <p:spPr>
+          <a:xfrm>
+            <a:off x="923544" y="5733288"/>
+            <a:ext cx="347472" cy="347472"/>
+          </a:xfrm>
+          <a:prstGeom prst="ellipse">
+            <a:avLst/>
+          </a:prstGeom>
+          <a:solidFill>
+            <a:srgbClr val="008439"/>
+          </a:solidFill>
+          <a:ln>
+            <a:noFill/>
+          </a:ln>
+          <a:effectLst/>
+        </p:spPr>
+        <p:style>
+          <a:lnRef idx="1">
+            <a:schemeClr val="accent1"/>
+          </a:lnRef>
+          <a:fillRef idx="3">
+            <a:schemeClr val="accent1"/>
+          </a:fillRef>
+          <a:effectRef idx="2">
+            <a:schemeClr val="accent1"/>
+          </a:effectRef>
+          <a:fontRef idx="minor">
+            <a:schemeClr val="lt1"/>
+          </a:fontRef>
+        </p:style>
+        <p:txBody>
+          <a:bodyPr wrap="none" rtlCol="0" anchor="ctr"/>
+          <a:lstStyle/>
+          <a:p>
+            <a:pPr algn="ctr"/>
+            <a:r>
+              <a:rPr sz="1300">
+                <a:solidFill>
+                  <a:srgbClr val="FFFFFF"/>
+                </a:solidFill>
+              </a:rPr>
+              <a:t>✓</a:t>
+            </a:r>
+          </a:p>
+        </p:txBody>
+      </p:sp>
+      <p:sp>
+        <p:nvSpPr>
+          <p:cNvPr id="30" name="TextBox 29"/>
+          <p:cNvSpPr txBox="1"/>
+          <p:nvPr/>
+        </p:nvSpPr>
+        <p:spPr>
+          <a:xfrm>
+            <a:off x="1417320" y="5769864"/>
+            <a:ext cx="4480560" cy="411480"/>
+          </a:xfrm>
+          <a:prstGeom prst="rect">
+            <a:avLst/>
+          </a:prstGeom>
+          <a:noFill/>
+        </p:spPr>
+        <p:txBody>
+          <a:bodyPr wrap="square">
+            <a:spAutoFit/>
+          </a:bodyPr>
+          <a:lstStyle/>
+          <a:p>
+            <a:pPr algn="l"/>
+            <a:r>
+              <a:rPr sz="1400" b="0" i="0">
+                <a:solidFill>
+                  <a:srgbClr val="1A1A1A"/>
+                </a:solidFill>
+                <a:latin typeface="Segoe UI"/>
+              </a:rPr>
+              <a:t>Public docs site + GitHub release</a:t>
             </a:r>
           </a:p>
         </p:txBody>
@@ -19869,7 +19311,7 @@
                 </a:solidFill>
                 <a:latin typeface="Segoe UI"/>
               </a:rPr>
-              <a:t>References — sovereignty framing cited from the term paper</a:t>
+              <a:t>Documentation &amp; downloads</a:t>
             </a:r>
           </a:p>
         </p:txBody>
@@ -19927,8 +19369,8 @@
         </p:nvSpPr>
         <p:spPr>
           <a:xfrm>
-            <a:off x="822960" y="1920240"/>
-            <a:ext cx="10515600" cy="411480"/>
+            <a:off x="548640" y="1737360"/>
+            <a:ext cx="10698480" cy="457200"/>
           </a:xfrm>
           <a:prstGeom prst="rect">
             <a:avLst/>
@@ -19943,27 +19385,76 @@
           <a:p>
             <a:pPr algn="l"/>
             <a:r>
-              <a:rPr sz="1450" b="0" i="0">
-                <a:solidFill>
-                  <a:srgbClr val="1A1A1A"/>
+              <a:rPr sz="1600" b="0" i="0">
+                <a:solidFill>
+                  <a:srgbClr val="3F3F3F"/>
                 </a:solidFill>
                 <a:latin typeface="Segoe UI"/>
               </a:rPr>
-              <a:t>•  Floridi, L. (2020). The fight for digital sovereignty. Philosophy &amp; Technology, 33(3), 369–378.</a:t>
-            </a:r>
-          </a:p>
-        </p:txBody>
-      </p:sp>
-      <p:sp>
-        <p:nvSpPr>
-          <p:cNvPr id="6" name="TextBox 5"/>
+              <a:t>Everything in this talk is public — code, docs, and a downloadable build.</a:t>
+            </a:r>
+          </a:p>
+        </p:txBody>
+      </p:sp>
+      <p:sp>
+        <p:nvSpPr>
+          <p:cNvPr id="6" name="Rounded Rectangle 5"/>
+          <p:cNvSpPr/>
+          <p:nvPr/>
+        </p:nvSpPr>
+        <p:spPr>
+          <a:xfrm>
+            <a:off x="822960" y="2560320"/>
+            <a:ext cx="10515600" cy="1371600"/>
+          </a:xfrm>
+          <a:prstGeom prst="roundRect">
+            <a:avLst>
+              <a:gd name="adj" fmla="val 8000"/>
+            </a:avLst>
+          </a:prstGeom>
+          <a:solidFill>
+            <a:srgbClr val="DCE6F0"/>
+          </a:solidFill>
+          <a:ln>
+            <a:solidFill>
+              <a:srgbClr val="DCE6F0"/>
+            </a:solidFill>
+          </a:ln>
+          <a:effectLst/>
+        </p:spPr>
+        <p:style>
+          <a:lnRef idx="1">
+            <a:schemeClr val="accent1"/>
+          </a:lnRef>
+          <a:fillRef idx="3">
+            <a:schemeClr val="accent1"/>
+          </a:fillRef>
+          <a:effectRef idx="2">
+            <a:schemeClr val="accent1"/>
+          </a:effectRef>
+          <a:fontRef idx="minor">
+            <a:schemeClr val="lt1"/>
+          </a:fontRef>
+        </p:style>
+        <p:txBody>
+          <a:bodyPr rtlCol="0" anchor="ctr"/>
+          <a:lstStyle/>
+          <a:p>
+            <a:pPr algn="ctr"/>
+            <a:endParaRPr/>
+          </a:p>
+        </p:txBody>
+      </p:sp>
+      <p:sp>
+        <p:nvSpPr>
+          <p:cNvPr id="7" name="TextBox 6"/>
           <p:cNvSpPr txBox="1"/>
           <p:nvPr/>
         </p:nvSpPr>
         <p:spPr>
           <a:xfrm>
-            <a:off x="822960" y="2514600"/>
-            <a:ext cx="10515600" cy="411480"/>
+            <a:off x="1097280" y="2697480"/>
+            <a:ext cx="10058400" cy="365760"/>
           </a:xfrm>
           <a:prstGeom prst="rect">
             <a:avLst/>
@@ -19978,27 +19469,27 @@
           <a:p>
             <a:pPr algn="l"/>
             <a:r>
-              <a:rPr sz="1450" b="0" i="0">
-                <a:solidFill>
-                  <a:srgbClr val="1A1A1A"/>
+              <a:rPr sz="1300" b="1" i="0">
+                <a:solidFill>
+                  <a:srgbClr val="063D79"/>
                 </a:solidFill>
                 <a:latin typeface="Segoe UI"/>
               </a:rPr>
-              <a:t>•  Pohle, J., &amp; Thiel, T. (2020). Digital sovereignty. Internet Policy Review, 9(4).</a:t>
-            </a:r>
-          </a:p>
-        </p:txBody>
-      </p:sp>
-      <p:sp>
-        <p:nvSpPr>
-          <p:cNvPr id="7" name="TextBox 6"/>
+              <a:t>DOCUMENTATION SITE</a:t>
+            </a:r>
+          </a:p>
+        </p:txBody>
+      </p:sp>
+      <p:sp>
+        <p:nvSpPr>
+          <p:cNvPr id="8" name="TextBox 7"/>
           <p:cNvSpPr txBox="1"/>
           <p:nvPr/>
         </p:nvSpPr>
         <p:spPr>
           <a:xfrm>
-            <a:off x="822960" y="3108960"/>
-            <a:ext cx="10515600" cy="411480"/>
+            <a:off x="1097280" y="3017520"/>
+            <a:ext cx="10058400" cy="777240"/>
           </a:xfrm>
           <a:prstGeom prst="rect">
             <a:avLst/>
@@ -20011,29 +19502,98 @@
           </a:bodyPr>
           <a:lstStyle/>
           <a:p>
-            <a:pPr algn="l"/>
-            <a:r>
-              <a:rPr sz="1450" b="0" i="0">
+            <a:pPr algn="l">
+              <a:lnSpc>
+                <a:spcPct val="120000"/>
+              </a:lnSpc>
+            </a:pPr>
+            <a:r>
+              <a:rPr sz="1800" b="1" i="0">
                 <a:solidFill>
                   <a:srgbClr val="1A1A1A"/>
                 </a:solidFill>
                 <a:latin typeface="Segoe UI"/>
               </a:rPr>
-              <a:t>•  Roberts, H., et al. (2021). Safeguarding European values with digital sovereignty. Internet Policy Review, 10(3).</a:t>
-            </a:r>
-          </a:p>
-        </p:txBody>
-      </p:sp>
-      <p:sp>
-        <p:nvSpPr>
-          <p:cNvPr id="8" name="TextBox 7"/>
+              <a:t>pencoder.github.io/full-auto-migration</a:t>
+            </a:r>
+          </a:p>
+          <a:p>
+            <a:pPr algn="l">
+              <a:lnSpc>
+                <a:spcPct val="120000"/>
+              </a:lnSpc>
+            </a:pPr>
+            <a:r>
+              <a:rPr sz="1800" b="1" i="0">
+                <a:solidFill>
+                  <a:srgbClr val="1A1A1A"/>
+                </a:solidFill>
+                <a:latin typeface="Segoe UI"/>
+              </a:rPr>
+              <a:t>User guide, project walkthrough, full automation exposé, Praktikum report, testing docs.</a:t>
+            </a:r>
+          </a:p>
+        </p:txBody>
+      </p:sp>
+      <p:sp>
+        <p:nvSpPr>
+          <p:cNvPr id="9" name="Rounded Rectangle 8"/>
+          <p:cNvSpPr/>
+          <p:nvPr/>
+        </p:nvSpPr>
+        <p:spPr>
+          <a:xfrm>
+            <a:off x="822960" y="4160520"/>
+            <a:ext cx="10515600" cy="1371600"/>
+          </a:xfrm>
+          <a:prstGeom prst="roundRect">
+            <a:avLst>
+              <a:gd name="adj" fmla="val 8000"/>
+            </a:avLst>
+          </a:prstGeom>
+          <a:solidFill>
+            <a:srgbClr val="E2F1E8"/>
+          </a:solidFill>
+          <a:ln>
+            <a:solidFill>
+              <a:srgbClr val="E2F1E8"/>
+            </a:solidFill>
+          </a:ln>
+          <a:effectLst/>
+        </p:spPr>
+        <p:style>
+          <a:lnRef idx="1">
+            <a:schemeClr val="accent1"/>
+          </a:lnRef>
+          <a:fillRef idx="3">
+            <a:schemeClr val="accent1"/>
+          </a:fillRef>
+          <a:effectRef idx="2">
+            <a:schemeClr val="accent1"/>
+          </a:effectRef>
+          <a:fontRef idx="minor">
+            <a:schemeClr val="lt1"/>
+          </a:fontRef>
+        </p:style>
+        <p:txBody>
+          <a:bodyPr rtlCol="0" anchor="ctr"/>
+          <a:lstStyle/>
+          <a:p>
+            <a:pPr algn="ctr"/>
+            <a:endParaRPr/>
+          </a:p>
+        </p:txBody>
+      </p:sp>
+      <p:sp>
+        <p:nvSpPr>
+          <p:cNvPr id="10" name="TextBox 9"/>
           <p:cNvSpPr txBox="1"/>
           <p:nvPr/>
         </p:nvSpPr>
         <p:spPr>
           <a:xfrm>
-            <a:off x="822960" y="3703320"/>
-            <a:ext cx="10515600" cy="411480"/>
+            <a:off x="1097280" y="4297680"/>
+            <a:ext cx="10058400" cy="365760"/>
           </a:xfrm>
           <a:prstGeom prst="rect">
             <a:avLst/>
@@ -20048,27 +19608,27 @@
           <a:p>
             <a:pPr algn="l"/>
             <a:r>
-              <a:rPr sz="1450" b="0" i="0">
-                <a:solidFill>
-                  <a:srgbClr val="1A1A1A"/>
+              <a:rPr sz="1300" b="1" i="0">
+                <a:solidFill>
+                  <a:srgbClr val="008439"/>
                 </a:solidFill>
                 <a:latin typeface="Segoe UI"/>
               </a:rPr>
-              <a:t>•  Wehnes, H. (2024). Preventing digital colony and lock-in. INFORMATIK 2024, Gesellschaft für Informatik.</a:t>
-            </a:r>
-          </a:p>
-        </p:txBody>
-      </p:sp>
-      <p:sp>
-        <p:nvSpPr>
-          <p:cNvPr id="9" name="TextBox 8"/>
+              <a:t>DOWNLOAD &amp; SOURCE</a:t>
+            </a:r>
+          </a:p>
+        </p:txBody>
+      </p:sp>
+      <p:sp>
+        <p:nvSpPr>
+          <p:cNvPr id="11" name="TextBox 10"/>
           <p:cNvSpPr txBox="1"/>
           <p:nvPr/>
         </p:nvSpPr>
         <p:spPr>
           <a:xfrm>
-            <a:off x="822960" y="4297680"/>
-            <a:ext cx="10515600" cy="411480"/>
+            <a:off x="1097280" y="4617720"/>
+            <a:ext cx="10058400" cy="777240"/>
           </a:xfrm>
           <a:prstGeom prst="rect">
             <a:avLst/>
@@ -20081,50 +19641,35 @@
           </a:bodyPr>
           <a:lstStyle/>
           <a:p>
-            <a:pPr algn="l"/>
-            <a:r>
-              <a:rPr sz="1450" b="0" i="0">
+            <a:pPr algn="l">
+              <a:lnSpc>
+                <a:spcPct val="120000"/>
+              </a:lnSpc>
+            </a:pPr>
+            <a:r>
+              <a:rPr sz="1800" b="1" i="0">
                 <a:solidFill>
                   <a:srgbClr val="1A1A1A"/>
                 </a:solidFill>
                 <a:latin typeface="Segoe UI"/>
               </a:rPr>
-              <a:t>•  Wire (2025); StatCounter Global Stats (2025). Digital sovereignty survey &amp; OS market share, Europe.</a:t>
-            </a:r>
-          </a:p>
-        </p:txBody>
-      </p:sp>
-      <p:sp>
-        <p:nvSpPr>
-          <p:cNvPr id="10" name="TextBox 9"/>
-          <p:cNvSpPr txBox="1"/>
-          <p:nvPr/>
-        </p:nvSpPr>
-        <p:spPr>
-          <a:xfrm>
-            <a:off x="822960" y="5074920"/>
-            <a:ext cx="10515600" cy="457200"/>
-          </a:xfrm>
-          <a:prstGeom prst="rect">
-            <a:avLst/>
-          </a:prstGeom>
-          <a:noFill/>
-        </p:spPr>
-        <p:txBody>
-          <a:bodyPr wrap="square">
-            <a:spAutoFit/>
-          </a:bodyPr>
-          <a:lstStyle/>
-          <a:p>
-            <a:pPr algn="l"/>
-            <a:r>
-              <a:rPr sz="1300" b="0" i="1">
-                <a:solidFill>
-                  <a:srgbClr val="3F3F3F"/>
+              <a:t>github.com/PenCoder/full-auto-migration</a:t>
+            </a:r>
+          </a:p>
+          <a:p>
+            <a:pPr algn="l">
+              <a:lnSpc>
+                <a:spcPct val="120000"/>
+              </a:lnSpc>
+            </a:pPr>
+            <a:r>
+              <a:rPr sz="1800" b="1" i="0">
+                <a:solidFill>
+                  <a:srgbClr val="1A1A1A"/>
                 </a:solidFill>
                 <a:latin typeface="Segoe UI"/>
               </a:rPr>
-              <a:t>Full bibliography: Arthur, J. — Digital Sovereignty Through Semi-Automated OS Migration (term paper).</a:t>
+              <a:t>v1.0.0 release with migrate.exe attached — clone, build, or download and run today.</a:t>
             </a:r>
           </a:p>
         </p:txBody>
@@ -20156,42 +19701,325 @@
       </p:grpSpPr>
       <p:sp>
         <p:nvSpPr>
-          <p:cNvPr id="2" name="Title 1"/>
-          <p:cNvSpPr>
-            <a:spLocks noGrp="1"/>
-          </p:cNvSpPr>
-          <p:nvPr>
-            <p:ph type="ctrTitle" sz="quarter"/>
-          </p:nvPr>
-        </p:nvSpPr>
-        <p:spPr/>
-        <p:txBody>
-          <a:bodyPr/>
-          <a:lstStyle/>
-          <a:p>
-            <a:r>
-              <a:t>Thank you</a:t>
-            </a:r>
-          </a:p>
-        </p:txBody>
-      </p:sp>
-      <p:sp>
-        <p:nvSpPr>
-          <p:cNvPr id="3" name="Subtitle 2"/>
-          <p:cNvSpPr>
-            <a:spLocks noGrp="1"/>
-          </p:cNvSpPr>
-          <p:nvPr>
-            <p:ph type="subTitle" sz="quarter" idx="1"/>
-          </p:nvPr>
-        </p:nvSpPr>
-        <p:spPr/>
-        <p:txBody>
-          <a:bodyPr/>
-          <a:lstStyle/>
-          <a:p>
-            <a:r>
-              <a:t>Questions &amp; live demo</a:t>
+          <p:cNvPr id="2" name="TextBox 1"/>
+          <p:cNvSpPr txBox="1"/>
+          <p:nvPr/>
+        </p:nvSpPr>
+        <p:spPr>
+          <a:xfrm>
+            <a:off x="548640" y="274320"/>
+            <a:ext cx="10058400" cy="320040"/>
+          </a:xfrm>
+          <a:prstGeom prst="rect">
+            <a:avLst/>
+          </a:prstGeom>
+          <a:noFill/>
+        </p:spPr>
+        <p:txBody>
+          <a:bodyPr wrap="square">
+            <a:spAutoFit/>
+          </a:bodyPr>
+          <a:lstStyle/>
+          <a:p>
+            <a:pPr algn="l"/>
+            <a:r>
+              <a:rPr sz="1200" b="1" i="0">
+                <a:solidFill>
+                  <a:srgbClr val="063D79"/>
+                </a:solidFill>
+                <a:latin typeface="Segoe UI"/>
+              </a:rPr>
+              <a:t>TAKEAWAY</a:t>
+            </a:r>
+          </a:p>
+        </p:txBody>
+      </p:sp>
+      <p:sp>
+        <p:nvSpPr>
+          <p:cNvPr id="3" name="TextBox 2"/>
+          <p:cNvSpPr txBox="1"/>
+          <p:nvPr/>
+        </p:nvSpPr>
+        <p:spPr>
+          <a:xfrm>
+            <a:off x="548640" y="566928"/>
+            <a:ext cx="10972800" cy="685800"/>
+          </a:xfrm>
+          <a:prstGeom prst="rect">
+            <a:avLst/>
+          </a:prstGeom>
+          <a:noFill/>
+        </p:spPr>
+        <p:txBody>
+          <a:bodyPr wrap="square">
+            <a:spAutoFit/>
+          </a:bodyPr>
+          <a:lstStyle/>
+          <a:p>
+            <a:pPr algn="l"/>
+            <a:r>
+              <a:rPr sz="2700" b="1" i="0">
+                <a:solidFill>
+                  <a:srgbClr val="1A1A1A"/>
+                </a:solidFill>
+                <a:latin typeface="Segoe UI"/>
+              </a:rPr>
+              <a:t>References — sovereignty framing cited from the term paper</a:t>
+            </a:r>
+          </a:p>
+        </p:txBody>
+      </p:sp>
+      <p:sp>
+        <p:nvSpPr>
+          <p:cNvPr id="4" name="Rectangle 3"/>
+          <p:cNvSpPr/>
+          <p:nvPr/>
+        </p:nvSpPr>
+        <p:spPr>
+          <a:xfrm>
+            <a:off x="548640" y="1207008"/>
+            <a:ext cx="1005840" cy="38100"/>
+          </a:xfrm>
+          <a:prstGeom prst="rect">
+            <a:avLst/>
+          </a:prstGeom>
+          <a:solidFill>
+            <a:srgbClr val="063D79"/>
+          </a:solidFill>
+          <a:ln>
+            <a:noFill/>
+          </a:ln>
+          <a:effectLst/>
+        </p:spPr>
+        <p:style>
+          <a:lnRef idx="1">
+            <a:schemeClr val="accent1"/>
+          </a:lnRef>
+          <a:fillRef idx="3">
+            <a:schemeClr val="accent1"/>
+          </a:fillRef>
+          <a:effectRef idx="2">
+            <a:schemeClr val="accent1"/>
+          </a:effectRef>
+          <a:fontRef idx="minor">
+            <a:schemeClr val="lt1"/>
+          </a:fontRef>
+        </p:style>
+        <p:txBody>
+          <a:bodyPr rtlCol="0" anchor="ctr"/>
+          <a:lstStyle/>
+          <a:p>
+            <a:pPr algn="ctr"/>
+            <a:endParaRPr/>
+          </a:p>
+        </p:txBody>
+      </p:sp>
+      <p:sp>
+        <p:nvSpPr>
+          <p:cNvPr id="5" name="TextBox 4"/>
+          <p:cNvSpPr txBox="1"/>
+          <p:nvPr/>
+        </p:nvSpPr>
+        <p:spPr>
+          <a:xfrm>
+            <a:off x="822960" y="1920240"/>
+            <a:ext cx="10515600" cy="411480"/>
+          </a:xfrm>
+          <a:prstGeom prst="rect">
+            <a:avLst/>
+          </a:prstGeom>
+          <a:noFill/>
+        </p:spPr>
+        <p:txBody>
+          <a:bodyPr wrap="square">
+            <a:spAutoFit/>
+          </a:bodyPr>
+          <a:lstStyle/>
+          <a:p>
+            <a:pPr algn="l"/>
+            <a:r>
+              <a:rPr sz="1450" b="0" i="0">
+                <a:solidFill>
+                  <a:srgbClr val="1A1A1A"/>
+                </a:solidFill>
+                <a:latin typeface="Segoe UI"/>
+              </a:rPr>
+              <a:t>•  Floridi, L. (2020). The fight for digital sovereignty. Philosophy &amp; Technology, 33(3), 369–378.</a:t>
+            </a:r>
+          </a:p>
+        </p:txBody>
+      </p:sp>
+      <p:sp>
+        <p:nvSpPr>
+          <p:cNvPr id="6" name="TextBox 5"/>
+          <p:cNvSpPr txBox="1"/>
+          <p:nvPr/>
+        </p:nvSpPr>
+        <p:spPr>
+          <a:xfrm>
+            <a:off x="822960" y="2514600"/>
+            <a:ext cx="10515600" cy="411480"/>
+          </a:xfrm>
+          <a:prstGeom prst="rect">
+            <a:avLst/>
+          </a:prstGeom>
+          <a:noFill/>
+        </p:spPr>
+        <p:txBody>
+          <a:bodyPr wrap="square">
+            <a:spAutoFit/>
+          </a:bodyPr>
+          <a:lstStyle/>
+          <a:p>
+            <a:pPr algn="l"/>
+            <a:r>
+              <a:rPr sz="1450" b="0" i="0">
+                <a:solidFill>
+                  <a:srgbClr val="1A1A1A"/>
+                </a:solidFill>
+                <a:latin typeface="Segoe UI"/>
+              </a:rPr>
+              <a:t>•  Pohle, J., &amp; Thiel, T. (2020). Digital sovereignty. Internet Policy Review, 9(4).</a:t>
+            </a:r>
+          </a:p>
+        </p:txBody>
+      </p:sp>
+      <p:sp>
+        <p:nvSpPr>
+          <p:cNvPr id="7" name="TextBox 6"/>
+          <p:cNvSpPr txBox="1"/>
+          <p:nvPr/>
+        </p:nvSpPr>
+        <p:spPr>
+          <a:xfrm>
+            <a:off x="822960" y="3108960"/>
+            <a:ext cx="10515600" cy="411480"/>
+          </a:xfrm>
+          <a:prstGeom prst="rect">
+            <a:avLst/>
+          </a:prstGeom>
+          <a:noFill/>
+        </p:spPr>
+        <p:txBody>
+          <a:bodyPr wrap="square">
+            <a:spAutoFit/>
+          </a:bodyPr>
+          <a:lstStyle/>
+          <a:p>
+            <a:pPr algn="l"/>
+            <a:r>
+              <a:rPr sz="1450" b="0" i="0">
+                <a:solidFill>
+                  <a:srgbClr val="1A1A1A"/>
+                </a:solidFill>
+                <a:latin typeface="Segoe UI"/>
+              </a:rPr>
+              <a:t>•  Roberts, H., et al. (2021). Safeguarding European values with digital sovereignty. Internet Policy Review, 10(3).</a:t>
+            </a:r>
+          </a:p>
+        </p:txBody>
+      </p:sp>
+      <p:sp>
+        <p:nvSpPr>
+          <p:cNvPr id="8" name="TextBox 7"/>
+          <p:cNvSpPr txBox="1"/>
+          <p:nvPr/>
+        </p:nvSpPr>
+        <p:spPr>
+          <a:xfrm>
+            <a:off x="822960" y="3703320"/>
+            <a:ext cx="10515600" cy="411480"/>
+          </a:xfrm>
+          <a:prstGeom prst="rect">
+            <a:avLst/>
+          </a:prstGeom>
+          <a:noFill/>
+        </p:spPr>
+        <p:txBody>
+          <a:bodyPr wrap="square">
+            <a:spAutoFit/>
+          </a:bodyPr>
+          <a:lstStyle/>
+          <a:p>
+            <a:pPr algn="l"/>
+            <a:r>
+              <a:rPr sz="1450" b="0" i="0">
+                <a:solidFill>
+                  <a:srgbClr val="1A1A1A"/>
+                </a:solidFill>
+                <a:latin typeface="Segoe UI"/>
+              </a:rPr>
+              <a:t>•  Wehnes, H. (2024). Preventing digital colony and lock-in. INFORMATIK 2024, Gesellschaft für Informatik.</a:t>
+            </a:r>
+          </a:p>
+        </p:txBody>
+      </p:sp>
+      <p:sp>
+        <p:nvSpPr>
+          <p:cNvPr id="9" name="TextBox 8"/>
+          <p:cNvSpPr txBox="1"/>
+          <p:nvPr/>
+        </p:nvSpPr>
+        <p:spPr>
+          <a:xfrm>
+            <a:off x="822960" y="4297680"/>
+            <a:ext cx="10515600" cy="411480"/>
+          </a:xfrm>
+          <a:prstGeom prst="rect">
+            <a:avLst/>
+          </a:prstGeom>
+          <a:noFill/>
+        </p:spPr>
+        <p:txBody>
+          <a:bodyPr wrap="square">
+            <a:spAutoFit/>
+          </a:bodyPr>
+          <a:lstStyle/>
+          <a:p>
+            <a:pPr algn="l"/>
+            <a:r>
+              <a:rPr sz="1450" b="0" i="0">
+                <a:solidFill>
+                  <a:srgbClr val="1A1A1A"/>
+                </a:solidFill>
+                <a:latin typeface="Segoe UI"/>
+              </a:rPr>
+              <a:t>•  Wire (2025); StatCounter Global Stats (2025). Digital sovereignty survey &amp; OS market share, Europe.</a:t>
+            </a:r>
+          </a:p>
+        </p:txBody>
+      </p:sp>
+      <p:sp>
+        <p:nvSpPr>
+          <p:cNvPr id="10" name="TextBox 9"/>
+          <p:cNvSpPr txBox="1"/>
+          <p:nvPr/>
+        </p:nvSpPr>
+        <p:spPr>
+          <a:xfrm>
+            <a:off x="822960" y="5074920"/>
+            <a:ext cx="10515600" cy="457200"/>
+          </a:xfrm>
+          <a:prstGeom prst="rect">
+            <a:avLst/>
+          </a:prstGeom>
+          <a:noFill/>
+        </p:spPr>
+        <p:txBody>
+          <a:bodyPr wrap="square">
+            <a:spAutoFit/>
+          </a:bodyPr>
+          <a:lstStyle/>
+          <a:p>
+            <a:pPr algn="l"/>
+            <a:r>
+              <a:rPr sz="1300" b="0" i="1">
+                <a:solidFill>
+                  <a:srgbClr val="3F3F3F"/>
+                </a:solidFill>
+                <a:latin typeface="Segoe UI"/>
+              </a:rPr>
+              <a:t>Full bibliography: Arthur, J. — Digital Sovereignty Through Semi-Automated OS Migration (term paper).</a:t>
             </a:r>
           </a:p>
         </p:txBody>
@@ -20205,7 +20033,7 @@
 </file>
 
 <file path=ppt/slides/slide27.xml><?xml version="1.0" encoding="utf-8"?>
-<p:sld xmlns:a="http://schemas.openxmlformats.org/drawingml/2006/main" xmlns:p="http://schemas.openxmlformats.org/presentationml/2006/main" xmlns:r="http://schemas.openxmlformats.org/officeDocument/2006/relationships">
+<p:sld xmlns:a="http://schemas.openxmlformats.org/drawingml/2006/main" xmlns:r="http://schemas.openxmlformats.org/officeDocument/2006/relationships" xmlns:p="http://schemas.openxmlformats.org/presentationml/2006/main">
   <p:cSld>
     <p:spTree>
       <p:nvGrpSpPr>
@@ -20213,459 +20041,52 @@
         <p:cNvGrpSpPr/>
         <p:nvPr/>
       </p:nvGrpSpPr>
-      <p:grpSpPr/>
-      <p:sp>
-        <p:nvSpPr>
-          <p:cNvPr id="2" name="TextBox 1"/>
-          <p:cNvSpPr txBox="1"/>
-          <p:nvPr/>
-        </p:nvSpPr>
-        <p:spPr>
-          <a:xfrm>
-            <a:off x="548640" y="274320"/>
-            <a:ext cx="10058400" cy="320040"/>
-          </a:xfrm>
-          <a:prstGeom prst="rect">
-            <a:avLst/>
-          </a:prstGeom>
-          <a:noFill/>
-        </p:spPr>
-        <p:txBody>
-          <a:bodyPr wrap="square">
-            <a:spAutoFit/>
-          </a:bodyPr>
-          <a:lstStyle/>
-          <a:p>
-            <a:r>
-              <a:rPr sz="1200" b="1">
-                <a:solidFill>
-                  <a:srgbClr val="063D79"/>
-                </a:solidFill>
-                <a:latin typeface="Segoe UI"/>
-              </a:rPr>
-              <a:t>EVIDENCE</a:t>
-            </a:r>
-          </a:p>
-        </p:txBody>
-      </p:sp>
-      <p:sp>
-        <p:nvSpPr>
-          <p:cNvPr id="3" name="TextBox 2"/>
-          <p:cNvSpPr txBox="1"/>
-          <p:nvPr/>
-        </p:nvSpPr>
-        <p:spPr>
-          <a:xfrm>
-            <a:off x="548640" y="566928"/>
-            <a:ext cx="10972800" cy="685800"/>
-          </a:xfrm>
-          <a:prstGeom prst="rect">
-            <a:avLst/>
-          </a:prstGeom>
-          <a:noFill/>
-        </p:spPr>
-        <p:txBody>
-          <a:bodyPr wrap="square">
-            <a:spAutoFit/>
-          </a:bodyPr>
-          <a:lstStyle/>
-          <a:p>
-            <a:r>
-              <a:rPr sz="2700" b="1">
-                <a:solidFill>
-                  <a:srgbClr val="1A1A1A"/>
-                </a:solidFill>
-                <a:latin typeface="Segoe UI"/>
-              </a:rPr>
-              <a:t>Double-click distribution</a:t>
-            </a:r>
-          </a:p>
-        </p:txBody>
-      </p:sp>
-      <p:sp>
-        <p:nvSpPr>
-          <p:cNvPr id="4" name="Rectangle 3"/>
-          <p:cNvSpPr/>
-          <p:nvPr/>
-        </p:nvSpPr>
-        <p:spPr>
-          <a:xfrm>
-            <a:off x="548640" y="1207008"/>
-            <a:ext cx="1005840" cy="38100"/>
-          </a:xfrm>
-          <a:prstGeom prst="rect">
-            <a:avLst/>
-          </a:prstGeom>
-          <a:solidFill>
-            <a:srgbClr val="063D79"/>
-          </a:solidFill>
-          <a:ln>
-            <a:noFill/>
-          </a:ln>
-          <a:effectLst/>
-        </p:spPr>
-        <p:style>
-          <a:lnRef idx="1">
-            <a:schemeClr val="accent1"/>
-          </a:lnRef>
-          <a:fillRef idx="3">
-            <a:schemeClr val="accent1"/>
-          </a:fillRef>
-          <a:effectRef idx="2">
-            <a:schemeClr val="accent1"/>
-          </a:effectRef>
-          <a:fontRef idx="minor">
-            <a:schemeClr val="lt1"/>
-          </a:fontRef>
-        </p:style>
-        <p:txBody>
-          <a:bodyPr rtlCol="0" anchor="ctr"/>
-          <a:lstStyle/>
-          <a:p>
-            <a:pPr algn="ctr"/>
-          </a:p>
-        </p:txBody>
-      </p:sp>
-      <p:sp>
-        <p:nvSpPr>
-          <p:cNvPr id="14" name="Rounded Rectangle 13"/>
-          <p:cNvSpPr/>
-          <p:nvPr/>
-        </p:nvSpPr>
-        <p:spPr>
-          <a:xfrm>
-            <a:off x="822960" y="2011680"/>
-            <a:ext cx="4937760" cy="2011680"/>
-          </a:xfrm>
-          <a:prstGeom prst="roundRect">
-            <a:avLst>
-              <a:gd name="adj" fmla="val 7000"/>
-            </a:avLst>
-          </a:prstGeom>
-          <a:solidFill>
-            <a:srgbClr val="FFFFFF"/>
-          </a:solidFill>
-          <a:ln w="12700">
-            <a:solidFill>
-              <a:srgbClr val="D8DADC"/>
-            </a:solidFill>
-          </a:ln>
-          <a:effectLst/>
-        </p:spPr>
-        <p:style>
-          <a:lnRef idx="1">
-            <a:schemeClr val="accent1"/>
-          </a:lnRef>
-          <a:fillRef idx="3">
-            <a:schemeClr val="accent1"/>
-          </a:fillRef>
-          <a:effectRef idx="2">
-            <a:schemeClr val="accent1"/>
-          </a:effectRef>
-          <a:fontRef idx="minor">
-            <a:schemeClr val="lt1"/>
-          </a:fontRef>
-        </p:style>
-        <p:txBody>
-          <a:bodyPr rtlCol="0" anchor="ctr"/>
-          <a:lstStyle/>
-          <a:p>
-            <a:pPr algn="ctr"/>
-            <a:endParaRPr/>
-          </a:p>
-        </p:txBody>
-      </p:sp>
-      <p:sp>
-        <p:nvSpPr>
-          <p:cNvPr id="15" name="Oval 14"/>
-          <p:cNvSpPr/>
-          <p:nvPr/>
-        </p:nvSpPr>
-        <p:spPr>
-          <a:xfrm>
-            <a:off x="2926080" y="2240280"/>
-            <a:ext cx="731520" cy="731520"/>
-          </a:xfrm>
-          <a:prstGeom prst="ellipse">
-            <a:avLst/>
-          </a:prstGeom>
-          <a:solidFill>
-            <a:srgbClr val="063D79"/>
-          </a:solidFill>
-          <a:ln>
-            <a:noFill/>
-          </a:ln>
-          <a:effectLst/>
-        </p:spPr>
-        <p:style>
-          <a:lnRef idx="1">
-            <a:schemeClr val="accent1"/>
-          </a:lnRef>
-          <a:fillRef idx="3">
-            <a:schemeClr val="accent1"/>
-          </a:fillRef>
-          <a:effectRef idx="2">
-            <a:schemeClr val="accent1"/>
-          </a:effectRef>
-          <a:fontRef idx="minor">
-            <a:schemeClr val="lt1"/>
-          </a:fontRef>
-        </p:style>
-        <p:txBody>
-          <a:bodyPr wrap="none" lIns="0" tIns="0" rIns="0" bIns="0" rtlCol="0" anchor="ctr"/>
-          <a:lstStyle/>
-          <a:p>
-            <a:pPr algn="ctr"/>
-            <a:r>
-              <a:rPr sz="2200" b="1">
-                <a:solidFill>
-                  <a:srgbClr val="FFFFFF"/>
-                </a:solidFill>
-              </a:rPr>
-              <a:t>🪟</a:t>
-            </a:r>
-          </a:p>
-        </p:txBody>
-      </p:sp>
-      <p:sp>
-        <p:nvSpPr>
-          <p:cNvPr id="16" name="TextBox 15"/>
-          <p:cNvSpPr txBox="1"/>
-          <p:nvPr/>
-        </p:nvSpPr>
-        <p:spPr>
-          <a:xfrm>
-            <a:off x="1005840" y="3063240"/>
-            <a:ext cx="4572000" cy="822960"/>
-          </a:xfrm>
-          <a:prstGeom prst="rect">
-            <a:avLst/>
-          </a:prstGeom>
-          <a:noFill/>
-        </p:spPr>
-        <p:txBody>
-          <a:bodyPr wrap="square">
-            <a:spAutoFit/>
-          </a:bodyPr>
-          <a:lstStyle/>
-          <a:p>
-            <a:pPr algn="ctr">
-              <a:lnSpc>
-                <a:spcPct val="120000"/>
-              </a:lnSpc>
-            </a:pPr>
-            <a:r>
-              <a:rPr sz="1250" b="0" i="0">
-                <a:solidFill>
-                  <a:srgbClr val="3F3F3F"/>
-                </a:solidFill>
-                <a:latin typeface="Segoe UI"/>
-              </a:rPr>
-              <a:t>migrate.exe</a:t>
-            </a:r>
-          </a:p>
-          <a:p>
-            <a:pPr algn="ctr">
-              <a:lnSpc>
-                <a:spcPct val="120000"/>
-              </a:lnSpc>
-            </a:pPr>
-            <a:r>
-              <a:rPr sz="1250" b="0" i="0">
-                <a:solidFill>
-                  <a:srgbClr val="3F3F3F"/>
-                </a:solidFill>
-                <a:latin typeface="Segoe UI"/>
-              </a:rPr>
-              <a:t>PyInstaller; can bake the Linux</a:t>
-            </a:r>
-          </a:p>
-          <a:p>
-            <a:pPr algn="ctr">
-              <a:lnSpc>
-                <a:spcPct val="120000"/>
-              </a:lnSpc>
-            </a:pPr>
-            <a:r>
-              <a:rPr sz="1250" b="0" i="0">
-                <a:solidFill>
-                  <a:srgbClr val="3F3F3F"/>
-                </a:solidFill>
-                <a:latin typeface="Segoe UI"/>
-              </a:rPr>
-              <a:t>binary in for a single-file standalone.</a:t>
-            </a:r>
-          </a:p>
-        </p:txBody>
-      </p:sp>
-      <p:sp>
-        <p:nvSpPr>
-          <p:cNvPr id="17" name="Rounded Rectangle 16"/>
-          <p:cNvSpPr/>
-          <p:nvPr/>
-        </p:nvSpPr>
-        <p:spPr>
-          <a:xfrm>
-            <a:off x="6309360" y="2011680"/>
-            <a:ext cx="4937760" cy="2011680"/>
-          </a:xfrm>
-          <a:prstGeom prst="roundRect">
-            <a:avLst>
-              <a:gd name="adj" fmla="val 7000"/>
-            </a:avLst>
-          </a:prstGeom>
-          <a:solidFill>
-            <a:srgbClr val="FFFFFF"/>
-          </a:solidFill>
-          <a:ln w="12700">
-            <a:solidFill>
-              <a:srgbClr val="D8DADC"/>
-            </a:solidFill>
-          </a:ln>
-          <a:effectLst/>
-        </p:spPr>
-        <p:style>
-          <a:lnRef idx="1">
-            <a:schemeClr val="accent1"/>
-          </a:lnRef>
-          <a:fillRef idx="3">
-            <a:schemeClr val="accent1"/>
-          </a:fillRef>
-          <a:effectRef idx="2">
-            <a:schemeClr val="accent1"/>
-          </a:effectRef>
-          <a:fontRef idx="minor">
-            <a:schemeClr val="lt1"/>
-          </a:fontRef>
-        </p:style>
-        <p:txBody>
-          <a:bodyPr rtlCol="0" anchor="ctr"/>
-          <a:lstStyle/>
-          <a:p>
-            <a:pPr algn="ctr"/>
-            <a:endParaRPr/>
-          </a:p>
-        </p:txBody>
-      </p:sp>
-      <p:sp>
-        <p:nvSpPr>
-          <p:cNvPr id="18" name="Oval 17"/>
-          <p:cNvSpPr/>
-          <p:nvPr/>
-        </p:nvSpPr>
-        <p:spPr>
-          <a:xfrm>
-            <a:off x="8412480" y="2240280"/>
-            <a:ext cx="731520" cy="731520"/>
-          </a:xfrm>
-          <a:prstGeom prst="ellipse">
-            <a:avLst/>
-          </a:prstGeom>
-          <a:solidFill>
-            <a:srgbClr val="008439"/>
-          </a:solidFill>
-          <a:ln>
-            <a:noFill/>
-          </a:ln>
-          <a:effectLst/>
-        </p:spPr>
-        <p:style>
-          <a:lnRef idx="1">
-            <a:schemeClr val="accent1"/>
-          </a:lnRef>
-          <a:fillRef idx="3">
-            <a:schemeClr val="accent1"/>
-          </a:fillRef>
-          <a:effectRef idx="2">
-            <a:schemeClr val="accent1"/>
-          </a:effectRef>
-          <a:fontRef idx="minor">
-            <a:schemeClr val="lt1"/>
-          </a:fontRef>
-        </p:style>
-        <p:txBody>
-          <a:bodyPr wrap="none" lIns="0" tIns="0" rIns="0" bIns="0" rtlCol="0" anchor="ctr"/>
-          <a:lstStyle/>
-          <a:p>
-            <a:pPr algn="ctr"/>
-            <a:r>
-              <a:rPr sz="2200" b="1">
-                <a:solidFill>
-                  <a:srgbClr val="FFFFFF"/>
-                </a:solidFill>
-              </a:rPr>
-              <a:t>🐧</a:t>
-            </a:r>
-          </a:p>
-        </p:txBody>
-      </p:sp>
-      <p:sp>
-        <p:nvSpPr>
-          <p:cNvPr id="19" name="TextBox 18"/>
-          <p:cNvSpPr txBox="1"/>
-          <p:nvPr/>
-        </p:nvSpPr>
-        <p:spPr>
-          <a:xfrm>
-            <a:off x="6492240" y="3063240"/>
-            <a:ext cx="4572000" cy="822960"/>
-          </a:xfrm>
-          <a:prstGeom prst="rect">
-            <a:avLst/>
-          </a:prstGeom>
-          <a:noFill/>
-        </p:spPr>
-        <p:txBody>
-          <a:bodyPr wrap="square">
-            <a:spAutoFit/>
-          </a:bodyPr>
-          <a:lstStyle/>
-          <a:p>
-            <a:pPr algn="ctr">
-              <a:lnSpc>
-                <a:spcPct val="120000"/>
-              </a:lnSpc>
-            </a:pPr>
-            <a:r>
-              <a:rPr sz="1250" b="0" i="0">
-                <a:solidFill>
-                  <a:srgbClr val="3F3F3F"/>
-                </a:solidFill>
-                <a:latin typeface="Segoe UI"/>
-              </a:rPr>
-              <a:t>restore (ELF binary)</a:t>
-            </a:r>
-          </a:p>
-          <a:p>
-            <a:pPr algn="ctr">
-              <a:lnSpc>
-                <a:spcPct val="120000"/>
-              </a:lnSpc>
-            </a:pPr>
-            <a:r>
-              <a:rPr sz="1250" b="0" i="0">
-                <a:solidFill>
-                  <a:srgbClr val="3F3F3F"/>
-                </a:solidFill>
-                <a:latin typeface="Segoe UI"/>
-              </a:rPr>
-              <a:t>Built on the target distro; embedded</a:t>
-            </a:r>
-          </a:p>
-          <a:p>
-            <a:pPr algn="ctr">
-              <a:lnSpc>
-                <a:spcPct val="120000"/>
-              </a:lnSpc>
-            </a:pPr>
-            <a:r>
-              <a:rPr sz="1250" b="0" i="0">
-                <a:solidFill>
-                  <a:srgbClr val="3F3F3F"/>
-                </a:solidFill>
-                <a:latin typeface="Segoe UI"/>
-              </a:rPr>
-              <a:t>automatically into every bundle.</a:t>
+      <p:grpSpPr>
+        <a:xfrm>
+          <a:off x="0" y="0"/>
+          <a:ext cx="0" cy="0"/>
+          <a:chOff x="0" y="0"/>
+          <a:chExt cx="0" cy="0"/>
+        </a:xfrm>
+      </p:grpSpPr>
+      <p:sp>
+        <p:nvSpPr>
+          <p:cNvPr id="2" name="Title 1"/>
+          <p:cNvSpPr>
+            <a:spLocks noGrp="1"/>
+          </p:cNvSpPr>
+          <p:nvPr>
+            <p:ph type="ctrTitle" sz="quarter"/>
+          </p:nvPr>
+        </p:nvSpPr>
+        <p:spPr/>
+        <p:txBody>
+          <a:bodyPr/>
+          <a:lstStyle/>
+          <a:p>
+            <a:r>
+              <a:t>Thank you</a:t>
+            </a:r>
+          </a:p>
+        </p:txBody>
+      </p:sp>
+      <p:sp>
+        <p:nvSpPr>
+          <p:cNvPr id="3" name="Subtitle 2"/>
+          <p:cNvSpPr>
+            <a:spLocks noGrp="1"/>
+          </p:cNvSpPr>
+          <p:nvPr>
+            <p:ph type="subTitle" sz="quarter" idx="1"/>
+          </p:nvPr>
+        </p:nvSpPr>
+        <p:spPr/>
+        <p:txBody>
+          <a:bodyPr/>
+          <a:lstStyle/>
+          <a:p>
+            <a:r>
+              <a:t>Questions &amp; live demo</a:t>
             </a:r>
           </a:p>
         </p:txBody>
@@ -21230,7 +20651,7 @@
         </p:nvSpPr>
         <p:spPr>
           <a:xfrm>
-            <a:off x="1598676" y="4572000"/>
+            <a:off x="1773936" y="4572000"/>
             <a:ext cx="201168" cy="201168"/>
           </a:xfrm>
           <a:prstGeom prst="ellipse">
@@ -21278,7 +20699,7 @@
         <p:spPr>
           <a:xfrm>
             <a:off x="822960" y="4892040"/>
-            <a:ext cx="1752600" cy="320040"/>
+            <a:ext cx="2103120" cy="320040"/>
           </a:xfrm>
           <a:prstGeom prst="rect">
             <a:avLst/>
@@ -21312,7 +20733,7 @@
         </p:nvSpPr>
         <p:spPr>
           <a:xfrm>
-            <a:off x="3351276" y="4572000"/>
+            <a:off x="3877056" y="4572000"/>
             <a:ext cx="201168" cy="201168"/>
           </a:xfrm>
           <a:prstGeom prst="ellipse">
@@ -21359,8 +20780,8 @@
         </p:nvSpPr>
         <p:spPr>
           <a:xfrm>
-            <a:off x="2575560" y="4892040"/>
-            <a:ext cx="1752600" cy="320040"/>
+            <a:off x="2926080" y="4892040"/>
+            <a:ext cx="2103120" cy="320040"/>
           </a:xfrm>
           <a:prstGeom prst="rect">
             <a:avLst/>
@@ -21394,7 +20815,7 @@
         </p:nvSpPr>
         <p:spPr>
           <a:xfrm>
-            <a:off x="5103876" y="4572000"/>
+            <a:off x="5980176" y="4572000"/>
             <a:ext cx="201168" cy="201168"/>
           </a:xfrm>
           <a:prstGeom prst="ellipse">
@@ -21441,8 +20862,8 @@
         </p:nvSpPr>
         <p:spPr>
           <a:xfrm>
-            <a:off x="4328160" y="4892040"/>
-            <a:ext cx="1752600" cy="320040"/>
+            <a:off x="5029200" y="4892040"/>
+            <a:ext cx="2103120" cy="320040"/>
           </a:xfrm>
           <a:prstGeom prst="rect">
             <a:avLst/>
@@ -21476,7 +20897,7 @@
         </p:nvSpPr>
         <p:spPr>
           <a:xfrm>
-            <a:off x="6856476" y="4572000"/>
+            <a:off x="8083296" y="4572000"/>
             <a:ext cx="201168" cy="201168"/>
           </a:xfrm>
           <a:prstGeom prst="ellipse">
@@ -21523,8 +20944,8 @@
         </p:nvSpPr>
         <p:spPr>
           <a:xfrm>
-            <a:off x="6080760" y="4892040"/>
-            <a:ext cx="1752600" cy="320040"/>
+            <a:off x="7132320" y="4892040"/>
+            <a:ext cx="2103120" cy="320040"/>
           </a:xfrm>
           <a:prstGeom prst="rect">
             <a:avLst/>
@@ -21558,7 +20979,7 @@
         </p:nvSpPr>
         <p:spPr>
           <a:xfrm>
-            <a:off x="8609076" y="4572000"/>
+            <a:off x="10186416" y="4572000"/>
             <a:ext cx="201168" cy="201168"/>
           </a:xfrm>
           <a:prstGeom prst="ellipse">
@@ -21605,90 +21026,8 @@
         </p:nvSpPr>
         <p:spPr>
           <a:xfrm>
-            <a:off x="7833360" y="4892040"/>
-            <a:ext cx="1752600" cy="320040"/>
-          </a:xfrm>
-          <a:prstGeom prst="rect">
-            <a:avLst/>
-          </a:prstGeom>
-          <a:noFill/>
-        </p:spPr>
-        <p:txBody>
-          <a:bodyPr wrap="square">
-            <a:spAutoFit/>
-          </a:bodyPr>
-          <a:lstStyle/>
-          <a:p>
-            <a:pPr algn="ctr"/>
-            <a:r>
-              <a:rPr sz="1100" b="0" i="0">
-                <a:solidFill>
-                  <a:srgbClr val="3F3F3F"/>
-                </a:solidFill>
-                <a:latin typeface="Segoe UI"/>
-              </a:rPr>
-              <a:t>Critique</a:t>
-            </a:r>
-          </a:p>
-        </p:txBody>
-      </p:sp>
-      <p:sp>
-        <p:nvSpPr>
-          <p:cNvPr id="15" name="Oval 14"/>
-          <p:cNvSpPr/>
-          <p:nvPr/>
-        </p:nvSpPr>
-        <p:spPr>
-          <a:xfrm>
-            <a:off x="10361676" y="4572000"/>
-            <a:ext cx="201168" cy="201168"/>
-          </a:xfrm>
-          <a:prstGeom prst="ellipse">
-            <a:avLst/>
-          </a:prstGeom>
-          <a:solidFill>
-            <a:srgbClr val="FFFFFF"/>
-          </a:solidFill>
-          <a:ln w="15875">
-            <a:solidFill>
-              <a:srgbClr val="D8DADC"/>
-            </a:solidFill>
-          </a:ln>
-          <a:effectLst/>
-        </p:spPr>
-        <p:style>
-          <a:lnRef idx="1">
-            <a:schemeClr val="accent1"/>
-          </a:lnRef>
-          <a:fillRef idx="3">
-            <a:schemeClr val="accent1"/>
-          </a:fillRef>
-          <a:effectRef idx="2">
-            <a:schemeClr val="accent1"/>
-          </a:effectRef>
-          <a:fontRef idx="minor">
-            <a:schemeClr val="lt1"/>
-          </a:fontRef>
-        </p:style>
-        <p:txBody>
-          <a:bodyPr rtlCol="0" anchor="ctr"/>
-          <a:lstStyle/>
-          <a:p>
-            <a:pPr algn="ctr"/>
-            <a:endParaRPr/>
-          </a:p>
-        </p:txBody>
-      </p:sp>
-      <p:sp>
-        <p:nvSpPr>
-          <p:cNvPr id="16" name="TextBox 15"/>
-          <p:cNvSpPr txBox="1"/>
-          <p:nvPr/>
-        </p:nvSpPr>
-        <p:spPr>
-          <a:xfrm>
-            <a:off x="9585960" y="4892040"/>
-            <a:ext cx="1752600" cy="320040"/>
+            <a:off x="9235440" y="4892040"/>
+            <a:ext cx="2103120" cy="320040"/>
           </a:xfrm>
           <a:prstGeom prst="rect">
             <a:avLst/>
@@ -22482,7 +21821,7 @@
         <p:spPr>
           <a:xfrm>
             <a:off x="583783" y="5833872"/>
-            <a:ext cx="10698480" cy="365760"/>
+            <a:ext cx="10698480" cy="292388"/>
           </a:xfrm>
           <a:prstGeom prst="rect">
             <a:avLst/>
@@ -22521,7 +21860,7 @@
                 </a:solidFill>
                 <a:latin typeface="Segoe UI"/>
               </a:rPr>
-              <a:t>/semi-auto-migration — cloned and inspected directly, not paraphrased from the term paper</a:t>
+              <a:t>/semi-auto-migration</a:t>
             </a:r>
           </a:p>
         </p:txBody>
@@ -23921,7 +23260,7 @@
         </p:nvSpPr>
         <p:spPr>
           <a:xfrm>
-            <a:off x="1598676" y="4572000"/>
+            <a:off x="1773936" y="4572000"/>
             <a:ext cx="201168" cy="201168"/>
           </a:xfrm>
           <a:prstGeom prst="ellipse">
@@ -23969,7 +23308,7 @@
         <p:spPr>
           <a:xfrm>
             <a:off x="822960" y="4892040"/>
-            <a:ext cx="1752600" cy="320040"/>
+            <a:ext cx="2103120" cy="320040"/>
           </a:xfrm>
           <a:prstGeom prst="rect">
             <a:avLst/>
@@ -24003,7 +23342,7 @@
         </p:nvSpPr>
         <p:spPr>
           <a:xfrm>
-            <a:off x="3351276" y="4572000"/>
+            <a:off x="3877056" y="4572000"/>
             <a:ext cx="201168" cy="201168"/>
           </a:xfrm>
           <a:prstGeom prst="ellipse">
@@ -24050,8 +23389,8 @@
         </p:nvSpPr>
         <p:spPr>
           <a:xfrm>
-            <a:off x="2575560" y="4892040"/>
-            <a:ext cx="1752600" cy="320040"/>
+            <a:off x="2926080" y="4892040"/>
+            <a:ext cx="2103120" cy="320040"/>
           </a:xfrm>
           <a:prstGeom prst="rect">
             <a:avLst/>
@@ -24085,7 +23424,7 @@
         </p:nvSpPr>
         <p:spPr>
           <a:xfrm>
-            <a:off x="5103876" y="4572000"/>
+            <a:off x="5980176" y="4572000"/>
             <a:ext cx="201168" cy="201168"/>
           </a:xfrm>
           <a:prstGeom prst="ellipse">
@@ -24132,8 +23471,8 @@
         </p:nvSpPr>
         <p:spPr>
           <a:xfrm>
-            <a:off x="4328160" y="4892040"/>
-            <a:ext cx="1752600" cy="320040"/>
+            <a:off x="5029200" y="4892040"/>
+            <a:ext cx="2103120" cy="320040"/>
           </a:xfrm>
           <a:prstGeom prst="rect">
             <a:avLst/>
@@ -24167,7 +23506,7 @@
         </p:nvSpPr>
         <p:spPr>
           <a:xfrm>
-            <a:off x="6856476" y="4572000"/>
+            <a:off x="8083296" y="4572000"/>
             <a:ext cx="201168" cy="201168"/>
           </a:xfrm>
           <a:prstGeom prst="ellipse">
@@ -24214,8 +23553,8 @@
         </p:nvSpPr>
         <p:spPr>
           <a:xfrm>
-            <a:off x="6080760" y="4892040"/>
-            <a:ext cx="1752600" cy="320040"/>
+            <a:off x="7132320" y="4892040"/>
+            <a:ext cx="2103120" cy="320040"/>
           </a:xfrm>
           <a:prstGeom prst="rect">
             <a:avLst/>
@@ -24249,7 +23588,7 @@
         </p:nvSpPr>
         <p:spPr>
           <a:xfrm>
-            <a:off x="8609076" y="4572000"/>
+            <a:off x="10186416" y="4572000"/>
             <a:ext cx="201168" cy="201168"/>
           </a:xfrm>
           <a:prstGeom prst="ellipse">
@@ -24296,90 +23635,8 @@
         </p:nvSpPr>
         <p:spPr>
           <a:xfrm>
-            <a:off x="7833360" y="4892040"/>
-            <a:ext cx="1752600" cy="320040"/>
-          </a:xfrm>
-          <a:prstGeom prst="rect">
-            <a:avLst/>
-          </a:prstGeom>
-          <a:noFill/>
-        </p:spPr>
-        <p:txBody>
-          <a:bodyPr wrap="square">
-            <a:spAutoFit/>
-          </a:bodyPr>
-          <a:lstStyle/>
-          <a:p>
-            <a:pPr algn="ctr"/>
-            <a:r>
-              <a:rPr sz="1100" b="0" i="0">
-                <a:solidFill>
-                  <a:srgbClr val="3F3F3F"/>
-                </a:solidFill>
-                <a:latin typeface="Segoe UI"/>
-              </a:rPr>
-              <a:t>Critique</a:t>
-            </a:r>
-          </a:p>
-        </p:txBody>
-      </p:sp>
-      <p:sp>
-        <p:nvSpPr>
-          <p:cNvPr id="15" name="Oval 14"/>
-          <p:cNvSpPr/>
-          <p:nvPr/>
-        </p:nvSpPr>
-        <p:spPr>
-          <a:xfrm>
-            <a:off x="10361676" y="4572000"/>
-            <a:ext cx="201168" cy="201168"/>
-          </a:xfrm>
-          <a:prstGeom prst="ellipse">
-            <a:avLst/>
-          </a:prstGeom>
-          <a:solidFill>
-            <a:srgbClr val="FFFFFF"/>
-          </a:solidFill>
-          <a:ln w="15875">
-            <a:solidFill>
-              <a:srgbClr val="D8DADC"/>
-            </a:solidFill>
-          </a:ln>
-          <a:effectLst/>
-        </p:spPr>
-        <p:style>
-          <a:lnRef idx="1">
-            <a:schemeClr val="accent1"/>
-          </a:lnRef>
-          <a:fillRef idx="3">
-            <a:schemeClr val="accent1"/>
-          </a:fillRef>
-          <a:effectRef idx="2">
-            <a:schemeClr val="accent1"/>
-          </a:effectRef>
-          <a:fontRef idx="minor">
-            <a:schemeClr val="lt1"/>
-          </a:fontRef>
-        </p:style>
-        <p:txBody>
-          <a:bodyPr rtlCol="0" anchor="ctr"/>
-          <a:lstStyle/>
-          <a:p>
-            <a:pPr algn="ctr"/>
-            <a:endParaRPr/>
-          </a:p>
-        </p:txBody>
-      </p:sp>
-      <p:sp>
-        <p:nvSpPr>
-          <p:cNvPr id="16" name="TextBox 15"/>
-          <p:cNvSpPr txBox="1"/>
-          <p:nvPr/>
-        </p:nvSpPr>
-        <p:spPr>
-          <a:xfrm>
-            <a:off x="9585960" y="4892040"/>
-            <a:ext cx="1752600" cy="320040"/>
+            <a:off x="9235440" y="4892040"/>
+            <a:ext cx="2103120" cy="320040"/>
           </a:xfrm>
           <a:prstGeom prst="rect">
             <a:avLst/>

--- a/docs/presentation/Migration_Wizard_Praktikum_Presentation.pptx
+++ b/docs/presentation/Migration_Wizard_Praktikum_Presentation.pptx
@@ -8218,6 +8218,41 @@
                 <a:latin typeface="Segoe UI"/>
               </a:rPr>
               <a:t>) · 3,595 LOC (tests) · 89 files · MIT licensed</a:t>
+            </a:r>
+          </a:p>
+        </p:txBody>
+      </p:sp>
+      <p:sp>
+        <p:nvSpPr>
+          <p:cNvPr id="27" name="TextBox 26"/>
+          <p:cNvSpPr txBox="1"/>
+          <p:nvPr/>
+        </p:nvSpPr>
+        <p:spPr>
+          <a:xfrm>
+            <a:off x="1554480" y="5650992"/>
+            <a:ext cx="9052560" cy="365760"/>
+          </a:xfrm>
+          <a:prstGeom prst="rect">
+            <a:avLst/>
+          </a:prstGeom>
+          <a:noFill/>
+        </p:spPr>
+        <p:txBody>
+          <a:bodyPr wrap="square">
+            <a:spAutoFit/>
+          </a:bodyPr>
+          <a:lstStyle/>
+          <a:p>
+            <a:pPr algn="l"/>
+            <a:r>
+              <a:rPr sz="1300" i="1">
+                <a:solidFill>
+                  <a:srgbClr val="3F3F3F"/>
+                </a:solidFill>
+                <a:latin typeface="Segoe UI"/>
+              </a:rPr>
+              <a:t>Verified on Windows 10 and Windows 11 (VirtualBox VM) — full scan-to-restore flow, no issues.</a:t>
             </a:r>
           </a:p>
         </p:txBody>

--- a/docs/presentation/Migration_Wizard_Praktikum_Presentation.pptx
+++ b/docs/presentation/Migration_Wizard_Praktikum_Presentation.pptx
@@ -21281,7 +21281,7 @@
         </p:nvSpPr>
         <p:spPr>
           <a:xfrm>
-            <a:off x="822960" y="5074920"/>
+            <a:off x="822960" y="5669280"/>
             <a:ext cx="10515600" cy="457200"/>
           </a:xfrm>
           <a:prstGeom prst="rect">
@@ -21304,6 +21304,40 @@
                 <a:latin typeface="Segoe UI"/>
               </a:rPr>
               <a:t>Full bibliography: Arthur, J. — Digital Sovereignty Through Semi-Automated OS Migration (term paper).</a:t>
+            </a:r>
+          </a:p>
+        </p:txBody>
+      </p:sp>
+      <p:sp>
+        <p:nvSpPr>
+          <p:cNvPr id="11" name="TextBox 10"/>
+          <p:cNvSpPr txBox="1"/>
+          <p:nvPr/>
+        </p:nvSpPr>
+        <p:spPr>
+          <a:xfrm>
+            <a:off x="822960" y="4892040"/>
+            <a:ext cx="10515600" cy="411480"/>
+          </a:xfrm>
+          <a:prstGeom prst="rect">
+            <a:avLst/>
+          </a:prstGeom>
+          <a:noFill/>
+        </p:spPr>
+        <p:txBody>
+          <a:bodyPr wrap="square">
+            <a:spAutoFit/>
+          </a:bodyPr>
+          <a:lstStyle/>
+          <a:p>
+            <a:r>
+              <a:rPr sz="1450" b="0">
+                <a:solidFill>
+                  <a:srgbClr val="1A1A1A"/>
+                </a:solidFill>
+                <a:latin typeface="Segoe UI"/>
+              </a:rPr>
+              <a:t>•  The Business Research Company (2026). Global Telemetry Market Report.</a:t>
             </a:r>
           </a:p>
         </p:txBody>

--- a/docs/presentation/Migration_Wizard_Praktikum_Presentation.pptx
+++ b/docs/presentation/Migration_Wizard_Praktikum_Presentation.pptx
@@ -13623,7 +13623,7 @@
                           </a:solidFill>
                           <a:latin typeface="Segoe UI"/>
                         </a:rPr>
-                        <a:t>1 (Linux)</a:t>
+                        <a:t>2 (Win + Linux, manual)</a:t>
                       </a:r>
                     </a:p>
                   </a:txBody>
@@ -13669,7 +13669,7 @@
                           </a:solidFill>
                           <a:latin typeface="Segoe UI"/>
                         </a:rPr>
-                        <a:t>1 → 2</a:t>
+                        <a:t>manual → automatic</a:t>
                       </a:r>
                     </a:p>
                   </a:txBody>
@@ -23989,7 +23989,7 @@
                     <a:srgbClr val="FFFFFF"/>
                   </a:solidFill>
                 </a:rPr>
-                <a:t>🐧</a:t>
+                <a:t>📦</a:t>
               </a:r>
             </a:p>
           </p:txBody>
@@ -24024,7 +24024,7 @@
                   </a:solidFill>
                   <a:latin typeface="Segoe UI"/>
                 </a:rPr>
-                <a:t>Linux-only</a:t>
+                <a:t>Two binaries</a:t>
               </a:r>
             </a:p>
           </p:txBody>
@@ -24063,23 +24063,8 @@
                   </a:solidFill>
                   <a:latin typeface="Segoe UI"/>
                 </a:rPr>
-                <a:t>packaging; one</a:t>
-              </a:r>
-            </a:p>
-            <a:p>
-              <a:pPr algn="ctr">
-                <a:lnSpc>
-                  <a:spcPct val="115000"/>
-                </a:lnSpc>
-              </a:pPr>
-              <a:r>
-                <a:rPr sz="1250" b="0" i="0">
-                  <a:solidFill>
-                    <a:srgbClr val="3F3F3F"/>
-                  </a:solidFill>
-                  <a:latin typeface="Segoe UI"/>
-                </a:rPr>
-                <a:t>22.5MB binary</a:t>
+                <a:t>built separately,
+no auto-embed</a:t>
               </a:r>
             </a:p>
           </p:txBody>

--- a/docs/presentation/Migration_Wizard_Praktikum_Presentation.pptx
+++ b/docs/presentation/Migration_Wizard_Praktikum_Presentation.pptx
@@ -5,10 +5,10 @@
     <p:sldMasterId id="2147483651" r:id="rId1"/>
   </p:sldMasterIdLst>
   <p:notesMasterIdLst>
-    <p:notesMasterId r:id="rId30"/>
+    <p:notesMasterId r:id="rId31"/>
   </p:notesMasterIdLst>
   <p:handoutMasterIdLst>
-    <p:handoutMasterId r:id="rId31"/>
+    <p:handoutMasterId r:id="rId32"/>
   </p:handoutMasterIdLst>
   <p:sldIdLst>
     <p:sldId id="256" r:id="rId2"/>
@@ -19,27 +19,26 @@
     <p:sldId id="260" r:id="rId7"/>
     <p:sldId id="261" r:id="rId8"/>
     <p:sldId id="262" r:id="rId9"/>
-    <p:sldId id="286" r:id="rId36"/>
-    <p:sldId id="263" r:id="rId10"/>
-    <p:sldId id="264" r:id="rId11"/>
-    <p:sldId id="265" r:id="rId12"/>
-    <p:sldId id="266" r:id="rId13"/>
-    <p:sldId id="267" r:id="rId14"/>
-    <p:sldId id="268" r:id="rId15"/>
-    <p:sldId id="269" r:id="rId16"/>
-    <p:sldId id="270" r:id="rId17"/>
-    <p:sldId id="271" r:id="rId18"/>
-    <p:sldId id="272" r:id="rId19"/>
-    <p:sldId id="273" r:id="rId20"/>
-    <p:sldId id="274" r:id="rId21"/>
-    <p:sldId id="282" r:id="rId22"/>
-    <p:sldId id="275" r:id="rId23"/>
-    <p:sldId id="283" r:id="rId24"/>
-    <p:sldId id="278" r:id="rId25"/>
-    <p:sldId id="279" r:id="rId26"/>
-    <p:sldId id="284" r:id="rId27"/>
-    <p:sldId id="280" r:id="rId28"/>
-    <p:sldId id="281" r:id="rId29"/>
+    <p:sldId id="286" r:id="rId10"/>
+    <p:sldId id="263" r:id="rId11"/>
+    <p:sldId id="264" r:id="rId12"/>
+    <p:sldId id="265" r:id="rId13"/>
+    <p:sldId id="266" r:id="rId14"/>
+    <p:sldId id="267" r:id="rId15"/>
+    <p:sldId id="268" r:id="rId16"/>
+    <p:sldId id="269" r:id="rId17"/>
+    <p:sldId id="270" r:id="rId18"/>
+    <p:sldId id="271" r:id="rId19"/>
+    <p:sldId id="272" r:id="rId20"/>
+    <p:sldId id="273" r:id="rId21"/>
+    <p:sldId id="274" r:id="rId22"/>
+    <p:sldId id="282" r:id="rId23"/>
+    <p:sldId id="283" r:id="rId25"/>
+    <p:sldId id="278" r:id="rId26"/>
+    <p:sldId id="279" r:id="rId27"/>
+    <p:sldId id="284" r:id="rId28"/>
+    <p:sldId id="280" r:id="rId29"/>
+    <p:sldId id="281" r:id="rId30"/>
   </p:sldIdLst>
   <p:sldSz cx="12192000" cy="6858000"/>
   <p:notesSz cx="6797675" cy="9928225"/>
@@ -897,229 +896,6 @@
 </c:chartSpace>
 </file>
 
-<file path=ppt/charts/chart4.xml><?xml version="1.0" encoding="utf-8"?>
-<c:chartSpace xmlns:c="http://schemas.openxmlformats.org/drawingml/2006/chart" xmlns:a="http://schemas.openxmlformats.org/drawingml/2006/main" xmlns:r="http://schemas.openxmlformats.org/officeDocument/2006/relationships" xmlns:c16r2="http://schemas.microsoft.com/office/drawing/2015/06/chart">
-  <c:date1904 val="0"/>
-  <c:lang val="en-US"/>
-  <c:roundedCorners val="1"/>
-  <c:style val="2"/>
-  <c:chart>
-    <c:title>
-      <c:tx>
-        <c:rich>
-          <a:bodyPr/>
-          <a:lstStyle/>
-          <a:p>
-            <a:r>
-              <a:rPr lang="en-US" sz="1300" b="1"/>
-              <a:t>App mapping table growth</a:t>
-            </a:r>
-          </a:p>
-        </c:rich>
-      </c:tx>
-      <c:overlay val="0"/>
-    </c:title>
-    <c:autoTitleDeleted val="0"/>
-    <c:plotArea>
-      <c:layout/>
-      <c:barChart>
-        <c:barDir val="col"/>
-        <c:grouping val="clustered"/>
-        <c:varyColors val="1"/>
-        <c:ser>
-          <c:idx val="0"/>
-          <c:order val="0"/>
-          <c:tx>
-            <c:strRef>
-              <c:f>Sheet1!$B$1</c:f>
-              <c:strCache>
-                <c:ptCount val="1"/>
-                <c:pt idx="0">
-                  <c:v>App mappings</c:v>
-                </c:pt>
-              </c:strCache>
-            </c:strRef>
-          </c:tx>
-          <c:spPr>
-            <a:solidFill>
-              <a:srgbClr val="008439"/>
-            </a:solidFill>
-            <a:ln>
-              <a:noFill/>
-            </a:ln>
-          </c:spPr>
-          <c:invertIfNegative val="1"/>
-          <c:dLbls>
-            <c:spPr>
-              <a:noFill/>
-              <a:ln>
-                <a:noFill/>
-              </a:ln>
-              <a:effectLst/>
-            </c:spPr>
-            <c:txPr>
-              <a:bodyPr/>
-              <a:lstStyle/>
-              <a:p>
-                <a:pPr>
-                  <a:defRPr sz="1300" b="1">
-                    <a:solidFill>
-                      <a:srgbClr val="1A1A1A"/>
-                    </a:solidFill>
-                  </a:defRPr>
-                </a:pPr>
-                <a:endParaRPr lang="en-GH"/>
-              </a:p>
-            </c:txPr>
-            <c:dLblPos val="outEnd"/>
-            <c:showLegendKey val="0"/>
-            <c:showVal val="1"/>
-            <c:showCatName val="0"/>
-            <c:showSerName val="0"/>
-            <c:showPercent val="0"/>
-            <c:showBubbleSize val="0"/>
-            <c:showLeaderLines val="0"/>
-            <c:extLst>
-              <c:ext xmlns:c15="http://schemas.microsoft.com/office/drawing/2012/chart" uri="{CE6537A1-D6FC-4f65-9D91-7224C49458BB}">
-                <c15:showLeaderLines val="0"/>
-              </c:ext>
-            </c:extLst>
-          </c:dLbls>
-          <c:cat>
-            <c:strRef>
-              <c:f>Sheet1!$A$2:$A$3</c:f>
-              <c:strCache>
-                <c:ptCount val="2"/>
-                <c:pt idx="0">
-                  <c:v>Before</c:v>
-                </c:pt>
-                <c:pt idx="1">
-                  <c:v>Now</c:v>
-                </c:pt>
-              </c:strCache>
-            </c:strRef>
-          </c:cat>
-          <c:val>
-            <c:numRef>
-              <c:f>Sheet1!$B$2:$B$3</c:f>
-              <c:numCache>
-                <c:formatCode>General</c:formatCode>
-                <c:ptCount val="2"/>
-                <c:pt idx="0">
-                  <c:v>149</c:v>
-                </c:pt>
-                <c:pt idx="1">
-                  <c:v>238</c:v>
-                </c:pt>
-              </c:numCache>
-            </c:numRef>
-          </c:val>
-          <c:extLst>
-            <c:ext xmlns:c14="http://schemas.microsoft.com/office/drawing/2007/8/2/chart" uri="{6F2FDCE9-48DA-4B69-8628-5D25D57E5C99}">
-              <c14:invertSolidFillFmt>
-                <c14:spPr xmlns:c14="http://schemas.microsoft.com/office/drawing/2007/8/2/chart">
-                  <a:solidFill>
-                    <a:srgbClr val="FFFFFF"/>
-                  </a:solidFill>
-                  <a:ln>
-                    <a:noFill/>
-                  </a:ln>
-                </c14:spPr>
-              </c14:invertSolidFillFmt>
-            </c:ext>
-            <c:ext xmlns:c16="http://schemas.microsoft.com/office/drawing/2014/chart" uri="{C3380CC4-5D6E-409C-BE32-E72D297353CC}">
-              <c16:uniqueId val="{00000000-B230-492A-AE73-A0CA52B56C80}"/>
-            </c:ext>
-          </c:extLst>
-        </c:ser>
-        <c:dLbls>
-          <c:dLblPos val="outEnd"/>
-          <c:showLegendKey val="0"/>
-          <c:showVal val="1"/>
-          <c:showCatName val="0"/>
-          <c:showSerName val="0"/>
-          <c:showPercent val="0"/>
-          <c:showBubbleSize val="0"/>
-        </c:dLbls>
-        <c:gapWidth val="150"/>
-        <c:axId val="-2068027336"/>
-        <c:axId val="-2113994440"/>
-      </c:barChart>
-      <c:catAx>
-        <c:axId val="-2068027336"/>
-        <c:scaling>
-          <c:orientation val="minMax"/>
-        </c:scaling>
-        <c:delete val="0"/>
-        <c:axPos val="b"/>
-        <c:numFmt formatCode="General" sourceLinked="0"/>
-        <c:majorTickMark val="out"/>
-        <c:minorTickMark val="none"/>
-        <c:tickLblPos val="nextTo"/>
-        <c:spPr>
-          <a:ln>
-            <a:solidFill>
-              <a:srgbClr val="D8DADC"/>
-            </a:solidFill>
-          </a:ln>
-        </c:spPr>
-        <c:txPr>
-          <a:bodyPr/>
-          <a:lstStyle/>
-          <a:p>
-            <a:pPr>
-              <a:defRPr sz="1300">
-                <a:solidFill>
-                  <a:srgbClr val="1A1A1A"/>
-                </a:solidFill>
-              </a:defRPr>
-            </a:pPr>
-            <a:endParaRPr lang="en-GH"/>
-          </a:p>
-        </c:txPr>
-        <c:crossAx val="-2113994440"/>
-        <c:crosses val="autoZero"/>
-        <c:auto val="1"/>
-        <c:lblAlgn val="ctr"/>
-        <c:lblOffset val="100"/>
-        <c:noMultiLvlLbl val="0"/>
-      </c:catAx>
-      <c:valAx>
-        <c:axId val="-2113994440"/>
-        <c:scaling>
-          <c:orientation val="minMax"/>
-        </c:scaling>
-        <c:delete val="1"/>
-        <c:axPos val="l"/>
-        <c:numFmt formatCode="General" sourceLinked="1"/>
-        <c:majorTickMark val="out"/>
-        <c:minorTickMark val="none"/>
-        <c:tickLblPos val="nextTo"/>
-        <c:crossAx val="-2068027336"/>
-        <c:crosses val="autoZero"/>
-        <c:crossBetween val="between"/>
-      </c:valAx>
-    </c:plotArea>
-    <c:plotVisOnly val="1"/>
-    <c:dispBlanksAs val="gap"/>
-    <c:showDLblsOverMax val="1"/>
-  </c:chart>
-  <c:txPr>
-    <a:bodyPr/>
-    <a:lstStyle/>
-    <a:p>
-      <a:pPr>
-        <a:defRPr sz="1800"/>
-      </a:pPr>
-      <a:endParaRPr lang="en-US"/>
-    </a:p>
-  </c:txPr>
-  <c:externalData r:id="rId1">
-    <c:autoUpdate val="0"/>
-  </c:externalData>
-</c:chartSpace>
-</file>
-
 <file path=ppt/handoutMasters/handoutMaster1.xml><?xml version="1.0" encoding="utf-8"?>
 <p:handoutMaster xmlns:a="http://schemas.openxmlformats.org/drawingml/2006/main" xmlns:r="http://schemas.openxmlformats.org/officeDocument/2006/relationships" xmlns:p="http://schemas.openxmlformats.org/presentationml/2006/main">
   <p:cSld>
@@ -1996,7 +1772,7 @@
             <a:fld id="{412C2970-D838-4E16-9F7E-5362C8D6E639}" type="slidenum">
               <a:rPr lang="en-US" smtClean="0"/>
               <a:pPr/>
-              <a:t>9</a:t>
+              <a:t>10</a:t>
             </a:fld>
             <a:endParaRPr lang="en-US"/>
           </a:p>
@@ -2145,7 +1921,7 @@
             <a:fld id="{412C2970-D838-4E16-9F7E-5362C8D6E639}" type="slidenum">
               <a:rPr lang="en-US" smtClean="0"/>
               <a:pPr/>
-              <a:t>12</a:t>
+              <a:t>13</a:t>
             </a:fld>
             <a:endParaRPr lang="en-US"/>
           </a:p>
@@ -2258,7 +2034,7 @@
             <a:fld id="{412C2970-D838-4E16-9F7E-5362C8D6E639}" type="slidenum">
               <a:rPr lang="en-US" smtClean="0"/>
               <a:pPr/>
-              <a:t>17</a:t>
+              <a:t>18</a:t>
             </a:fld>
             <a:endParaRPr lang="en-US"/>
           </a:p>
@@ -2437,7 +2213,7 @@
             <a:fld id="{412C2970-D838-4E16-9F7E-5362C8D6E639}" type="slidenum">
               <a:rPr lang="en-US" smtClean="0"/>
               <a:pPr/>
-              <a:t>18</a:t>
+              <a:t>19</a:t>
             </a:fld>
             <a:endParaRPr lang="en-US"/>
           </a:p>
@@ -12238,7 +12014,7 @@
         </p:nvSpPr>
         <p:spPr>
           <a:xfrm>
-            <a:off x="5015880" y="7245424"/>
+            <a:off x="6126480" y="1612979"/>
             <a:ext cx="5212080" cy="329184"/>
           </a:xfrm>
           <a:prstGeom prst="rect">
@@ -17552,747 +17328,6 @@
 </p:sld>
 </file>
 
-<file path=ppt/slides/slide23.xml><?xml version="1.0" encoding="utf-8"?>
-<p:sld xmlns:a="http://schemas.openxmlformats.org/drawingml/2006/main" xmlns:r="http://schemas.openxmlformats.org/officeDocument/2006/relationships" xmlns:p="http://schemas.openxmlformats.org/presentationml/2006/main">
-  <p:cSld>
-    <p:spTree>
-      <p:nvGrpSpPr>
-        <p:cNvPr id="1" name=""/>
-        <p:cNvGrpSpPr/>
-        <p:nvPr/>
-      </p:nvGrpSpPr>
-      <p:grpSpPr>
-        <a:xfrm>
-          <a:off x="0" y="0"/>
-          <a:ext cx="0" cy="0"/>
-          <a:chOff x="0" y="0"/>
-          <a:chExt cx="0" cy="0"/>
-        </a:xfrm>
-      </p:grpSpPr>
-      <p:sp>
-        <p:nvSpPr>
-          <p:cNvPr id="2" name="TextBox 1"/>
-          <p:cNvSpPr txBox="1"/>
-          <p:nvPr/>
-        </p:nvSpPr>
-        <p:spPr>
-          <a:xfrm>
-            <a:off x="548640" y="274320"/>
-            <a:ext cx="10058400" cy="320040"/>
-          </a:xfrm>
-          <a:prstGeom prst="rect">
-            <a:avLst/>
-          </a:prstGeom>
-          <a:noFill/>
-        </p:spPr>
-        <p:txBody>
-          <a:bodyPr wrap="square">
-            <a:spAutoFit/>
-          </a:bodyPr>
-          <a:lstStyle/>
-          <a:p>
-            <a:pPr algn="l"/>
-            <a:r>
-              <a:rPr sz="1200" b="1" i="0">
-                <a:solidFill>
-                  <a:srgbClr val="063D79"/>
-                </a:solidFill>
-                <a:latin typeface="Segoe UI"/>
-              </a:rPr>
-              <a:t>EVIDENCE</a:t>
-            </a:r>
-          </a:p>
-        </p:txBody>
-      </p:sp>
-      <p:sp>
-        <p:nvSpPr>
-          <p:cNvPr id="3" name="TextBox 2"/>
-          <p:cNvSpPr txBox="1"/>
-          <p:nvPr/>
-        </p:nvSpPr>
-        <p:spPr>
-          <a:xfrm>
-            <a:off x="548640" y="566928"/>
-            <a:ext cx="10972800" cy="685800"/>
-          </a:xfrm>
-          <a:prstGeom prst="rect">
-            <a:avLst/>
-          </a:prstGeom>
-          <a:noFill/>
-        </p:spPr>
-        <p:txBody>
-          <a:bodyPr wrap="square">
-            <a:spAutoFit/>
-          </a:bodyPr>
-          <a:lstStyle/>
-          <a:p>
-            <a:pPr algn="l"/>
-            <a:r>
-              <a:rPr sz="2700" b="1" i="0">
-                <a:solidFill>
-                  <a:srgbClr val="1A1A1A"/>
-                </a:solidFill>
-                <a:latin typeface="Segoe UI"/>
-              </a:rPr>
-              <a:t>What the project delivers</a:t>
-            </a:r>
-          </a:p>
-        </p:txBody>
-      </p:sp>
-      <p:sp>
-        <p:nvSpPr>
-          <p:cNvPr id="4" name="Rectangle 3"/>
-          <p:cNvSpPr/>
-          <p:nvPr/>
-        </p:nvSpPr>
-        <p:spPr>
-          <a:xfrm>
-            <a:off x="548640" y="1207008"/>
-            <a:ext cx="1005840" cy="38100"/>
-          </a:xfrm>
-          <a:prstGeom prst="rect">
-            <a:avLst/>
-          </a:prstGeom>
-          <a:solidFill>
-            <a:srgbClr val="063D79"/>
-          </a:solidFill>
-          <a:ln>
-            <a:noFill/>
-          </a:ln>
-          <a:effectLst/>
-        </p:spPr>
-        <p:style>
-          <a:lnRef idx="1">
-            <a:schemeClr val="accent1"/>
-          </a:lnRef>
-          <a:fillRef idx="3">
-            <a:schemeClr val="accent1"/>
-          </a:fillRef>
-          <a:effectRef idx="2">
-            <a:schemeClr val="accent1"/>
-          </a:effectRef>
-          <a:fontRef idx="minor">
-            <a:schemeClr val="lt1"/>
-          </a:fontRef>
-        </p:style>
-        <p:txBody>
-          <a:bodyPr rtlCol="0" anchor="ctr"/>
-          <a:lstStyle/>
-          <a:p>
-            <a:pPr algn="ctr"/>
-            <a:endParaRPr/>
-          </a:p>
-        </p:txBody>
-      </p:sp>
-      <p:sp>
-        <p:nvSpPr>
-          <p:cNvPr id="5" name="Rounded Rectangle 4"/>
-          <p:cNvSpPr/>
-          <p:nvPr/>
-        </p:nvSpPr>
-        <p:spPr>
-          <a:xfrm>
-            <a:off x="731520" y="1645920"/>
-            <a:ext cx="2514600" cy="1371600"/>
-          </a:xfrm>
-          <a:prstGeom prst="roundRect">
-            <a:avLst>
-              <a:gd name="adj" fmla="val 7000"/>
-            </a:avLst>
-          </a:prstGeom>
-          <a:solidFill>
-            <a:srgbClr val="FFFFFF"/>
-          </a:solidFill>
-          <a:ln w="12700">
-            <a:solidFill>
-              <a:srgbClr val="D8DADC"/>
-            </a:solidFill>
-          </a:ln>
-          <a:effectLst/>
-        </p:spPr>
-        <p:style>
-          <a:lnRef idx="1">
-            <a:schemeClr val="accent1"/>
-          </a:lnRef>
-          <a:fillRef idx="3">
-            <a:schemeClr val="accent1"/>
-          </a:fillRef>
-          <a:effectRef idx="2">
-            <a:schemeClr val="accent1"/>
-          </a:effectRef>
-          <a:fontRef idx="minor">
-            <a:schemeClr val="lt1"/>
-          </a:fontRef>
-        </p:style>
-        <p:txBody>
-          <a:bodyPr rtlCol="0" anchor="ctr"/>
-          <a:lstStyle/>
-          <a:p>
-            <a:pPr algn="ctr"/>
-            <a:endParaRPr/>
-          </a:p>
-        </p:txBody>
-      </p:sp>
-      <p:sp>
-        <p:nvSpPr>
-          <p:cNvPr id="6" name="TextBox 5"/>
-          <p:cNvSpPr txBox="1"/>
-          <p:nvPr/>
-        </p:nvSpPr>
-        <p:spPr>
-          <a:xfrm>
-            <a:off x="731520" y="1783080"/>
-            <a:ext cx="2514600" cy="685800"/>
-          </a:xfrm>
-          <a:prstGeom prst="rect">
-            <a:avLst/>
-          </a:prstGeom>
-          <a:noFill/>
-        </p:spPr>
-        <p:txBody>
-          <a:bodyPr wrap="square">
-            <a:spAutoFit/>
-          </a:bodyPr>
-          <a:lstStyle/>
-          <a:p>
-            <a:pPr algn="ctr"/>
-            <a:r>
-              <a:rPr sz="3200" b="1" i="0">
-                <a:solidFill>
-                  <a:srgbClr val="063D79"/>
-                </a:solidFill>
-                <a:latin typeface="Segoe UI"/>
-              </a:rPr>
-              <a:t>238</a:t>
-            </a:r>
-          </a:p>
-        </p:txBody>
-      </p:sp>
-      <p:sp>
-        <p:nvSpPr>
-          <p:cNvPr id="7" name="TextBox 6"/>
-          <p:cNvSpPr txBox="1"/>
-          <p:nvPr/>
-        </p:nvSpPr>
-        <p:spPr>
-          <a:xfrm>
-            <a:off x="868680" y="2377440"/>
-            <a:ext cx="2240280" cy="457200"/>
-          </a:xfrm>
-          <a:prstGeom prst="rect">
-            <a:avLst/>
-          </a:prstGeom>
-          <a:noFill/>
-        </p:spPr>
-        <p:txBody>
-          <a:bodyPr wrap="square">
-            <a:spAutoFit/>
-          </a:bodyPr>
-          <a:lstStyle/>
-          <a:p>
-            <a:pPr algn="ctr"/>
-            <a:r>
-              <a:rPr sz="1250" b="0" i="0">
-                <a:solidFill>
-                  <a:srgbClr val="1A1A1A"/>
-                </a:solidFill>
-                <a:latin typeface="Segoe UI"/>
-              </a:rPr>
-              <a:t>app mappings</a:t>
-            </a:r>
-          </a:p>
-        </p:txBody>
-      </p:sp>
-      <p:sp>
-        <p:nvSpPr>
-          <p:cNvPr id="8" name="Rounded Rectangle 7"/>
-          <p:cNvSpPr/>
-          <p:nvPr/>
-        </p:nvSpPr>
-        <p:spPr>
-          <a:xfrm>
-            <a:off x="3364992" y="1645920"/>
-            <a:ext cx="2514600" cy="1371600"/>
-          </a:xfrm>
-          <a:prstGeom prst="roundRect">
-            <a:avLst>
-              <a:gd name="adj" fmla="val 7000"/>
-            </a:avLst>
-          </a:prstGeom>
-          <a:solidFill>
-            <a:srgbClr val="FFFFFF"/>
-          </a:solidFill>
-          <a:ln w="12700">
-            <a:solidFill>
-              <a:srgbClr val="D8DADC"/>
-            </a:solidFill>
-          </a:ln>
-          <a:effectLst/>
-        </p:spPr>
-        <p:style>
-          <a:lnRef idx="1">
-            <a:schemeClr val="accent1"/>
-          </a:lnRef>
-          <a:fillRef idx="3">
-            <a:schemeClr val="accent1"/>
-          </a:fillRef>
-          <a:effectRef idx="2">
-            <a:schemeClr val="accent1"/>
-          </a:effectRef>
-          <a:fontRef idx="minor">
-            <a:schemeClr val="lt1"/>
-          </a:fontRef>
-        </p:style>
-        <p:txBody>
-          <a:bodyPr rtlCol="0" anchor="ctr"/>
-          <a:lstStyle/>
-          <a:p>
-            <a:pPr algn="ctr"/>
-            <a:endParaRPr/>
-          </a:p>
-        </p:txBody>
-      </p:sp>
-      <p:sp>
-        <p:nvSpPr>
-          <p:cNvPr id="9" name="TextBox 8"/>
-          <p:cNvSpPr txBox="1"/>
-          <p:nvPr/>
-        </p:nvSpPr>
-        <p:spPr>
-          <a:xfrm>
-            <a:off x="3364992" y="1783080"/>
-            <a:ext cx="2514600" cy="685800"/>
-          </a:xfrm>
-          <a:prstGeom prst="rect">
-            <a:avLst/>
-          </a:prstGeom>
-          <a:noFill/>
-        </p:spPr>
-        <p:txBody>
-          <a:bodyPr wrap="square">
-            <a:spAutoFit/>
-          </a:bodyPr>
-          <a:lstStyle/>
-          <a:p>
-            <a:pPr algn="ctr"/>
-            <a:r>
-              <a:rPr sz="3200" b="1" i="0">
-                <a:solidFill>
-                  <a:srgbClr val="063D79"/>
-                </a:solidFill>
-                <a:latin typeface="Segoe UI"/>
-              </a:rPr>
-              <a:t>192</a:t>
-            </a:r>
-          </a:p>
-        </p:txBody>
-      </p:sp>
-      <p:sp>
-        <p:nvSpPr>
-          <p:cNvPr id="10" name="TextBox 9"/>
-          <p:cNvSpPr txBox="1"/>
-          <p:nvPr/>
-        </p:nvSpPr>
-        <p:spPr>
-          <a:xfrm>
-            <a:off x="3502152" y="2377440"/>
-            <a:ext cx="2240280" cy="457200"/>
-          </a:xfrm>
-          <a:prstGeom prst="rect">
-            <a:avLst/>
-          </a:prstGeom>
-          <a:noFill/>
-        </p:spPr>
-        <p:txBody>
-          <a:bodyPr wrap="square">
-            <a:spAutoFit/>
-          </a:bodyPr>
-          <a:lstStyle/>
-          <a:p>
-            <a:pPr algn="ctr"/>
-            <a:r>
-              <a:rPr sz="1250" b="0" i="0">
-                <a:solidFill>
-                  <a:srgbClr val="1A1A1A"/>
-                </a:solidFill>
-                <a:latin typeface="Segoe UI"/>
-              </a:rPr>
-              <a:t>automated tests</a:t>
-            </a:r>
-          </a:p>
-        </p:txBody>
-      </p:sp>
-      <p:sp>
-        <p:nvSpPr>
-          <p:cNvPr id="11" name="Rounded Rectangle 10"/>
-          <p:cNvSpPr/>
-          <p:nvPr/>
-        </p:nvSpPr>
-        <p:spPr>
-          <a:xfrm>
-            <a:off x="5998464" y="1645920"/>
-            <a:ext cx="2514600" cy="1371600"/>
-          </a:xfrm>
-          <a:prstGeom prst="roundRect">
-            <a:avLst>
-              <a:gd name="adj" fmla="val 7000"/>
-            </a:avLst>
-          </a:prstGeom>
-          <a:solidFill>
-            <a:srgbClr val="FFFFFF"/>
-          </a:solidFill>
-          <a:ln w="12700">
-            <a:solidFill>
-              <a:srgbClr val="D8DADC"/>
-            </a:solidFill>
-          </a:ln>
-          <a:effectLst/>
-        </p:spPr>
-        <p:style>
-          <a:lnRef idx="1">
-            <a:schemeClr val="accent1"/>
-          </a:lnRef>
-          <a:fillRef idx="3">
-            <a:schemeClr val="accent1"/>
-          </a:fillRef>
-          <a:effectRef idx="2">
-            <a:schemeClr val="accent1"/>
-          </a:effectRef>
-          <a:fontRef idx="minor">
-            <a:schemeClr val="lt1"/>
-          </a:fontRef>
-        </p:style>
-        <p:txBody>
-          <a:bodyPr rtlCol="0" anchor="ctr"/>
-          <a:lstStyle/>
-          <a:p>
-            <a:pPr algn="ctr"/>
-            <a:endParaRPr/>
-          </a:p>
-        </p:txBody>
-      </p:sp>
-      <p:sp>
-        <p:nvSpPr>
-          <p:cNvPr id="12" name="TextBox 11"/>
-          <p:cNvSpPr txBox="1"/>
-          <p:nvPr/>
-        </p:nvSpPr>
-        <p:spPr>
-          <a:xfrm>
-            <a:off x="5998464" y="1783080"/>
-            <a:ext cx="2514600" cy="685800"/>
-          </a:xfrm>
-          <a:prstGeom prst="rect">
-            <a:avLst/>
-          </a:prstGeom>
-          <a:noFill/>
-        </p:spPr>
-        <p:txBody>
-          <a:bodyPr wrap="square">
-            <a:spAutoFit/>
-          </a:bodyPr>
-          <a:lstStyle/>
-          <a:p>
-            <a:pPr algn="ctr"/>
-            <a:r>
-              <a:rPr sz="3200" b="1" i="0">
-                <a:solidFill>
-                  <a:srgbClr val="063D79"/>
-                </a:solidFill>
-                <a:latin typeface="Segoe UI"/>
-              </a:rPr>
-              <a:t>3</a:t>
-            </a:r>
-          </a:p>
-        </p:txBody>
-      </p:sp>
-      <p:sp>
-        <p:nvSpPr>
-          <p:cNvPr id="13" name="TextBox 12"/>
-          <p:cNvSpPr txBox="1"/>
-          <p:nvPr/>
-        </p:nvSpPr>
-        <p:spPr>
-          <a:xfrm>
-            <a:off x="6135624" y="2377440"/>
-            <a:ext cx="2240280" cy="457200"/>
-          </a:xfrm>
-          <a:prstGeom prst="rect">
-            <a:avLst/>
-          </a:prstGeom>
-          <a:noFill/>
-        </p:spPr>
-        <p:txBody>
-          <a:bodyPr wrap="square">
-            <a:spAutoFit/>
-          </a:bodyPr>
-          <a:lstStyle/>
-          <a:p>
-            <a:pPr algn="ctr"/>
-            <a:r>
-              <a:rPr sz="1250" b="0" i="0">
-                <a:solidFill>
-                  <a:srgbClr val="1A1A1A"/>
-                </a:solidFill>
-                <a:latin typeface="Segoe UI"/>
-              </a:rPr>
-              <a:t>guidance modes</a:t>
-            </a:r>
-          </a:p>
-        </p:txBody>
-      </p:sp>
-      <p:sp>
-        <p:nvSpPr>
-          <p:cNvPr id="14" name="Rounded Rectangle 13"/>
-          <p:cNvSpPr/>
-          <p:nvPr/>
-        </p:nvSpPr>
-        <p:spPr>
-          <a:xfrm>
-            <a:off x="8631936" y="1645920"/>
-            <a:ext cx="2514600" cy="1371600"/>
-          </a:xfrm>
-          <a:prstGeom prst="roundRect">
-            <a:avLst>
-              <a:gd name="adj" fmla="val 7000"/>
-            </a:avLst>
-          </a:prstGeom>
-          <a:solidFill>
-            <a:srgbClr val="FFFFFF"/>
-          </a:solidFill>
-          <a:ln w="12700">
-            <a:solidFill>
-              <a:srgbClr val="D8DADC"/>
-            </a:solidFill>
-          </a:ln>
-          <a:effectLst/>
-        </p:spPr>
-        <p:style>
-          <a:lnRef idx="1">
-            <a:schemeClr val="accent1"/>
-          </a:lnRef>
-          <a:fillRef idx="3">
-            <a:schemeClr val="accent1"/>
-          </a:fillRef>
-          <a:effectRef idx="2">
-            <a:schemeClr val="accent1"/>
-          </a:effectRef>
-          <a:fontRef idx="minor">
-            <a:schemeClr val="lt1"/>
-          </a:fontRef>
-        </p:style>
-        <p:txBody>
-          <a:bodyPr rtlCol="0" anchor="ctr"/>
-          <a:lstStyle/>
-          <a:p>
-            <a:pPr algn="ctr"/>
-            <a:endParaRPr/>
-          </a:p>
-        </p:txBody>
-      </p:sp>
-      <p:sp>
-        <p:nvSpPr>
-          <p:cNvPr id="15" name="TextBox 14"/>
-          <p:cNvSpPr txBox="1"/>
-          <p:nvPr/>
-        </p:nvSpPr>
-        <p:spPr>
-          <a:xfrm>
-            <a:off x="8631936" y="1783080"/>
-            <a:ext cx="2514600" cy="685800"/>
-          </a:xfrm>
-          <a:prstGeom prst="rect">
-            <a:avLst/>
-          </a:prstGeom>
-          <a:noFill/>
-        </p:spPr>
-        <p:txBody>
-          <a:bodyPr wrap="square">
-            <a:spAutoFit/>
-          </a:bodyPr>
-          <a:lstStyle/>
-          <a:p>
-            <a:pPr algn="ctr"/>
-            <a:r>
-              <a:rPr sz="3200" b="1" i="0">
-                <a:solidFill>
-                  <a:srgbClr val="063D79"/>
-                </a:solidFill>
-                <a:latin typeface="Segoe UI"/>
-              </a:rPr>
-              <a:t>2</a:t>
-            </a:r>
-          </a:p>
-        </p:txBody>
-      </p:sp>
-      <p:sp>
-        <p:nvSpPr>
-          <p:cNvPr id="16" name="TextBox 15"/>
-          <p:cNvSpPr txBox="1"/>
-          <p:nvPr/>
-        </p:nvSpPr>
-        <p:spPr>
-          <a:xfrm>
-            <a:off x="8769096" y="2377440"/>
-            <a:ext cx="2240280" cy="457200"/>
-          </a:xfrm>
-          <a:prstGeom prst="rect">
-            <a:avLst/>
-          </a:prstGeom>
-          <a:noFill/>
-        </p:spPr>
-        <p:txBody>
-          <a:bodyPr wrap="square">
-            <a:spAutoFit/>
-          </a:bodyPr>
-          <a:lstStyle/>
-          <a:p>
-            <a:pPr algn="ctr"/>
-            <a:r>
-              <a:rPr sz="1250" b="0" i="0">
-                <a:solidFill>
-                  <a:srgbClr val="1A1A1A"/>
-                </a:solidFill>
-                <a:latin typeface="Segoe UI"/>
-              </a:rPr>
-              <a:t>platforms packaged</a:t>
-            </a:r>
-          </a:p>
-        </p:txBody>
-      </p:sp>
-      <p:graphicFrame>
-        <p:nvGraphicFramePr>
-          <p:cNvPr id="17" name="Chart 16"/>
-          <p:cNvGraphicFramePr>
-            <a:graphicFrameLocks noGrp="1"/>
-          </p:cNvGraphicFramePr>
-          <p:nvPr/>
-        </p:nvGraphicFramePr>
-        <p:xfrm>
-          <a:off x="731520" y="3246120"/>
-          <a:ext cx="5029200" cy="3200400"/>
-        </p:xfrm>
-        <a:graphic>
-          <a:graphicData uri="http://schemas.openxmlformats.org/drawingml/2006/chart">
-            <c:chart xmlns:c="http://schemas.openxmlformats.org/drawingml/2006/chart" xmlns:r="http://schemas.openxmlformats.org/officeDocument/2006/relationships" r:id="rId2"/>
-          </a:graphicData>
-        </a:graphic>
-      </p:graphicFrame>
-      <p:sp>
-        <p:nvSpPr>
-          <p:cNvPr id="18" name="Rounded Rectangle 17"/>
-          <p:cNvSpPr/>
-          <p:nvPr/>
-        </p:nvSpPr>
-        <p:spPr>
-          <a:xfrm>
-            <a:off x="6050280" y="3124200"/>
-            <a:ext cx="2968752" cy="2712720"/>
-          </a:xfrm>
-          <a:prstGeom prst="roundRect">
-            <a:avLst>
-              <a:gd name="adj" fmla="val 7000"/>
-            </a:avLst>
-          </a:prstGeom>
-          <a:solidFill>
-            <a:srgbClr val="FFFFFF"/>
-          </a:solidFill>
-          <a:ln w="12700">
-            <a:solidFill>
-              <a:srgbClr val="D8DADC"/>
-            </a:solidFill>
-          </a:ln>
-        </p:spPr>
-        <p:style>
-          <a:lnRef idx="1">
-            <a:schemeClr val="accent1"/>
-          </a:lnRef>
-          <a:fillRef idx="3">
-            <a:schemeClr val="accent1"/>
-          </a:fillRef>
-          <a:effectRef idx="2">
-            <a:schemeClr val="accent1"/>
-          </a:effectRef>
-          <a:fontRef idx="minor">
-            <a:schemeClr val="lt1"/>
-          </a:fontRef>
-        </p:style>
-        <p:txBody>
-          <a:bodyPr rtlCol="0" anchor="ctr"/>
-          <a:lstStyle/>
-          <a:p>
-            <a:pPr algn="ctr"/>
-            <a:endParaRPr/>
-          </a:p>
-        </p:txBody>
-      </p:sp>
-      <p:pic>
-        <p:nvPicPr>
-          <p:cNvPr id="19" name="Picture 18" descr="final_report.png"/>
-          <p:cNvPicPr>
-            <a:picLocks noChangeAspect="1"/>
-          </p:cNvPicPr>
-          <p:nvPr/>
-        </p:nvPicPr>
-        <p:blipFill>
-          <a:blip r:embed="rId3"/>
-          <a:stretch>
-            <a:fillRect/>
-          </a:stretch>
-        </p:blipFill>
-        <p:spPr>
-          <a:xfrm>
-            <a:off x="6126480" y="3200400"/>
-            <a:ext cx="2816352" cy="2560320"/>
-          </a:xfrm>
-          <a:prstGeom prst="rect">
-            <a:avLst/>
-          </a:prstGeom>
-        </p:spPr>
-      </p:pic>
-      <p:sp>
-        <p:nvSpPr>
-          <p:cNvPr id="20" name="TextBox 19"/>
-          <p:cNvSpPr txBox="1"/>
-          <p:nvPr/>
-        </p:nvSpPr>
-        <p:spPr>
-          <a:xfrm>
-            <a:off x="6126480" y="5862320"/>
-            <a:ext cx="5394960" cy="365760"/>
-          </a:xfrm>
-          <a:prstGeom prst="rect">
-            <a:avLst/>
-          </a:prstGeom>
-          <a:noFill/>
-        </p:spPr>
-        <p:txBody>
-          <a:bodyPr wrap="square">
-            <a:spAutoFit/>
-          </a:bodyPr>
-          <a:lstStyle/>
-          <a:p>
-            <a:pPr algn="ctr"/>
-            <a:r>
-              <a:rPr sz="1250" b="0" i="1">
-                <a:solidFill>
-                  <a:srgbClr val="3F3F3F"/>
-                </a:solidFill>
-                <a:latin typeface="Segoe UI"/>
-              </a:rPr>
-              <a:t>100% sovereignty score — real restore, 3,344 files</a:t>
-            </a:r>
-          </a:p>
-        </p:txBody>
-      </p:sp>
-    </p:spTree>
-  </p:cSld>
-  <p:clrMapOvr>
-    <a:masterClrMapping/>
-  </p:clrMapOvr>
-</p:sld>
-</file>
-
 <file path=ppt/slides/slide24.xml><?xml version="1.0" encoding="utf-8"?>
 <p:sld xmlns:a="http://schemas.openxmlformats.org/drawingml/2006/main" xmlns:r="http://schemas.openxmlformats.org/officeDocument/2006/relationships" xmlns:p="http://schemas.openxmlformats.org/presentationml/2006/main">
   <p:cSld>
@@ -24235,7 +23270,7 @@
 </file>
 
 <file path=ppt/slides/slide9.xml><?xml version="1.0" encoding="utf-8"?>
-<p:sld xmlns:a="http://schemas.openxmlformats.org/drawingml/2006/main" xmlns:p="http://schemas.openxmlformats.org/presentationml/2006/main" xmlns:r="http://schemas.openxmlformats.org/officeDocument/2006/relationships">
+<p:sld xmlns:a="http://schemas.openxmlformats.org/drawingml/2006/main" xmlns:r="http://schemas.openxmlformats.org/officeDocument/2006/relationships" xmlns:p="http://schemas.openxmlformats.org/presentationml/2006/main">
   <p:cSld>
     <p:spTree>
       <p:nvGrpSpPr>
@@ -24243,7 +23278,14 @@
         <p:cNvGrpSpPr/>
         <p:nvPr/>
       </p:nvGrpSpPr>
-      <p:grpSpPr/>
+      <p:grpSpPr>
+        <a:xfrm>
+          <a:off x="0" y="0"/>
+          <a:ext cx="0" cy="0"/>
+          <a:chOff x="0" y="0"/>
+          <a:chExt cx="0" cy="0"/>
+        </a:xfrm>
+      </p:grpSpPr>
       <p:sp>
         <p:nvSpPr>
           <p:cNvPr id="2" name="TextBox 1"/>
@@ -24355,6 +23397,7 @@
           <a:lstStyle/>
           <a:p>
             <a:pPr algn="ctr"/>
+            <a:endParaRPr/>
           </a:p>
         </p:txBody>
       </p:sp>
